--- a/presentation/llm-wiki-deck.pptx
+++ b/presentation/llm-wiki-deck.pptx
@@ -865,101 +865,106 @@
           <a:p/>
           <a:p>
             <a:r>
-              <a:t>The system works with both Claude Code CLI and GitHub Copilot Chat — use whichever you already have.</a:t>
+              <a:t>The system works with both Claude Code CLI and GitHub Copilot Chat.</a:t>
             </a:r>
           </a:p>
           <a:p/>
           <a:p>
             <a:r>
-              <a:t>Claude Code CLI (run in terminal with the `claude` command):</a:t>
-            </a:r>
-          </a:p>
-          <a:p>
-            <a:r>
-              <a:t>• /compile-papers — core command; reads everything in /raw and creates wiki pages</a:t>
-            </a:r>
-          </a:p>
-          <a:p>
-            <a:r>
-              <a:t>• /sync-wiki — use when you add new papers; detects what's new, updates without clobbering existing content</a:t>
-            </a:r>
-          </a:p>
-          <a:p>
-            <a:r>
-              <a:t>• /audit-wiki — run every ~20 pages to catch quality issues</a:t>
-            </a:r>
-          </a:p>
-          <a:p>
-            <a:r>
-              <a:t>• /reset-wiki — for starting fresh with a new topic area</a:t>
-            </a:r>
-          </a:p>
-          <a:p>
-            <a:r>
-              <a:t>• /launch-wiki-ui — starts the Streamlit web app locally</a:t>
-            </a:r>
-          </a:p>
-          <a:p>
-            <a:r>
-              <a:t>• /stop-wiki-ui — stops the running Streamlit process</a:t>
-            </a:r>
-          </a:p>
-          <a:p>
-            <a:r>
-              <a:t>• /sync-docs — updates README, GitHub Pages, and sub-READMEs after code changes</a:t>
-            </a:r>
-          </a:p>
-          <a:p>
-            <a:r>
-              <a:t>• /run-maintenance — runs tests, verifies all skills registered, checks wiki and git health</a:t>
+              <a:t>WIKI SKILLS (orange = Claude / blue = Copilot) — the core wiki workflow:</a:t>
+            </a:r>
+          </a:p>
+          <a:p>
+            <a:r>
+              <a:t>• compile-papers — reads everything in /raw and creates wiki pages from scratch</a:t>
+            </a:r>
+          </a:p>
+          <a:p>
+            <a:r>
+              <a:t>• sync-wiki — use when you add new papers; detects what's new, updates without clobbering</a:t>
+            </a:r>
+          </a:p>
+          <a:p>
+            <a:r>
+              <a:t>• audit-wiki — run every ~20 pages to catch orphans, missing links, contradictions</a:t>
+            </a:r>
+          </a:p>
+          <a:p>
+            <a:r>
+              <a:t>• reset-wiki — wipe wiki for a fresh start with new topic area</a:t>
+            </a:r>
+          </a:p>
+          <a:p>
+            <a:r>
+              <a:t>• launch-wiki-ui — starts the Streamlit web app locally</a:t>
+            </a:r>
+          </a:p>
+          <a:p>
+            <a:r>
+              <a:t>• stop-wiki-ui — stops the running Streamlit process</a:t>
             </a:r>
           </a:p>
           <a:p/>
           <a:p>
             <a:r>
-              <a:t>GitHub Copilot Chat equivalents (identical commands, same skill files, different tool surface):</a:t>
-            </a:r>
-          </a:p>
-          <a:p>
-            <a:r>
-              <a:t>• /Compile Papers to Wiki, /Sync Wiki from Raw, /Audit Wiki, /Reset Wiki</a:t>
-            </a:r>
-          </a:p>
-          <a:p>
-            <a:r>
-              <a:t>• /Launch Wiki UI, /Stop Wiki UI, /Sync Docs, /Run Maintenance</a:t>
+              <a:t>REPO MAINTENANCE (purple, both tools) — separate from wiki operations:</a:t>
+            </a:r>
+          </a:p>
+          <a:p>
+            <a:r>
+              <a:t>• sync-docs — keeps README, GitHub Pages, and copilot-instructions in sync after code changes</a:t>
+            </a:r>
+          </a:p>
+          <a:p>
+            <a:r>
+              <a:t>• run-maintenance — full health check: runs tests, verifies skill registration, checks wiki + git state</a:t>
+            </a:r>
+          </a:p>
+          <a:p>
+            <a:r>
+              <a:t>• regenerate-presentation — rebuilds demo videos and this deck; detects changed scripts via git</a:t>
             </a:r>
           </a:p>
           <a:p/>
           <a:p>
             <a:r>
-              <a:t>The Streamlit Query UI is a secure web app where you can:</a:t>
-            </a:r>
-          </a:p>
-          <a:p>
-            <a:r>
-              <a:t>  • Enter your API key (never saved to disk — lives only in browser session memory)</a:t>
-            </a:r>
-          </a:p>
-          <a:p>
-            <a:r>
-              <a:t>  • Browse all wiki pages and see what's covered</a:t>
-            </a:r>
-          </a:p>
-          <a:p>
-            <a:r>
-              <a:t>  • Ask natural-language questions → Claude answers from wiki content only</a:t>
-            </a:r>
-          </a:p>
-          <a:p>
-            <a:r>
-              <a:t>  • Track token usage and cache performance</a:t>
+              <a:t>GitHub Copilot Chat equivalents (same skill files, natural language — no slash prefix):</a:t>
+            </a:r>
+          </a:p>
+          <a:p>
+            <a:r>
+              <a:t>• Compile Papers to Wiki, Sync Wiki from Raw, Audit Wiki, Reset Wiki, Launch Wiki UI, Stop Wiki UI</a:t>
+            </a:r>
+          </a:p>
+          <a:p>
+            <a:r>
+              <a:t>• Sync Docs, Run Maintenance, Regenerate Presentation</a:t>
             </a:r>
           </a:p>
           <a:p/>
           <a:p>
             <a:r>
-              <a:t>Crucially: if you ask about a topic not in the wiki, the UI returns an explicit "No information found" message with instructions to add sources. This is intentional — you always know the boundaries of your knowledge base.</a:t>
+              <a:t>The Streamlit Query UI is a multi-provider web app:</a:t>
+            </a:r>
+          </a:p>
+          <a:p>
+            <a:r>
+              <a:t>  • Supports Anthropic, OpenAI, Google, Mistral, Cohere — enter any model ID + API key</a:t>
+            </a:r>
+          </a:p>
+          <a:p>
+            <a:r>
+              <a:t>  • Answers grounded strictly in wiki content (no hallucination outside wiki)</a:t>
+            </a:r>
+          </a:p>
+          <a:p>
+            <a:r>
+              <a:t>  • API key lives only in browser session memory — never written to disk</a:t>
+            </a:r>
+          </a:p>
+          <a:p>
+            <a:r>
+              <a:t>  • Explicit "No information found" when a topic isn't in the wiki — you always know your boundaries</a:t>
             </a:r>
           </a:p>
           <a:p/>
@@ -1057,17 +1062,17 @@
           </a:p>
           <a:p>
             <a:r>
-              <a:t>  2. /compile-papers — scanning /raw, extracting concepts, creating 34 entity pages</a:t>
-            </a:r>
-          </a:p>
-          <a:p>
-            <a:r>
-              <a:t>  3. /sync-wiki — detecting a new file, updating existing pages, creating new ones</a:t>
-            </a:r>
-          </a:p>
-          <a:p>
-            <a:r>
-              <a:t>  4. /audit-wiki — finding 2 orphans, 3 missing pages, 1 contradiction</a:t>
+              <a:t>  2. /compile-papers — scanning 9 /raw sources, creating 37 entity pages</a:t>
+            </a:r>
+          </a:p>
+          <a:p>
+            <a:r>
+              <a:t>  3. /sync-wiki — all 9 sources already compiled; wiki is up to date</a:t>
+            </a:r>
+          </a:p>
+          <a:p>
+            <a:r>
+              <a:t>  4. /audit-wiki — 37 pages, 252 links resolved, 0 orphans, 0 missing, 0 contradictions</a:t>
             </a:r>
           </a:p>
           <a:p>
@@ -1114,7 +1119,7 @@
           </a:p>
           <a:p>
             <a:r>
-              <a:t>  • Terminal: minutes from raw papers to 34 interconnected wiki pages</a:t>
+              <a:t>  • Terminal: minutes from raw papers to 37 interconnected wiki pages</a:t>
             </a:r>
           </a:p>
           <a:p>
@@ -8057,7 +8062,7 @@
         <p:spPr>
           <a:xfrm>
             <a:off x="502920" y="1371600"/>
-            <a:ext cx="5257800" cy="4160520"/>
+            <a:ext cx="5230368" cy="4069080"/>
           </a:xfrm>
           <a:prstGeom prst="roundRect">
             <a:avLst/>
@@ -8102,7 +8107,7 @@
         <p:spPr>
           <a:xfrm>
             <a:off x="502920" y="1371600"/>
-            <a:ext cx="5257800" cy="64008"/>
+            <a:ext cx="5230368" cy="64008"/>
           </a:xfrm>
           <a:prstGeom prst="rect">
             <a:avLst/>
@@ -8144,8 +8149,8 @@
         </p:nvSpPr>
         <p:spPr>
           <a:xfrm>
-            <a:off x="502920" y="1463040"/>
-            <a:ext cx="5257800" cy="402336"/>
+            <a:off x="502920" y="1435608"/>
+            <a:ext cx="5230368" cy="329184"/>
           </a:xfrm>
           <a:prstGeom prst="rect">
             <a:avLst/>
@@ -8159,7 +8164,7 @@
           <a:lstStyle/>
           <a:p>
             <a:pPr algn="ctr">
-              <a:defRPr sz="1300" b="1">
+              <a:defRPr sz="1200" b="1">
                 <a:solidFill>
                   <a:srgbClr val="F59E0B"/>
                 </a:solidFill>
@@ -8180,8 +8185,8 @@
         </p:nvSpPr>
         <p:spPr>
           <a:xfrm>
-            <a:off x="685800" y="2029968"/>
-            <a:ext cx="1965960" cy="329184"/>
+            <a:off x="640080" y="1810512"/>
+            <a:ext cx="1828800" cy="182880"/>
           </a:xfrm>
           <a:prstGeom prst="rect">
             <a:avLst/>
@@ -8195,10 +8200,46 @@
           <a:lstStyle/>
           <a:p>
             <a:pPr algn="l">
-              <a:defRPr sz="1200" b="1">
+              <a:defRPr sz="900" b="1">
                 <a:solidFill>
                   <a:srgbClr val="F59E0B"/>
                 </a:solidFill>
+                <a:latin typeface="Calibri"/>
+              </a:defRPr>
+            </a:pPr>
+            <a:r>
+              <a:t>WIKI SKILLS</a:t>
+            </a:r>
+          </a:p>
+        </p:txBody>
+      </p:sp>
+      <p:sp>
+        <p:nvSpPr>
+          <p:cNvPr id="8" name="TextBox 7"/>
+          <p:cNvSpPr txBox="1"/>
+          <p:nvPr/>
+        </p:nvSpPr>
+        <p:spPr>
+          <a:xfrm>
+            <a:off x="640080" y="2002536"/>
+            <a:ext cx="1920240" cy="310896"/>
+          </a:xfrm>
+          <a:prstGeom prst="rect">
+            <a:avLst/>
+          </a:prstGeom>
+          <a:noFill/>
+        </p:spPr>
+        <p:txBody>
+          <a:bodyPr wrap="square">
+            <a:spAutoFit/>
+          </a:bodyPr>
+          <a:lstStyle/>
+          <a:p>
+            <a:pPr algn="l">
+              <a:defRPr sz="1000" b="1">
+                <a:solidFill>
+                  <a:srgbClr val="F59E0B"/>
+                </a:solidFill>
                 <a:latin typeface="Courier New"/>
               </a:defRPr>
             </a:pPr>
@@ -8210,14 +8251,14 @@
       </p:sp>
       <p:sp>
         <p:nvSpPr>
-          <p:cNvPr id="8" name="TextBox 7"/>
-          <p:cNvSpPr txBox="1"/>
-          <p:nvPr/>
-        </p:nvSpPr>
-        <p:spPr>
-          <a:xfrm>
-            <a:off x="2788920" y="2029968"/>
-            <a:ext cx="2697480" cy="329184"/>
+          <p:cNvPr id="9" name="TextBox 8"/>
+          <p:cNvSpPr txBox="1"/>
+          <p:nvPr/>
+        </p:nvSpPr>
+        <p:spPr>
+          <a:xfrm>
+            <a:off x="2679192" y="2002536"/>
+            <a:ext cx="2944368" cy="310896"/>
           </a:xfrm>
           <a:prstGeom prst="rect">
             <a:avLst/>
@@ -8231,7 +8272,7 @@
           <a:lstStyle/>
           <a:p>
             <a:pPr algn="l">
-              <a:defRPr sz="1100" b="0">
+              <a:defRPr sz="1000" b="0">
                 <a:solidFill>
                   <a:srgbClr val="C4D4EE"/>
                 </a:solidFill>
@@ -8246,14 +8287,14 @@
       </p:sp>
       <p:sp>
         <p:nvSpPr>
-          <p:cNvPr id="9" name="TextBox 8"/>
-          <p:cNvSpPr txBox="1"/>
-          <p:nvPr/>
-        </p:nvSpPr>
-        <p:spPr>
-          <a:xfrm>
-            <a:off x="685800" y="2468880"/>
-            <a:ext cx="1965960" cy="329184"/>
+          <p:cNvPr id="10" name="TextBox 9"/>
+          <p:cNvSpPr txBox="1"/>
+          <p:nvPr/>
+        </p:nvSpPr>
+        <p:spPr>
+          <a:xfrm>
+            <a:off x="640080" y="2340864"/>
+            <a:ext cx="1920240" cy="310896"/>
           </a:xfrm>
           <a:prstGeom prst="rect">
             <a:avLst/>
@@ -8267,7 +8308,7 @@
           <a:lstStyle/>
           <a:p>
             <a:pPr algn="l">
-              <a:defRPr sz="1200" b="1">
+              <a:defRPr sz="1000" b="1">
                 <a:solidFill>
                   <a:srgbClr val="F59E0B"/>
                 </a:solidFill>
@@ -8282,14 +8323,14 @@
       </p:sp>
       <p:sp>
         <p:nvSpPr>
-          <p:cNvPr id="10" name="TextBox 9"/>
-          <p:cNvSpPr txBox="1"/>
-          <p:nvPr/>
-        </p:nvSpPr>
-        <p:spPr>
-          <a:xfrm>
-            <a:off x="2788920" y="2468880"/>
-            <a:ext cx="2697480" cy="329184"/>
+          <p:cNvPr id="11" name="TextBox 10"/>
+          <p:cNvSpPr txBox="1"/>
+          <p:nvPr/>
+        </p:nvSpPr>
+        <p:spPr>
+          <a:xfrm>
+            <a:off x="2679192" y="2340864"/>
+            <a:ext cx="2944368" cy="310896"/>
           </a:xfrm>
           <a:prstGeom prst="rect">
             <a:avLst/>
@@ -8303,7 +8344,7 @@
           <a:lstStyle/>
           <a:p>
             <a:pPr algn="l">
-              <a:defRPr sz="1100" b="0">
+              <a:defRPr sz="1000" b="0">
                 <a:solidFill>
                   <a:srgbClr val="C4D4EE"/>
                 </a:solidFill>
@@ -8318,14 +8359,14 @@
       </p:sp>
       <p:sp>
         <p:nvSpPr>
-          <p:cNvPr id="11" name="TextBox 10"/>
-          <p:cNvSpPr txBox="1"/>
-          <p:nvPr/>
-        </p:nvSpPr>
-        <p:spPr>
-          <a:xfrm>
-            <a:off x="685800" y="2907792"/>
-            <a:ext cx="1965960" cy="329184"/>
+          <p:cNvPr id="12" name="TextBox 11"/>
+          <p:cNvSpPr txBox="1"/>
+          <p:nvPr/>
+        </p:nvSpPr>
+        <p:spPr>
+          <a:xfrm>
+            <a:off x="640080" y="2679192"/>
+            <a:ext cx="1920240" cy="310896"/>
           </a:xfrm>
           <a:prstGeom prst="rect">
             <a:avLst/>
@@ -8339,7 +8380,7 @@
           <a:lstStyle/>
           <a:p>
             <a:pPr algn="l">
-              <a:defRPr sz="1200" b="1">
+              <a:defRPr sz="1000" b="1">
                 <a:solidFill>
                   <a:srgbClr val="F59E0B"/>
                 </a:solidFill>
@@ -8354,14 +8395,14 @@
       </p:sp>
       <p:sp>
         <p:nvSpPr>
-          <p:cNvPr id="12" name="TextBox 11"/>
-          <p:cNvSpPr txBox="1"/>
-          <p:nvPr/>
-        </p:nvSpPr>
-        <p:spPr>
-          <a:xfrm>
-            <a:off x="2788920" y="2907792"/>
-            <a:ext cx="2697480" cy="329184"/>
+          <p:cNvPr id="13" name="TextBox 12"/>
+          <p:cNvSpPr txBox="1"/>
+          <p:nvPr/>
+        </p:nvSpPr>
+        <p:spPr>
+          <a:xfrm>
+            <a:off x="2679192" y="2679192"/>
+            <a:ext cx="2944368" cy="310896"/>
           </a:xfrm>
           <a:prstGeom prst="rect">
             <a:avLst/>
@@ -8375,7 +8416,7 @@
           <a:lstStyle/>
           <a:p>
             <a:pPr algn="l">
-              <a:defRPr sz="1100" b="0">
+              <a:defRPr sz="1000" b="0">
                 <a:solidFill>
                   <a:srgbClr val="C4D4EE"/>
                 </a:solidFill>
@@ -8390,14 +8431,14 @@
       </p:sp>
       <p:sp>
         <p:nvSpPr>
-          <p:cNvPr id="13" name="TextBox 12"/>
-          <p:cNvSpPr txBox="1"/>
-          <p:nvPr/>
-        </p:nvSpPr>
-        <p:spPr>
-          <a:xfrm>
-            <a:off x="685800" y="3346704"/>
-            <a:ext cx="1965960" cy="329184"/>
+          <p:cNvPr id="14" name="TextBox 13"/>
+          <p:cNvSpPr txBox="1"/>
+          <p:nvPr/>
+        </p:nvSpPr>
+        <p:spPr>
+          <a:xfrm>
+            <a:off x="640080" y="3017520"/>
+            <a:ext cx="1920240" cy="310896"/>
           </a:xfrm>
           <a:prstGeom prst="rect">
             <a:avLst/>
@@ -8411,7 +8452,7 @@
           <a:lstStyle/>
           <a:p>
             <a:pPr algn="l">
-              <a:defRPr sz="1200" b="1">
+              <a:defRPr sz="1000" b="1">
                 <a:solidFill>
                   <a:srgbClr val="F59E0B"/>
                 </a:solidFill>
@@ -8426,14 +8467,14 @@
       </p:sp>
       <p:sp>
         <p:nvSpPr>
-          <p:cNvPr id="14" name="TextBox 13"/>
-          <p:cNvSpPr txBox="1"/>
-          <p:nvPr/>
-        </p:nvSpPr>
-        <p:spPr>
-          <a:xfrm>
-            <a:off x="2788920" y="3346704"/>
-            <a:ext cx="2697480" cy="329184"/>
+          <p:cNvPr id="15" name="TextBox 14"/>
+          <p:cNvSpPr txBox="1"/>
+          <p:nvPr/>
+        </p:nvSpPr>
+        <p:spPr>
+          <a:xfrm>
+            <a:off x="2679192" y="3017520"/>
+            <a:ext cx="2944368" cy="310896"/>
           </a:xfrm>
           <a:prstGeom prst="rect">
             <a:avLst/>
@@ -8447,7 +8488,7 @@
           <a:lstStyle/>
           <a:p>
             <a:pPr algn="l">
-              <a:defRPr sz="1100" b="0">
+              <a:defRPr sz="1000" b="0">
                 <a:solidFill>
                   <a:srgbClr val="C4D4EE"/>
                 </a:solidFill>
@@ -8462,14 +8503,14 @@
       </p:sp>
       <p:sp>
         <p:nvSpPr>
-          <p:cNvPr id="15" name="TextBox 14"/>
-          <p:cNvSpPr txBox="1"/>
-          <p:nvPr/>
-        </p:nvSpPr>
-        <p:spPr>
-          <a:xfrm>
-            <a:off x="685800" y="3785616"/>
-            <a:ext cx="1965960" cy="329184"/>
+          <p:cNvPr id="16" name="TextBox 15"/>
+          <p:cNvSpPr txBox="1"/>
+          <p:nvPr/>
+        </p:nvSpPr>
+        <p:spPr>
+          <a:xfrm>
+            <a:off x="640080" y="3355848"/>
+            <a:ext cx="1920240" cy="310896"/>
           </a:xfrm>
           <a:prstGeom prst="rect">
             <a:avLst/>
@@ -8483,7 +8524,7 @@
           <a:lstStyle/>
           <a:p>
             <a:pPr algn="l">
-              <a:defRPr sz="1200" b="1">
+              <a:defRPr sz="1000" b="1">
                 <a:solidFill>
                   <a:srgbClr val="F59E0B"/>
                 </a:solidFill>
@@ -8498,14 +8539,14 @@
       </p:sp>
       <p:sp>
         <p:nvSpPr>
-          <p:cNvPr id="16" name="TextBox 15"/>
-          <p:cNvSpPr txBox="1"/>
-          <p:nvPr/>
-        </p:nvSpPr>
-        <p:spPr>
-          <a:xfrm>
-            <a:off x="2788920" y="3785616"/>
-            <a:ext cx="2697480" cy="329184"/>
+          <p:cNvPr id="17" name="TextBox 16"/>
+          <p:cNvSpPr txBox="1"/>
+          <p:nvPr/>
+        </p:nvSpPr>
+        <p:spPr>
+          <a:xfrm>
+            <a:off x="2679192" y="3355848"/>
+            <a:ext cx="2944368" cy="310896"/>
           </a:xfrm>
           <a:prstGeom prst="rect">
             <a:avLst/>
@@ -8519,7 +8560,7 @@
           <a:lstStyle/>
           <a:p>
             <a:pPr algn="l">
-              <a:defRPr sz="1100" b="0">
+              <a:defRPr sz="1000" b="0">
                 <a:solidFill>
                   <a:srgbClr val="C4D4EE"/>
                 </a:solidFill>
@@ -8534,14 +8575,14 @@
       </p:sp>
       <p:sp>
         <p:nvSpPr>
-          <p:cNvPr id="17" name="TextBox 16"/>
-          <p:cNvSpPr txBox="1"/>
-          <p:nvPr/>
-        </p:nvSpPr>
-        <p:spPr>
-          <a:xfrm>
-            <a:off x="685800" y="4224528"/>
-            <a:ext cx="1965960" cy="329184"/>
+          <p:cNvPr id="18" name="TextBox 17"/>
+          <p:cNvSpPr txBox="1"/>
+          <p:nvPr/>
+        </p:nvSpPr>
+        <p:spPr>
+          <a:xfrm>
+            <a:off x="640080" y="3694176"/>
+            <a:ext cx="1920240" cy="310896"/>
           </a:xfrm>
           <a:prstGeom prst="rect">
             <a:avLst/>
@@ -8555,7 +8596,7 @@
           <a:lstStyle/>
           <a:p>
             <a:pPr algn="l">
-              <a:defRPr sz="1200" b="1">
+              <a:defRPr sz="1000" b="1">
                 <a:solidFill>
                   <a:srgbClr val="F59E0B"/>
                 </a:solidFill>
@@ -8570,14 +8611,14 @@
       </p:sp>
       <p:sp>
         <p:nvSpPr>
-          <p:cNvPr id="18" name="TextBox 17"/>
-          <p:cNvSpPr txBox="1"/>
-          <p:nvPr/>
-        </p:nvSpPr>
-        <p:spPr>
-          <a:xfrm>
-            <a:off x="2788920" y="4224528"/>
-            <a:ext cx="2697480" cy="329184"/>
+          <p:cNvPr id="19" name="TextBox 18"/>
+          <p:cNvSpPr txBox="1"/>
+          <p:nvPr/>
+        </p:nvSpPr>
+        <p:spPr>
+          <a:xfrm>
+            <a:off x="2679192" y="3694176"/>
+            <a:ext cx="2944368" cy="310896"/>
           </a:xfrm>
           <a:prstGeom prst="rect">
             <a:avLst/>
@@ -8591,7 +8632,7 @@
           <a:lstStyle/>
           <a:p>
             <a:pPr algn="l">
-              <a:defRPr sz="1100" b="0">
+              <a:defRPr sz="1000" b="0">
                 <a:solidFill>
                   <a:srgbClr val="C4D4EE"/>
                 </a:solidFill>
@@ -8606,14 +8647,57 @@
       </p:sp>
       <p:sp>
         <p:nvSpPr>
-          <p:cNvPr id="19" name="TextBox 18"/>
-          <p:cNvSpPr txBox="1"/>
-          <p:nvPr/>
-        </p:nvSpPr>
-        <p:spPr>
-          <a:xfrm>
-            <a:off x="685800" y="4663440"/>
-            <a:ext cx="1965960" cy="329184"/>
+          <p:cNvPr id="20" name="Rectangle 19"/>
+          <p:cNvSpPr/>
+          <p:nvPr/>
+        </p:nvSpPr>
+        <p:spPr>
+          <a:xfrm>
+            <a:off x="640080" y="4069080"/>
+            <a:ext cx="4956048" cy="12700"/>
+          </a:xfrm>
+          <a:prstGeom prst="rect">
+            <a:avLst/>
+          </a:prstGeom>
+          <a:solidFill>
+            <a:srgbClr val="233764"/>
+          </a:solidFill>
+          <a:ln>
+            <a:noFill/>
+          </a:ln>
+        </p:spPr>
+        <p:style>
+          <a:lnRef idx="1">
+            <a:schemeClr val="accent1"/>
+          </a:lnRef>
+          <a:fillRef idx="3">
+            <a:schemeClr val="accent1"/>
+          </a:fillRef>
+          <a:effectRef idx="2">
+            <a:schemeClr val="accent1"/>
+          </a:effectRef>
+          <a:fontRef idx="minor">
+            <a:schemeClr val="lt1"/>
+          </a:fontRef>
+        </p:style>
+        <p:txBody>
+          <a:bodyPr rtlCol="0" anchor="ctr"/>
+          <a:lstStyle/>
+          <a:p>
+            <a:pPr algn="ctr"/>
+          </a:p>
+        </p:txBody>
+      </p:sp>
+      <p:sp>
+        <p:nvSpPr>
+          <p:cNvPr id="21" name="TextBox 20"/>
+          <p:cNvSpPr txBox="1"/>
+          <p:nvPr/>
+        </p:nvSpPr>
+        <p:spPr>
+          <a:xfrm>
+            <a:off x="640080" y="4142232"/>
+            <a:ext cx="2011680" cy="182880"/>
           </a:xfrm>
           <a:prstGeom prst="rect">
             <a:avLst/>
@@ -8627,9 +8711,45 @@
           <a:lstStyle/>
           <a:p>
             <a:pPr algn="l">
-              <a:defRPr sz="1200" b="1">
-                <a:solidFill>
-                  <a:srgbClr val="F59E0B"/>
+              <a:defRPr sz="900" b="1">
+                <a:solidFill>
+                  <a:srgbClr val="8B5CF6"/>
+                </a:solidFill>
+                <a:latin typeface="Calibri"/>
+              </a:defRPr>
+            </a:pPr>
+            <a:r>
+              <a:t>REPO MAINTENANCE</a:t>
+            </a:r>
+          </a:p>
+        </p:txBody>
+      </p:sp>
+      <p:sp>
+        <p:nvSpPr>
+          <p:cNvPr id="22" name="TextBox 21"/>
+          <p:cNvSpPr txBox="1"/>
+          <p:nvPr/>
+        </p:nvSpPr>
+        <p:spPr>
+          <a:xfrm>
+            <a:off x="640080" y="4343400"/>
+            <a:ext cx="1920240" cy="310896"/>
+          </a:xfrm>
+          <a:prstGeom prst="rect">
+            <a:avLst/>
+          </a:prstGeom>
+          <a:noFill/>
+        </p:spPr>
+        <p:txBody>
+          <a:bodyPr wrap="square">
+            <a:spAutoFit/>
+          </a:bodyPr>
+          <a:lstStyle/>
+          <a:p>
+            <a:pPr algn="l">
+              <a:defRPr sz="1000" b="1">
+                <a:solidFill>
+                  <a:srgbClr val="8B5CF6"/>
                 </a:solidFill>
                 <a:latin typeface="Courier New"/>
               </a:defRPr>
@@ -8642,14 +8762,14 @@
       </p:sp>
       <p:sp>
         <p:nvSpPr>
-          <p:cNvPr id="20" name="TextBox 19"/>
-          <p:cNvSpPr txBox="1"/>
-          <p:nvPr/>
-        </p:nvSpPr>
-        <p:spPr>
-          <a:xfrm>
-            <a:off x="2788920" y="4663440"/>
-            <a:ext cx="2697480" cy="329184"/>
+          <p:cNvPr id="23" name="TextBox 22"/>
+          <p:cNvSpPr txBox="1"/>
+          <p:nvPr/>
+        </p:nvSpPr>
+        <p:spPr>
+          <a:xfrm>
+            <a:off x="2679192" y="4343400"/>
+            <a:ext cx="2944368" cy="310896"/>
           </a:xfrm>
           <a:prstGeom prst="rect">
             <a:avLst/>
@@ -8663,7 +8783,7 @@
           <a:lstStyle/>
           <a:p>
             <a:pPr algn="l">
-              <a:defRPr sz="1100" b="0">
+              <a:defRPr sz="1000" b="0">
                 <a:solidFill>
                   <a:srgbClr val="C4D4EE"/>
                 </a:solidFill>
@@ -8671,21 +8791,21 @@
               </a:defRPr>
             </a:pPr>
             <a:r>
-              <a:t>Update README, GitHub Pages, sub-READMEs</a:t>
-            </a:r>
-          </a:p>
-        </p:txBody>
-      </p:sp>
-      <p:sp>
-        <p:nvSpPr>
-          <p:cNvPr id="21" name="TextBox 20"/>
-          <p:cNvSpPr txBox="1"/>
-          <p:nvPr/>
-        </p:nvSpPr>
-        <p:spPr>
-          <a:xfrm>
-            <a:off x="685800" y="5102352"/>
-            <a:ext cx="1965960" cy="329184"/>
+              <a:t>Sync README, GitHub Pages, sub-READMEs</a:t>
+            </a:r>
+          </a:p>
+        </p:txBody>
+      </p:sp>
+      <p:sp>
+        <p:nvSpPr>
+          <p:cNvPr id="24" name="TextBox 23"/>
+          <p:cNvSpPr txBox="1"/>
+          <p:nvPr/>
+        </p:nvSpPr>
+        <p:spPr>
+          <a:xfrm>
+            <a:off x="640080" y="4681728"/>
+            <a:ext cx="1920240" cy="310896"/>
           </a:xfrm>
           <a:prstGeom prst="rect">
             <a:avLst/>
@@ -8699,9 +8819,9 @@
           <a:lstStyle/>
           <a:p>
             <a:pPr algn="l">
-              <a:defRPr sz="1200" b="1">
-                <a:solidFill>
-                  <a:srgbClr val="F59E0B"/>
+              <a:defRPr sz="1000" b="1">
+                <a:solidFill>
+                  <a:srgbClr val="8B5CF6"/>
                 </a:solidFill>
                 <a:latin typeface="Courier New"/>
               </a:defRPr>
@@ -8714,14 +8834,14 @@
       </p:sp>
       <p:sp>
         <p:nvSpPr>
-          <p:cNvPr id="22" name="TextBox 21"/>
-          <p:cNvSpPr txBox="1"/>
-          <p:nvPr/>
-        </p:nvSpPr>
-        <p:spPr>
-          <a:xfrm>
-            <a:off x="2788920" y="5102352"/>
-            <a:ext cx="2697480" cy="329184"/>
+          <p:cNvPr id="25" name="TextBox 24"/>
+          <p:cNvSpPr txBox="1"/>
+          <p:nvPr/>
+        </p:nvSpPr>
+        <p:spPr>
+          <a:xfrm>
+            <a:off x="2679192" y="4681728"/>
+            <a:ext cx="2944368" cy="310896"/>
           </a:xfrm>
           <a:prstGeom prst="rect">
             <a:avLst/>
@@ -8735,7 +8855,7 @@
           <a:lstStyle/>
           <a:p>
             <a:pPr algn="l">
-              <a:defRPr sz="1100" b="0">
+              <a:defRPr sz="1000" b="0">
                 <a:solidFill>
                   <a:srgbClr val="C4D4EE"/>
                 </a:solidFill>
@@ -8743,21 +8863,93 @@
               </a:defRPr>
             </a:pPr>
             <a:r>
-              <a:t>Run tests, verify skills, check git health</a:t>
-            </a:r>
-          </a:p>
-        </p:txBody>
-      </p:sp>
-      <p:sp>
-        <p:nvSpPr>
-          <p:cNvPr id="23" name="Rounded Rectangle 22"/>
+              <a:t>Run tests, verify skills, git health</a:t>
+            </a:r>
+          </a:p>
+        </p:txBody>
+      </p:sp>
+      <p:sp>
+        <p:nvSpPr>
+          <p:cNvPr id="26" name="TextBox 25"/>
+          <p:cNvSpPr txBox="1"/>
+          <p:nvPr/>
+        </p:nvSpPr>
+        <p:spPr>
+          <a:xfrm>
+            <a:off x="640080" y="5020056"/>
+            <a:ext cx="1920240" cy="310896"/>
+          </a:xfrm>
+          <a:prstGeom prst="rect">
+            <a:avLst/>
+          </a:prstGeom>
+          <a:noFill/>
+        </p:spPr>
+        <p:txBody>
+          <a:bodyPr wrap="square">
+            <a:spAutoFit/>
+          </a:bodyPr>
+          <a:lstStyle/>
+          <a:p>
+            <a:pPr algn="l">
+              <a:defRPr sz="1000" b="1">
+                <a:solidFill>
+                  <a:srgbClr val="8B5CF6"/>
+                </a:solidFill>
+                <a:latin typeface="Courier New"/>
+              </a:defRPr>
+            </a:pPr>
+            <a:r>
+              <a:t>/regenerate-presentation</a:t>
+            </a:r>
+          </a:p>
+        </p:txBody>
+      </p:sp>
+      <p:sp>
+        <p:nvSpPr>
+          <p:cNvPr id="27" name="TextBox 26"/>
+          <p:cNvSpPr txBox="1"/>
+          <p:nvPr/>
+        </p:nvSpPr>
+        <p:spPr>
+          <a:xfrm>
+            <a:off x="2679192" y="5020056"/>
+            <a:ext cx="2944368" cy="310896"/>
+          </a:xfrm>
+          <a:prstGeom prst="rect">
+            <a:avLst/>
+          </a:prstGeom>
+          <a:noFill/>
+        </p:spPr>
+        <p:txBody>
+          <a:bodyPr wrap="square">
+            <a:spAutoFit/>
+          </a:bodyPr>
+          <a:lstStyle/>
+          <a:p>
+            <a:pPr algn="l">
+              <a:defRPr sz="1000" b="0">
+                <a:solidFill>
+                  <a:srgbClr val="C4D4EE"/>
+                </a:solidFill>
+                <a:latin typeface="Calibri"/>
+              </a:defRPr>
+            </a:pPr>
+            <a:r>
+              <a:t>Rebuild demo videos and PPTX deck</a:t>
+            </a:r>
+          </a:p>
+        </p:txBody>
+      </p:sp>
+      <p:sp>
+        <p:nvSpPr>
+          <p:cNvPr id="28" name="Rounded Rectangle 27"/>
           <p:cNvSpPr/>
           <p:nvPr/>
         </p:nvSpPr>
         <p:spPr>
           <a:xfrm>
             <a:off x="6400800" y="1371600"/>
-            <a:ext cx="5257800" cy="4160520"/>
+            <a:ext cx="5230368" cy="4069080"/>
           </a:xfrm>
           <a:prstGeom prst="roundRect">
             <a:avLst/>
@@ -8795,14 +8987,14 @@
       </p:sp>
       <p:sp>
         <p:nvSpPr>
-          <p:cNvPr id="24" name="Rectangle 23"/>
+          <p:cNvPr id="29" name="Rectangle 28"/>
           <p:cNvSpPr/>
           <p:nvPr/>
         </p:nvSpPr>
         <p:spPr>
           <a:xfrm>
             <a:off x="6400800" y="1371600"/>
-            <a:ext cx="5257800" cy="64008"/>
+            <a:ext cx="5230368" cy="64008"/>
           </a:xfrm>
           <a:prstGeom prst="rect">
             <a:avLst/>
@@ -8838,14 +9030,14 @@
       </p:sp>
       <p:sp>
         <p:nvSpPr>
-          <p:cNvPr id="25" name="TextBox 24"/>
-          <p:cNvSpPr txBox="1"/>
-          <p:nvPr/>
-        </p:nvSpPr>
-        <p:spPr>
-          <a:xfrm>
-            <a:off x="6400800" y="1463040"/>
-            <a:ext cx="5257800" cy="402336"/>
+          <p:cNvPr id="30" name="TextBox 29"/>
+          <p:cNvSpPr txBox="1"/>
+          <p:nvPr/>
+        </p:nvSpPr>
+        <p:spPr>
+          <a:xfrm>
+            <a:off x="6400800" y="1435608"/>
+            <a:ext cx="5230368" cy="329184"/>
           </a:xfrm>
           <a:prstGeom prst="rect">
             <a:avLst/>
@@ -8859,7 +9051,7 @@
           <a:lstStyle/>
           <a:p>
             <a:pPr algn="ctr">
-              <a:defRPr sz="1300" b="1">
+              <a:defRPr sz="1200" b="1">
                 <a:solidFill>
                   <a:srgbClr val="3B82F6"/>
                 </a:solidFill>
@@ -8874,14 +9066,14 @@
       </p:sp>
       <p:sp>
         <p:nvSpPr>
-          <p:cNvPr id="26" name="TextBox 25"/>
-          <p:cNvSpPr txBox="1"/>
-          <p:nvPr/>
-        </p:nvSpPr>
-        <p:spPr>
-          <a:xfrm>
-            <a:off x="6583680" y="2029968"/>
-            <a:ext cx="2468880" cy="329184"/>
+          <p:cNvPr id="31" name="TextBox 30"/>
+          <p:cNvSpPr txBox="1"/>
+          <p:nvPr/>
+        </p:nvSpPr>
+        <p:spPr>
+          <a:xfrm>
+            <a:off x="6537960" y="1810512"/>
+            <a:ext cx="1828800" cy="182880"/>
           </a:xfrm>
           <a:prstGeom prst="rect">
             <a:avLst/>
@@ -8895,29 +9087,65 @@
           <a:lstStyle/>
           <a:p>
             <a:pPr algn="l">
-              <a:defRPr sz="1200" b="1">
+              <a:defRPr sz="900" b="1">
                 <a:solidFill>
                   <a:srgbClr val="3B82F6"/>
                 </a:solidFill>
+                <a:latin typeface="Calibri"/>
+              </a:defRPr>
+            </a:pPr>
+            <a:r>
+              <a:t>WIKI SKILLS</a:t>
+            </a:r>
+          </a:p>
+        </p:txBody>
+      </p:sp>
+      <p:sp>
+        <p:nvSpPr>
+          <p:cNvPr id="32" name="TextBox 31"/>
+          <p:cNvSpPr txBox="1"/>
+          <p:nvPr/>
+        </p:nvSpPr>
+        <p:spPr>
+          <a:xfrm>
+            <a:off x="6537960" y="2002536"/>
+            <a:ext cx="2103120" cy="310896"/>
+          </a:xfrm>
+          <a:prstGeom prst="rect">
+            <a:avLst/>
+          </a:prstGeom>
+          <a:noFill/>
+        </p:spPr>
+        <p:txBody>
+          <a:bodyPr wrap="square">
+            <a:spAutoFit/>
+          </a:bodyPr>
+          <a:lstStyle/>
+          <a:p>
+            <a:pPr algn="l">
+              <a:defRPr sz="1000" b="1">
+                <a:solidFill>
+                  <a:srgbClr val="3B82F6"/>
+                </a:solidFill>
                 <a:latin typeface="Courier New"/>
               </a:defRPr>
             </a:pPr>
             <a:r>
-              <a:t>/Compile Papers to Wiki</a:t>
-            </a:r>
-          </a:p>
-        </p:txBody>
-      </p:sp>
-      <p:sp>
-        <p:nvSpPr>
-          <p:cNvPr id="27" name="TextBox 26"/>
-          <p:cNvSpPr txBox="1"/>
-          <p:nvPr/>
-        </p:nvSpPr>
-        <p:spPr>
-          <a:xfrm>
-            <a:off x="9144000" y="2029968"/>
-            <a:ext cx="2377440" cy="329184"/>
+              <a:t>Compile Papers to Wiki</a:t>
+            </a:r>
+          </a:p>
+        </p:txBody>
+      </p:sp>
+      <p:sp>
+        <p:nvSpPr>
+          <p:cNvPr id="33" name="TextBox 32"/>
+          <p:cNvSpPr txBox="1"/>
+          <p:nvPr/>
+        </p:nvSpPr>
+        <p:spPr>
+          <a:xfrm>
+            <a:off x="8759952" y="2002536"/>
+            <a:ext cx="2761488" cy="310896"/>
           </a:xfrm>
           <a:prstGeom prst="rect">
             <a:avLst/>
@@ -8931,7 +9159,7 @@
           <a:lstStyle/>
           <a:p>
             <a:pPr algn="l">
-              <a:defRPr sz="1100" b="0">
+              <a:defRPr sz="1000" b="0">
                 <a:solidFill>
                   <a:srgbClr val="C4D4EE"/>
                 </a:solidFill>
@@ -8946,14 +9174,14 @@
       </p:sp>
       <p:sp>
         <p:nvSpPr>
-          <p:cNvPr id="28" name="TextBox 27"/>
-          <p:cNvSpPr txBox="1"/>
-          <p:nvPr/>
-        </p:nvSpPr>
-        <p:spPr>
-          <a:xfrm>
-            <a:off x="6583680" y="2468880"/>
-            <a:ext cx="2468880" cy="329184"/>
+          <p:cNvPr id="34" name="TextBox 33"/>
+          <p:cNvSpPr txBox="1"/>
+          <p:nvPr/>
+        </p:nvSpPr>
+        <p:spPr>
+          <a:xfrm>
+            <a:off x="6537960" y="2340864"/>
+            <a:ext cx="2103120" cy="310896"/>
           </a:xfrm>
           <a:prstGeom prst="rect">
             <a:avLst/>
@@ -8967,7 +9195,7 @@
           <a:lstStyle/>
           <a:p>
             <a:pPr algn="l">
-              <a:defRPr sz="1200" b="1">
+              <a:defRPr sz="1000" b="1">
                 <a:solidFill>
                   <a:srgbClr val="3B82F6"/>
                 </a:solidFill>
@@ -8975,21 +9203,21 @@
               </a:defRPr>
             </a:pPr>
             <a:r>
-              <a:t>/Sync Wiki from Raw</a:t>
-            </a:r>
-          </a:p>
-        </p:txBody>
-      </p:sp>
-      <p:sp>
-        <p:nvSpPr>
-          <p:cNvPr id="29" name="TextBox 28"/>
-          <p:cNvSpPr txBox="1"/>
-          <p:nvPr/>
-        </p:nvSpPr>
-        <p:spPr>
-          <a:xfrm>
-            <a:off x="9144000" y="2468880"/>
-            <a:ext cx="2377440" cy="329184"/>
+              <a:t>Sync Wiki from Raw</a:t>
+            </a:r>
+          </a:p>
+        </p:txBody>
+      </p:sp>
+      <p:sp>
+        <p:nvSpPr>
+          <p:cNvPr id="35" name="TextBox 34"/>
+          <p:cNvSpPr txBox="1"/>
+          <p:nvPr/>
+        </p:nvSpPr>
+        <p:spPr>
+          <a:xfrm>
+            <a:off x="8759952" y="2340864"/>
+            <a:ext cx="2761488" cy="310896"/>
           </a:xfrm>
           <a:prstGeom prst="rect">
             <a:avLst/>
@@ -9003,7 +9231,7 @@
           <a:lstStyle/>
           <a:p>
             <a:pPr algn="l">
-              <a:defRPr sz="1100" b="0">
+              <a:defRPr sz="1000" b="0">
                 <a:solidFill>
                   <a:srgbClr val="C4D4EE"/>
                 </a:solidFill>
@@ -9011,21 +9239,21 @@
               </a:defRPr>
             </a:pPr>
             <a:r>
-              <a:t>Incremental update</a:t>
-            </a:r>
-          </a:p>
-        </p:txBody>
-      </p:sp>
-      <p:sp>
-        <p:nvSpPr>
-          <p:cNvPr id="30" name="TextBox 29"/>
-          <p:cNvSpPr txBox="1"/>
-          <p:nvPr/>
-        </p:nvSpPr>
-        <p:spPr>
-          <a:xfrm>
-            <a:off x="6583680" y="2907792"/>
-            <a:ext cx="2468880" cy="329184"/>
+              <a:t>Incremental update from new sources</a:t>
+            </a:r>
+          </a:p>
+        </p:txBody>
+      </p:sp>
+      <p:sp>
+        <p:nvSpPr>
+          <p:cNvPr id="36" name="TextBox 35"/>
+          <p:cNvSpPr txBox="1"/>
+          <p:nvPr/>
+        </p:nvSpPr>
+        <p:spPr>
+          <a:xfrm>
+            <a:off x="6537960" y="2679192"/>
+            <a:ext cx="2103120" cy="310896"/>
           </a:xfrm>
           <a:prstGeom prst="rect">
             <a:avLst/>
@@ -9039,7 +9267,7 @@
           <a:lstStyle/>
           <a:p>
             <a:pPr algn="l">
-              <a:defRPr sz="1200" b="1">
+              <a:defRPr sz="1000" b="1">
                 <a:solidFill>
                   <a:srgbClr val="3B82F6"/>
                 </a:solidFill>
@@ -9047,21 +9275,21 @@
               </a:defRPr>
             </a:pPr>
             <a:r>
-              <a:t>/Audit Wiki</a:t>
-            </a:r>
-          </a:p>
-        </p:txBody>
-      </p:sp>
-      <p:sp>
-        <p:nvSpPr>
-          <p:cNvPr id="31" name="TextBox 30"/>
-          <p:cNvSpPr txBox="1"/>
-          <p:nvPr/>
-        </p:nvSpPr>
-        <p:spPr>
-          <a:xfrm>
-            <a:off x="9144000" y="2907792"/>
-            <a:ext cx="2377440" cy="329184"/>
+              <a:t>Audit Wiki</a:t>
+            </a:r>
+          </a:p>
+        </p:txBody>
+      </p:sp>
+      <p:sp>
+        <p:nvSpPr>
+          <p:cNvPr id="37" name="TextBox 36"/>
+          <p:cNvSpPr txBox="1"/>
+          <p:nvPr/>
+        </p:nvSpPr>
+        <p:spPr>
+          <a:xfrm>
+            <a:off x="8759952" y="2679192"/>
+            <a:ext cx="2761488" cy="310896"/>
           </a:xfrm>
           <a:prstGeom prst="rect">
             <a:avLst/>
@@ -9075,7 +9303,7 @@
           <a:lstStyle/>
           <a:p>
             <a:pPr algn="l">
-              <a:defRPr sz="1100" b="0">
+              <a:defRPr sz="1000" b="0">
                 <a:solidFill>
                   <a:srgbClr val="C4D4EE"/>
                 </a:solidFill>
@@ -9083,21 +9311,21 @@
               </a:defRPr>
             </a:pPr>
             <a:r>
-              <a:t>Quality check</a:t>
-            </a:r>
-          </a:p>
-        </p:txBody>
-      </p:sp>
-      <p:sp>
-        <p:nvSpPr>
-          <p:cNvPr id="32" name="TextBox 31"/>
-          <p:cNvSpPr txBox="1"/>
-          <p:nvPr/>
-        </p:nvSpPr>
-        <p:spPr>
-          <a:xfrm>
-            <a:off x="6583680" y="3346704"/>
-            <a:ext cx="2468880" cy="329184"/>
+              <a:t>Quality check — orphans, contradictions</a:t>
+            </a:r>
+          </a:p>
+        </p:txBody>
+      </p:sp>
+      <p:sp>
+        <p:nvSpPr>
+          <p:cNvPr id="38" name="TextBox 37"/>
+          <p:cNvSpPr txBox="1"/>
+          <p:nvPr/>
+        </p:nvSpPr>
+        <p:spPr>
+          <a:xfrm>
+            <a:off x="6537960" y="3017520"/>
+            <a:ext cx="2103120" cy="310896"/>
           </a:xfrm>
           <a:prstGeom prst="rect">
             <a:avLst/>
@@ -9111,7 +9339,7 @@
           <a:lstStyle/>
           <a:p>
             <a:pPr algn="l">
-              <a:defRPr sz="1200" b="1">
+              <a:defRPr sz="1000" b="1">
                 <a:solidFill>
                   <a:srgbClr val="3B82F6"/>
                 </a:solidFill>
@@ -9119,21 +9347,21 @@
               </a:defRPr>
             </a:pPr>
             <a:r>
-              <a:t>/Reset Wiki</a:t>
-            </a:r>
-          </a:p>
-        </p:txBody>
-      </p:sp>
-      <p:sp>
-        <p:nvSpPr>
-          <p:cNvPr id="33" name="TextBox 32"/>
-          <p:cNvSpPr txBox="1"/>
-          <p:nvPr/>
-        </p:nvSpPr>
-        <p:spPr>
-          <a:xfrm>
-            <a:off x="9144000" y="3346704"/>
-            <a:ext cx="2377440" cy="329184"/>
+              <a:t>Reset Wiki</a:t>
+            </a:r>
+          </a:p>
+        </p:txBody>
+      </p:sp>
+      <p:sp>
+        <p:nvSpPr>
+          <p:cNvPr id="39" name="TextBox 38"/>
+          <p:cNvSpPr txBox="1"/>
+          <p:nvPr/>
+        </p:nvSpPr>
+        <p:spPr>
+          <a:xfrm>
+            <a:off x="8759952" y="3017520"/>
+            <a:ext cx="2761488" cy="310896"/>
           </a:xfrm>
           <a:prstGeom prst="rect">
             <a:avLst/>
@@ -9147,7 +9375,7 @@
           <a:lstStyle/>
           <a:p>
             <a:pPr algn="l">
-              <a:defRPr sz="1100" b="0">
+              <a:defRPr sz="1000" b="0">
                 <a:solidFill>
                   <a:srgbClr val="C4D4EE"/>
                 </a:solidFill>
@@ -9162,14 +9390,14 @@
       </p:sp>
       <p:sp>
         <p:nvSpPr>
-          <p:cNvPr id="34" name="TextBox 33"/>
-          <p:cNvSpPr txBox="1"/>
-          <p:nvPr/>
-        </p:nvSpPr>
-        <p:spPr>
-          <a:xfrm>
-            <a:off x="6583680" y="3785616"/>
-            <a:ext cx="2468880" cy="329184"/>
+          <p:cNvPr id="40" name="TextBox 39"/>
+          <p:cNvSpPr txBox="1"/>
+          <p:nvPr/>
+        </p:nvSpPr>
+        <p:spPr>
+          <a:xfrm>
+            <a:off x="6537960" y="3355848"/>
+            <a:ext cx="2103120" cy="310896"/>
           </a:xfrm>
           <a:prstGeom prst="rect">
             <a:avLst/>
@@ -9183,7 +9411,7 @@
           <a:lstStyle/>
           <a:p>
             <a:pPr algn="l">
-              <a:defRPr sz="1200" b="1">
+              <a:defRPr sz="1000" b="1">
                 <a:solidFill>
                   <a:srgbClr val="3B82F6"/>
                 </a:solidFill>
@@ -9191,21 +9419,21 @@
               </a:defRPr>
             </a:pPr>
             <a:r>
-              <a:t>/Launch Wiki UI</a:t>
-            </a:r>
-          </a:p>
-        </p:txBody>
-      </p:sp>
-      <p:sp>
-        <p:nvSpPr>
-          <p:cNvPr id="35" name="TextBox 34"/>
-          <p:cNvSpPr txBox="1"/>
-          <p:nvPr/>
-        </p:nvSpPr>
-        <p:spPr>
-          <a:xfrm>
-            <a:off x="9144000" y="3785616"/>
-            <a:ext cx="2377440" cy="329184"/>
+              <a:t>Launch Wiki UI</a:t>
+            </a:r>
+          </a:p>
+        </p:txBody>
+      </p:sp>
+      <p:sp>
+        <p:nvSpPr>
+          <p:cNvPr id="41" name="TextBox 40"/>
+          <p:cNvSpPr txBox="1"/>
+          <p:nvPr/>
+        </p:nvSpPr>
+        <p:spPr>
+          <a:xfrm>
+            <a:off x="8759952" y="3355848"/>
+            <a:ext cx="2761488" cy="310896"/>
           </a:xfrm>
           <a:prstGeom prst="rect">
             <a:avLst/>
@@ -9219,7 +9447,7 @@
           <a:lstStyle/>
           <a:p>
             <a:pPr algn="l">
-              <a:defRPr sz="1100" b="0">
+              <a:defRPr sz="1000" b="0">
                 <a:solidFill>
                   <a:srgbClr val="C4D4EE"/>
                 </a:solidFill>
@@ -9234,14 +9462,14 @@
       </p:sp>
       <p:sp>
         <p:nvSpPr>
-          <p:cNvPr id="36" name="TextBox 35"/>
-          <p:cNvSpPr txBox="1"/>
-          <p:nvPr/>
-        </p:nvSpPr>
-        <p:spPr>
-          <a:xfrm>
-            <a:off x="6583680" y="4224528"/>
-            <a:ext cx="2468880" cy="329184"/>
+          <p:cNvPr id="42" name="TextBox 41"/>
+          <p:cNvSpPr txBox="1"/>
+          <p:nvPr/>
+        </p:nvSpPr>
+        <p:spPr>
+          <a:xfrm>
+            <a:off x="6537960" y="3694176"/>
+            <a:ext cx="2103120" cy="310896"/>
           </a:xfrm>
           <a:prstGeom prst="rect">
             <a:avLst/>
@@ -9255,7 +9483,7 @@
           <a:lstStyle/>
           <a:p>
             <a:pPr algn="l">
-              <a:defRPr sz="1200" b="1">
+              <a:defRPr sz="1000" b="1">
                 <a:solidFill>
                   <a:srgbClr val="3B82F6"/>
                 </a:solidFill>
@@ -9263,21 +9491,21 @@
               </a:defRPr>
             </a:pPr>
             <a:r>
-              <a:t>/Stop Wiki UI</a:t>
-            </a:r>
-          </a:p>
-        </p:txBody>
-      </p:sp>
-      <p:sp>
-        <p:nvSpPr>
-          <p:cNvPr id="37" name="TextBox 36"/>
-          <p:cNvSpPr txBox="1"/>
-          <p:nvPr/>
-        </p:nvSpPr>
-        <p:spPr>
-          <a:xfrm>
-            <a:off x="9144000" y="4224528"/>
-            <a:ext cx="2377440" cy="329184"/>
+              <a:t>Stop Wiki UI</a:t>
+            </a:r>
+          </a:p>
+        </p:txBody>
+      </p:sp>
+      <p:sp>
+        <p:nvSpPr>
+          <p:cNvPr id="43" name="TextBox 42"/>
+          <p:cNvSpPr txBox="1"/>
+          <p:nvPr/>
+        </p:nvSpPr>
+        <p:spPr>
+          <a:xfrm>
+            <a:off x="8759952" y="3694176"/>
+            <a:ext cx="2761488" cy="310896"/>
           </a:xfrm>
           <a:prstGeom prst="rect">
             <a:avLst/>
@@ -9291,7 +9519,7 @@
           <a:lstStyle/>
           <a:p>
             <a:pPr algn="l">
-              <a:defRPr sz="1100" b="0">
+              <a:defRPr sz="1000" b="0">
                 <a:solidFill>
                   <a:srgbClr val="C4D4EE"/>
                 </a:solidFill>
@@ -9306,14 +9534,57 @@
       </p:sp>
       <p:sp>
         <p:nvSpPr>
-          <p:cNvPr id="38" name="TextBox 37"/>
-          <p:cNvSpPr txBox="1"/>
-          <p:nvPr/>
-        </p:nvSpPr>
-        <p:spPr>
-          <a:xfrm>
-            <a:off x="6583680" y="4663440"/>
-            <a:ext cx="2468880" cy="329184"/>
+          <p:cNvPr id="44" name="Rectangle 43"/>
+          <p:cNvSpPr/>
+          <p:nvPr/>
+        </p:nvSpPr>
+        <p:spPr>
+          <a:xfrm>
+            <a:off x="6537960" y="4069080"/>
+            <a:ext cx="4956048" cy="12700"/>
+          </a:xfrm>
+          <a:prstGeom prst="rect">
+            <a:avLst/>
+          </a:prstGeom>
+          <a:solidFill>
+            <a:srgbClr val="233764"/>
+          </a:solidFill>
+          <a:ln>
+            <a:noFill/>
+          </a:ln>
+        </p:spPr>
+        <p:style>
+          <a:lnRef idx="1">
+            <a:schemeClr val="accent1"/>
+          </a:lnRef>
+          <a:fillRef idx="3">
+            <a:schemeClr val="accent1"/>
+          </a:fillRef>
+          <a:effectRef idx="2">
+            <a:schemeClr val="accent1"/>
+          </a:effectRef>
+          <a:fontRef idx="minor">
+            <a:schemeClr val="lt1"/>
+          </a:fontRef>
+        </p:style>
+        <p:txBody>
+          <a:bodyPr rtlCol="0" anchor="ctr"/>
+          <a:lstStyle/>
+          <a:p>
+            <a:pPr algn="ctr"/>
+          </a:p>
+        </p:txBody>
+      </p:sp>
+      <p:sp>
+        <p:nvSpPr>
+          <p:cNvPr id="45" name="TextBox 44"/>
+          <p:cNvSpPr txBox="1"/>
+          <p:nvPr/>
+        </p:nvSpPr>
+        <p:spPr>
+          <a:xfrm>
+            <a:off x="6537960" y="4142232"/>
+            <a:ext cx="2011680" cy="182880"/>
           </a:xfrm>
           <a:prstGeom prst="rect">
             <a:avLst/>
@@ -9327,29 +9598,65 @@
           <a:lstStyle/>
           <a:p>
             <a:pPr algn="l">
-              <a:defRPr sz="1200" b="1">
-                <a:solidFill>
-                  <a:srgbClr val="3B82F6"/>
+              <a:defRPr sz="900" b="1">
+                <a:solidFill>
+                  <a:srgbClr val="8B5CF6"/>
+                </a:solidFill>
+                <a:latin typeface="Calibri"/>
+              </a:defRPr>
+            </a:pPr>
+            <a:r>
+              <a:t>REPO MAINTENANCE</a:t>
+            </a:r>
+          </a:p>
+        </p:txBody>
+      </p:sp>
+      <p:sp>
+        <p:nvSpPr>
+          <p:cNvPr id="46" name="TextBox 45"/>
+          <p:cNvSpPr txBox="1"/>
+          <p:nvPr/>
+        </p:nvSpPr>
+        <p:spPr>
+          <a:xfrm>
+            <a:off x="6537960" y="4343400"/>
+            <a:ext cx="2103120" cy="310896"/>
+          </a:xfrm>
+          <a:prstGeom prst="rect">
+            <a:avLst/>
+          </a:prstGeom>
+          <a:noFill/>
+        </p:spPr>
+        <p:txBody>
+          <a:bodyPr wrap="square">
+            <a:spAutoFit/>
+          </a:bodyPr>
+          <a:lstStyle/>
+          <a:p>
+            <a:pPr algn="l">
+              <a:defRPr sz="1000" b="1">
+                <a:solidFill>
+                  <a:srgbClr val="8B5CF6"/>
                 </a:solidFill>
                 <a:latin typeface="Courier New"/>
               </a:defRPr>
             </a:pPr>
             <a:r>
-              <a:t>/Sync Docs</a:t>
-            </a:r>
-          </a:p>
-        </p:txBody>
-      </p:sp>
-      <p:sp>
-        <p:nvSpPr>
-          <p:cNvPr id="39" name="TextBox 38"/>
-          <p:cNvSpPr txBox="1"/>
-          <p:nvPr/>
-        </p:nvSpPr>
-        <p:spPr>
-          <a:xfrm>
-            <a:off x="9144000" y="4663440"/>
-            <a:ext cx="2377440" cy="329184"/>
+              <a:t>Sync Docs</a:t>
+            </a:r>
+          </a:p>
+        </p:txBody>
+      </p:sp>
+      <p:sp>
+        <p:nvSpPr>
+          <p:cNvPr id="47" name="TextBox 46"/>
+          <p:cNvSpPr txBox="1"/>
+          <p:nvPr/>
+        </p:nvSpPr>
+        <p:spPr>
+          <a:xfrm>
+            <a:off x="8759952" y="4343400"/>
+            <a:ext cx="2761488" cy="310896"/>
           </a:xfrm>
           <a:prstGeom prst="rect">
             <a:avLst/>
@@ -9363,7 +9670,7 @@
           <a:lstStyle/>
           <a:p>
             <a:pPr algn="l">
-              <a:defRPr sz="1100" b="0">
+              <a:defRPr sz="1000" b="0">
                 <a:solidFill>
                   <a:srgbClr val="C4D4EE"/>
                 </a:solidFill>
@@ -9371,21 +9678,21 @@
               </a:defRPr>
             </a:pPr>
             <a:r>
-              <a:t>Update README and documentation</a:t>
-            </a:r>
-          </a:p>
-        </p:txBody>
-      </p:sp>
-      <p:sp>
-        <p:nvSpPr>
-          <p:cNvPr id="40" name="TextBox 39"/>
-          <p:cNvSpPr txBox="1"/>
-          <p:nvPr/>
-        </p:nvSpPr>
-        <p:spPr>
-          <a:xfrm>
-            <a:off x="6583680" y="5102352"/>
-            <a:ext cx="2468880" cy="329184"/>
+              <a:t>Sync README and documentation</a:t>
+            </a:r>
+          </a:p>
+        </p:txBody>
+      </p:sp>
+      <p:sp>
+        <p:nvSpPr>
+          <p:cNvPr id="48" name="TextBox 47"/>
+          <p:cNvSpPr txBox="1"/>
+          <p:nvPr/>
+        </p:nvSpPr>
+        <p:spPr>
+          <a:xfrm>
+            <a:off x="6537960" y="4681728"/>
+            <a:ext cx="2103120" cy="310896"/>
           </a:xfrm>
           <a:prstGeom prst="rect">
             <a:avLst/>
@@ -9399,29 +9706,29 @@
           <a:lstStyle/>
           <a:p>
             <a:pPr algn="l">
-              <a:defRPr sz="1200" b="1">
-                <a:solidFill>
-                  <a:srgbClr val="3B82F6"/>
+              <a:defRPr sz="1000" b="1">
+                <a:solidFill>
+                  <a:srgbClr val="8B5CF6"/>
                 </a:solidFill>
                 <a:latin typeface="Courier New"/>
               </a:defRPr>
             </a:pPr>
             <a:r>
-              <a:t>/Run Maintenance</a:t>
-            </a:r>
-          </a:p>
-        </p:txBody>
-      </p:sp>
-      <p:sp>
-        <p:nvSpPr>
-          <p:cNvPr id="41" name="TextBox 40"/>
-          <p:cNvSpPr txBox="1"/>
-          <p:nvPr/>
-        </p:nvSpPr>
-        <p:spPr>
-          <a:xfrm>
-            <a:off x="9144000" y="5102352"/>
-            <a:ext cx="2377440" cy="329184"/>
+              <a:t>Run Maintenance</a:t>
+            </a:r>
+          </a:p>
+        </p:txBody>
+      </p:sp>
+      <p:sp>
+        <p:nvSpPr>
+          <p:cNvPr id="49" name="TextBox 48"/>
+          <p:cNvSpPr txBox="1"/>
+          <p:nvPr/>
+        </p:nvSpPr>
+        <p:spPr>
+          <a:xfrm>
+            <a:off x="8759952" y="4681728"/>
+            <a:ext cx="2761488" cy="310896"/>
           </a:xfrm>
           <a:prstGeom prst="rect">
             <a:avLst/>
@@ -9435,7 +9742,7 @@
           <a:lstStyle/>
           <a:p>
             <a:pPr algn="l">
-              <a:defRPr sz="1100" b="0">
+              <a:defRPr sz="1000" b="0">
                 <a:solidFill>
                   <a:srgbClr val="C4D4EE"/>
                 </a:solidFill>
@@ -9443,21 +9750,93 @@
               </a:defRPr>
             </a:pPr>
             <a:r>
-              <a:t>Run tests, verify skills, check git health</a:t>
-            </a:r>
-          </a:p>
-        </p:txBody>
-      </p:sp>
-      <p:sp>
-        <p:nvSpPr>
-          <p:cNvPr id="42" name="Rounded Rectangle 41"/>
+              <a:t>Run tests, verify skills, git health</a:t>
+            </a:r>
+          </a:p>
+        </p:txBody>
+      </p:sp>
+      <p:sp>
+        <p:nvSpPr>
+          <p:cNvPr id="50" name="TextBox 49"/>
+          <p:cNvSpPr txBox="1"/>
+          <p:nvPr/>
+        </p:nvSpPr>
+        <p:spPr>
+          <a:xfrm>
+            <a:off x="6537960" y="5020056"/>
+            <a:ext cx="2103120" cy="310896"/>
+          </a:xfrm>
+          <a:prstGeom prst="rect">
+            <a:avLst/>
+          </a:prstGeom>
+          <a:noFill/>
+        </p:spPr>
+        <p:txBody>
+          <a:bodyPr wrap="square">
+            <a:spAutoFit/>
+          </a:bodyPr>
+          <a:lstStyle/>
+          <a:p>
+            <a:pPr algn="l">
+              <a:defRPr sz="1000" b="1">
+                <a:solidFill>
+                  <a:srgbClr val="8B5CF6"/>
+                </a:solidFill>
+                <a:latin typeface="Courier New"/>
+              </a:defRPr>
+            </a:pPr>
+            <a:r>
+              <a:t>Regenerate Presentation</a:t>
+            </a:r>
+          </a:p>
+        </p:txBody>
+      </p:sp>
+      <p:sp>
+        <p:nvSpPr>
+          <p:cNvPr id="51" name="TextBox 50"/>
+          <p:cNvSpPr txBox="1"/>
+          <p:nvPr/>
+        </p:nvSpPr>
+        <p:spPr>
+          <a:xfrm>
+            <a:off x="8759952" y="5020056"/>
+            <a:ext cx="2761488" cy="310896"/>
+          </a:xfrm>
+          <a:prstGeom prst="rect">
+            <a:avLst/>
+          </a:prstGeom>
+          <a:noFill/>
+        </p:spPr>
+        <p:txBody>
+          <a:bodyPr wrap="square">
+            <a:spAutoFit/>
+          </a:bodyPr>
+          <a:lstStyle/>
+          <a:p>
+            <a:pPr algn="l">
+              <a:defRPr sz="1000" b="0">
+                <a:solidFill>
+                  <a:srgbClr val="C4D4EE"/>
+                </a:solidFill>
+                <a:latin typeface="Calibri"/>
+              </a:defRPr>
+            </a:pPr>
+            <a:r>
+              <a:t>Rebuild demo videos and PPTX deck</a:t>
+            </a:r>
+          </a:p>
+        </p:txBody>
+      </p:sp>
+      <p:sp>
+        <p:nvSpPr>
+          <p:cNvPr id="52" name="Rounded Rectangle 51"/>
           <p:cNvSpPr/>
           <p:nvPr/>
         </p:nvSpPr>
         <p:spPr>
           <a:xfrm>
-            <a:off x="502920" y="5687568"/>
-            <a:ext cx="11201400" cy="960120"/>
+            <a:off x="502920" y="5532120"/>
+            <a:ext cx="11201400" cy="987552"/>
           </a:xfrm>
           <a:prstGeom prst="roundRect">
             <a:avLst/>
@@ -9495,14 +9874,57 @@
       </p:sp>
       <p:sp>
         <p:nvSpPr>
-          <p:cNvPr id="43" name="TextBox 42"/>
-          <p:cNvSpPr txBox="1"/>
-          <p:nvPr/>
-        </p:nvSpPr>
-        <p:spPr>
-          <a:xfrm>
-            <a:off x="685800" y="5779008"/>
-            <a:ext cx="2286000" cy="347472"/>
+          <p:cNvPr id="53" name="Rectangle 52"/>
+          <p:cNvSpPr/>
+          <p:nvPr/>
+        </p:nvSpPr>
+        <p:spPr>
+          <a:xfrm>
+            <a:off x="502920" y="5532120"/>
+            <a:ext cx="64008" cy="987552"/>
+          </a:xfrm>
+          <a:prstGeom prst="rect">
+            <a:avLst/>
+          </a:prstGeom>
+          <a:solidFill>
+            <a:srgbClr val="06B6D4"/>
+          </a:solidFill>
+          <a:ln>
+            <a:noFill/>
+          </a:ln>
+        </p:spPr>
+        <p:style>
+          <a:lnRef idx="1">
+            <a:schemeClr val="accent1"/>
+          </a:lnRef>
+          <a:fillRef idx="3">
+            <a:schemeClr val="accent1"/>
+          </a:fillRef>
+          <a:effectRef idx="2">
+            <a:schemeClr val="accent1"/>
+          </a:effectRef>
+          <a:fontRef idx="minor">
+            <a:schemeClr val="lt1"/>
+          </a:fontRef>
+        </p:style>
+        <p:txBody>
+          <a:bodyPr rtlCol="0" anchor="ctr"/>
+          <a:lstStyle/>
+          <a:p>
+            <a:pPr algn="ctr"/>
+          </a:p>
+        </p:txBody>
+      </p:sp>
+      <p:sp>
+        <p:nvSpPr>
+          <p:cNvPr id="54" name="TextBox 53"/>
+          <p:cNvSpPr txBox="1"/>
+          <p:nvPr/>
+        </p:nvSpPr>
+        <p:spPr>
+          <a:xfrm>
+            <a:off x="685800" y="5623560"/>
+            <a:ext cx="2377440" cy="347472"/>
           </a:xfrm>
           <a:prstGeom prst="rect">
             <a:avLst/>
@@ -9516,7 +9938,7 @@
           <a:lstStyle/>
           <a:p>
             <a:pPr algn="l">
-              <a:defRPr sz="1300" b="1">
+              <a:defRPr sz="1200" b="1">
                 <a:solidFill>
                   <a:srgbClr val="06B6D4"/>
                 </a:solidFill>
@@ -9531,14 +9953,14 @@
       </p:sp>
       <p:sp>
         <p:nvSpPr>
-          <p:cNvPr id="44" name="TextBox 43"/>
-          <p:cNvSpPr txBox="1"/>
-          <p:nvPr/>
-        </p:nvSpPr>
-        <p:spPr>
-          <a:xfrm>
-            <a:off x="3200400" y="5779008"/>
-            <a:ext cx="1691640" cy="384048"/>
+          <p:cNvPr id="55" name="TextBox 54"/>
+          <p:cNvSpPr txBox="1"/>
+          <p:nvPr/>
+        </p:nvSpPr>
+        <p:spPr>
+          <a:xfrm>
+            <a:off x="685800" y="6035040"/>
+            <a:ext cx="2377440" cy="256032"/>
           </a:xfrm>
           <a:prstGeom prst="rect">
             <a:avLst/>
@@ -9552,7 +9974,43 @@
           <a:lstStyle/>
           <a:p>
             <a:pPr algn="l">
-              <a:defRPr sz="1200" b="0">
+              <a:defRPr sz="900" b="0">
+                <a:solidFill>
+                  <a:srgbClr val="6982AC"/>
+                </a:solidFill>
+                <a:latin typeface="Calibri"/>
+              </a:defRPr>
+            </a:pPr>
+            <a:r>
+              <a:t>Multi-provider · Grounded</a:t>
+            </a:r>
+          </a:p>
+        </p:txBody>
+      </p:sp>
+      <p:sp>
+        <p:nvSpPr>
+          <p:cNvPr id="56" name="TextBox 55"/>
+          <p:cNvSpPr txBox="1"/>
+          <p:nvPr/>
+        </p:nvSpPr>
+        <p:spPr>
+          <a:xfrm>
+            <a:off x="3108960" y="5623560"/>
+            <a:ext cx="2103120" cy="329184"/>
+          </a:xfrm>
+          <a:prstGeom prst="rect">
+            <a:avLst/>
+          </a:prstGeom>
+          <a:noFill/>
+        </p:spPr>
+        <p:txBody>
+          <a:bodyPr wrap="square">
+            <a:spAutoFit/>
+          </a:bodyPr>
+          <a:lstStyle/>
+          <a:p>
+            <a:pPr algn="l">
+              <a:defRPr sz="1100" b="1">
                 <a:solidFill>
                   <a:srgbClr val="C4D4EE"/>
                 </a:solidFill>
@@ -9560,21 +10018,21 @@
               </a:defRPr>
             </a:pPr>
             <a:r>
-              <a:t>· API key validation</a:t>
-            </a:r>
-          </a:p>
-        </p:txBody>
-      </p:sp>
-      <p:sp>
-        <p:nvSpPr>
-          <p:cNvPr id="45" name="TextBox 44"/>
-          <p:cNvSpPr txBox="1"/>
-          <p:nvPr/>
-        </p:nvSpPr>
-        <p:spPr>
-          <a:xfrm>
-            <a:off x="4919472" y="5779008"/>
-            <a:ext cx="1691640" cy="384048"/>
+              <a:t>· Multi-provider Q&amp;A</a:t>
+            </a:r>
+          </a:p>
+        </p:txBody>
+      </p:sp>
+      <p:sp>
+        <p:nvSpPr>
+          <p:cNvPr id="57" name="TextBox 56"/>
+          <p:cNvSpPr txBox="1"/>
+          <p:nvPr/>
+        </p:nvSpPr>
+        <p:spPr>
+          <a:xfrm>
+            <a:off x="3108960" y="6035040"/>
+            <a:ext cx="2103120" cy="256032"/>
           </a:xfrm>
           <a:prstGeom prst="rect">
             <a:avLst/>
@@ -9588,7 +10046,43 @@
           <a:lstStyle/>
           <a:p>
             <a:pPr algn="l">
-              <a:defRPr sz="1200" b="0">
+              <a:defRPr sz="900" b="0">
+                <a:solidFill>
+                  <a:srgbClr val="6982AC"/>
+                </a:solidFill>
+                <a:latin typeface="Calibri"/>
+              </a:defRPr>
+            </a:pPr>
+            <a:r>
+              <a:t>Anthropic · OpenAI · Google · Mistral · Cohere</a:t>
+            </a:r>
+          </a:p>
+        </p:txBody>
+      </p:sp>
+      <p:sp>
+        <p:nvSpPr>
+          <p:cNvPr id="58" name="TextBox 57"/>
+          <p:cNvSpPr txBox="1"/>
+          <p:nvPr/>
+        </p:nvSpPr>
+        <p:spPr>
+          <a:xfrm>
+            <a:off x="5257800" y="5623560"/>
+            <a:ext cx="2103120" cy="329184"/>
+          </a:xfrm>
+          <a:prstGeom prst="rect">
+            <a:avLst/>
+          </a:prstGeom>
+          <a:noFill/>
+        </p:spPr>
+        <p:txBody>
+          <a:bodyPr wrap="square">
+            <a:spAutoFit/>
+          </a:bodyPr>
+          <a:lstStyle/>
+          <a:p>
+            <a:pPr algn="l">
+              <a:defRPr sz="1100" b="1">
                 <a:solidFill>
                   <a:srgbClr val="C4D4EE"/>
                 </a:solidFill>
@@ -9596,21 +10090,21 @@
               </a:defRPr>
             </a:pPr>
             <a:r>
-              <a:t>· Wiki page browser</a:t>
-            </a:r>
-          </a:p>
-        </p:txBody>
-      </p:sp>
-      <p:sp>
-        <p:nvSpPr>
-          <p:cNvPr id="46" name="TextBox 45"/>
-          <p:cNvSpPr txBox="1"/>
-          <p:nvPr/>
-        </p:nvSpPr>
-        <p:spPr>
-          <a:xfrm>
-            <a:off x="6638544" y="5779008"/>
-            <a:ext cx="1691640" cy="384048"/>
+              <a:t>· Wiki-grounded answers</a:t>
+            </a:r>
+          </a:p>
+        </p:txBody>
+      </p:sp>
+      <p:sp>
+        <p:nvSpPr>
+          <p:cNvPr id="59" name="TextBox 58"/>
+          <p:cNvSpPr txBox="1"/>
+          <p:nvPr/>
+        </p:nvSpPr>
+        <p:spPr>
+          <a:xfrm>
+            <a:off x="5257800" y="6035040"/>
+            <a:ext cx="2103120" cy="256032"/>
           </a:xfrm>
           <a:prstGeom prst="rect">
             <a:avLst/>
@@ -9624,7 +10118,43 @@
           <a:lstStyle/>
           <a:p>
             <a:pPr algn="l">
-              <a:defRPr sz="1200" b="0">
+              <a:defRPr sz="900" b="0">
+                <a:solidFill>
+                  <a:srgbClr val="6982AC"/>
+                </a:solidFill>
+                <a:latin typeface="Calibri"/>
+              </a:defRPr>
+            </a:pPr>
+            <a:r>
+              <a:t>No hallucination outside wiki content</a:t>
+            </a:r>
+          </a:p>
+        </p:txBody>
+      </p:sp>
+      <p:sp>
+        <p:nvSpPr>
+          <p:cNvPr id="60" name="TextBox 59"/>
+          <p:cNvSpPr txBox="1"/>
+          <p:nvPr/>
+        </p:nvSpPr>
+        <p:spPr>
+          <a:xfrm>
+            <a:off x="7406640" y="5623560"/>
+            <a:ext cx="2103120" cy="329184"/>
+          </a:xfrm>
+          <a:prstGeom prst="rect">
+            <a:avLst/>
+          </a:prstGeom>
+          <a:noFill/>
+        </p:spPr>
+        <p:txBody>
+          <a:bodyPr wrap="square">
+            <a:spAutoFit/>
+          </a:bodyPr>
+          <a:lstStyle/>
+          <a:p>
+            <a:pPr algn="l">
+              <a:defRPr sz="1100" b="1">
                 <a:solidFill>
                   <a:srgbClr val="C4D4EE"/>
                 </a:solidFill>
@@ -9632,21 +10162,21 @@
               </a:defRPr>
             </a:pPr>
             <a:r>
-              <a:t>· Claude-powered Q&amp;A</a:t>
-            </a:r>
-          </a:p>
-        </p:txBody>
-      </p:sp>
-      <p:sp>
-        <p:nvSpPr>
-          <p:cNvPr id="47" name="TextBox 46"/>
-          <p:cNvSpPr txBox="1"/>
-          <p:nvPr/>
-        </p:nvSpPr>
-        <p:spPr>
-          <a:xfrm>
-            <a:off x="8357616" y="5779008"/>
-            <a:ext cx="1691640" cy="384048"/>
+              <a:t>· API key + model validation</a:t>
+            </a:r>
+          </a:p>
+        </p:txBody>
+      </p:sp>
+      <p:sp>
+        <p:nvSpPr>
+          <p:cNvPr id="61" name="TextBox 60"/>
+          <p:cNvSpPr txBox="1"/>
+          <p:nvPr/>
+        </p:nvSpPr>
+        <p:spPr>
+          <a:xfrm>
+            <a:off x="7406640" y="6035040"/>
+            <a:ext cx="2103120" cy="256032"/>
           </a:xfrm>
           <a:prstGeom prst="rect">
             <a:avLst/>
@@ -9660,7 +10190,43 @@
           <a:lstStyle/>
           <a:p>
             <a:pPr algn="l">
-              <a:defRPr sz="1200" b="0">
+              <a:defRPr sz="900" b="0">
+                <a:solidFill>
+                  <a:srgbClr val="6982AC"/>
+                </a:solidFill>
+                <a:latin typeface="Calibri"/>
+              </a:defRPr>
+            </a:pPr>
+            <a:r>
+              <a:t>Session memory — never saved to disk</a:t>
+            </a:r>
+          </a:p>
+        </p:txBody>
+      </p:sp>
+      <p:sp>
+        <p:nvSpPr>
+          <p:cNvPr id="62" name="TextBox 61"/>
+          <p:cNvSpPr txBox="1"/>
+          <p:nvPr/>
+        </p:nvSpPr>
+        <p:spPr>
+          <a:xfrm>
+            <a:off x="9555480" y="5623560"/>
+            <a:ext cx="2103120" cy="329184"/>
+          </a:xfrm>
+          <a:prstGeom prst="rect">
+            <a:avLst/>
+          </a:prstGeom>
+          <a:noFill/>
+        </p:spPr>
+        <p:txBody>
+          <a:bodyPr wrap="square">
+            <a:spAutoFit/>
+          </a:bodyPr>
+          <a:lstStyle/>
+          <a:p>
+            <a:pPr algn="l">
+              <a:defRPr sz="1100" b="1">
                 <a:solidFill>
                   <a:srgbClr val="C4D4EE"/>
                 </a:solidFill>
@@ -9668,21 +10234,21 @@
               </a:defRPr>
             </a:pPr>
             <a:r>
-              <a:t>· Token + cache metrics</a:t>
-            </a:r>
-          </a:p>
-        </p:txBody>
-      </p:sp>
-      <p:sp>
-        <p:nvSpPr>
-          <p:cNvPr id="48" name="TextBox 47"/>
-          <p:cNvSpPr txBox="1"/>
-          <p:nvPr/>
-        </p:nvSpPr>
-        <p:spPr>
-          <a:xfrm>
-            <a:off x="10076688" y="5779008"/>
-            <a:ext cx="1691640" cy="384048"/>
+              <a:t>· Explicit 'not found'</a:t>
+            </a:r>
+          </a:p>
+        </p:txBody>
+      </p:sp>
+      <p:sp>
+        <p:nvSpPr>
+          <p:cNvPr id="63" name="TextBox 62"/>
+          <p:cNvSpPr txBox="1"/>
+          <p:nvPr/>
+        </p:nvSpPr>
+        <p:spPr>
+          <a:xfrm>
+            <a:off x="9555480" y="6035040"/>
+            <a:ext cx="2103120" cy="256032"/>
           </a:xfrm>
           <a:prstGeom prst="rect">
             <a:avLst/>
@@ -9696,51 +10262,15 @@
           <a:lstStyle/>
           <a:p>
             <a:pPr algn="l">
-              <a:defRPr sz="1200" b="0">
-                <a:solidFill>
-                  <a:srgbClr val="C4D4EE"/>
+              <a:defRPr sz="900" b="0">
+                <a:solidFill>
+                  <a:srgbClr val="6982AC"/>
                 </a:solidFill>
                 <a:latin typeface="Calibri"/>
               </a:defRPr>
             </a:pPr>
             <a:r>
-              <a:t>· Secure (session memory)</a:t>
-            </a:r>
-          </a:p>
-        </p:txBody>
-      </p:sp>
-      <p:sp>
-        <p:nvSpPr>
-          <p:cNvPr id="49" name="TextBox 48"/>
-          <p:cNvSpPr txBox="1"/>
-          <p:nvPr/>
-        </p:nvSpPr>
-        <p:spPr>
-          <a:xfrm>
-            <a:off x="11795760" y="5779008"/>
-            <a:ext cx="1691640" cy="384048"/>
-          </a:xfrm>
-          <a:prstGeom prst="rect">
-            <a:avLst/>
-          </a:prstGeom>
-          <a:noFill/>
-        </p:spPr>
-        <p:txBody>
-          <a:bodyPr wrap="square">
-            <a:spAutoFit/>
-          </a:bodyPr>
-          <a:lstStyle/>
-          <a:p>
-            <a:pPr algn="l">
-              <a:defRPr sz="1200" b="0">
-                <a:solidFill>
-                  <a:srgbClr val="C4D4EE"/>
-                </a:solidFill>
-                <a:latin typeface="Calibri"/>
-              </a:defRPr>
-            </a:pPr>
-            <a:r>
-              <a:t>· Explicit 'not found' responses</a:t>
+              <a:t>Clear signal when topic is outside wiki</a:t>
             </a:r>
           </a:p>
         </p:txBody>

--- a/presentation/llm-wiki-deck.pptx
+++ b/presentation/llm-wiki-deck.pptx
@@ -4564,7 +4564,43 @@
       </p:sp>
       <p:sp>
         <p:nvSpPr>
-          <p:cNvPr id="12" name="Rectangle 11"/>
+          <p:cNvPr id="12" name="TextBox 11"/>
+          <p:cNvSpPr txBox="1"/>
+          <p:nvPr/>
+        </p:nvSpPr>
+        <p:spPr>
+          <a:xfrm>
+            <a:off x="685800" y="4773168"/>
+            <a:ext cx="7772400" cy="347472"/>
+          </a:xfrm>
+          <a:prstGeom prst="rect">
+            <a:avLst/>
+          </a:prstGeom>
+          <a:noFill/>
+        </p:spPr>
+        <p:txBody>
+          <a:bodyPr wrap="square">
+            <a:spAutoFit/>
+          </a:bodyPr>
+          <a:lstStyle/>
+          <a:p>
+            <a:pPr algn="l">
+              <a:defRPr sz="1200" b="0">
+                <a:solidFill>
+                  <a:srgbClr val="06B6D4"/>
+                </a:solidFill>
+                <a:latin typeface="Calibri"/>
+              </a:defRPr>
+            </a:pPr>
+            <a:r>
+              <a:t>github.com/dev-enthusiast-84/llm-wiki</a:t>
+            </a:r>
+          </a:p>
+        </p:txBody>
+      </p:sp>
+      <p:sp>
+        <p:nvSpPr>
+          <p:cNvPr id="13" name="Rectangle 12"/>
           <p:cNvSpPr/>
           <p:nvPr/>
         </p:nvSpPr>
@@ -4607,7 +4643,7 @@
       </p:sp>
       <p:sp>
         <p:nvSpPr>
-          <p:cNvPr id="13" name="TextBox 12"/>
+          <p:cNvPr id="14" name="TextBox 13"/>
           <p:cNvSpPr txBox="1"/>
           <p:nvPr/>
         </p:nvSpPr>
@@ -4643,7 +4679,7 @@
       </p:sp>
       <p:sp>
         <p:nvSpPr>
-          <p:cNvPr id="14" name="Rounded Rectangle 13"/>
+          <p:cNvPr id="15" name="Rounded Rectangle 14"/>
           <p:cNvSpPr/>
           <p:nvPr/>
         </p:nvSpPr>
@@ -4688,7 +4724,7 @@
       </p:sp>
       <p:sp>
         <p:nvSpPr>
-          <p:cNvPr id="15" name="Rectangle 14"/>
+          <p:cNvPr id="16" name="Rectangle 15"/>
           <p:cNvSpPr/>
           <p:nvPr/>
         </p:nvSpPr>
@@ -4731,7 +4767,7 @@
       </p:sp>
       <p:sp>
         <p:nvSpPr>
-          <p:cNvPr id="16" name="TextBox 15"/>
+          <p:cNvPr id="17" name="TextBox 16"/>
           <p:cNvSpPr txBox="1"/>
           <p:nvPr/>
         </p:nvSpPr>
@@ -4767,7 +4803,7 @@
       </p:sp>
       <p:sp>
         <p:nvSpPr>
-          <p:cNvPr id="17" name="TextBox 16"/>
+          <p:cNvPr id="18" name="TextBox 17"/>
           <p:cNvSpPr txBox="1"/>
           <p:nvPr/>
         </p:nvSpPr>
@@ -4803,7 +4839,7 @@
       </p:sp>
       <p:sp>
         <p:nvSpPr>
-          <p:cNvPr id="18" name="TextBox 17"/>
+          <p:cNvPr id="19" name="TextBox 18"/>
           <p:cNvSpPr txBox="1"/>
           <p:nvPr/>
         </p:nvSpPr>
@@ -4839,7 +4875,7 @@
       </p:sp>
       <p:sp>
         <p:nvSpPr>
-          <p:cNvPr id="19" name="Rounded Rectangle 18"/>
+          <p:cNvPr id="20" name="Rounded Rectangle 19"/>
           <p:cNvSpPr/>
           <p:nvPr/>
         </p:nvSpPr>
@@ -4884,7 +4920,7 @@
       </p:sp>
       <p:sp>
         <p:nvSpPr>
-          <p:cNvPr id="20" name="Rectangle 19"/>
+          <p:cNvPr id="21" name="Rectangle 20"/>
           <p:cNvSpPr/>
           <p:nvPr/>
         </p:nvSpPr>
@@ -4927,7 +4963,7 @@
       </p:sp>
       <p:sp>
         <p:nvSpPr>
-          <p:cNvPr id="21" name="TextBox 20"/>
+          <p:cNvPr id="22" name="TextBox 21"/>
           <p:cNvSpPr txBox="1"/>
           <p:nvPr/>
         </p:nvSpPr>
@@ -4963,7 +4999,7 @@
       </p:sp>
       <p:sp>
         <p:nvSpPr>
-          <p:cNvPr id="22" name="TextBox 21"/>
+          <p:cNvPr id="23" name="TextBox 22"/>
           <p:cNvSpPr txBox="1"/>
           <p:nvPr/>
         </p:nvSpPr>
@@ -4999,7 +5035,7 @@
       </p:sp>
       <p:sp>
         <p:nvSpPr>
-          <p:cNvPr id="23" name="TextBox 22"/>
+          <p:cNvPr id="24" name="TextBox 23"/>
           <p:cNvSpPr txBox="1"/>
           <p:nvPr/>
         </p:nvSpPr>
@@ -5035,7 +5071,7 @@
       </p:sp>
       <p:sp>
         <p:nvSpPr>
-          <p:cNvPr id="24" name="Rounded Rectangle 23"/>
+          <p:cNvPr id="25" name="Rounded Rectangle 24"/>
           <p:cNvSpPr/>
           <p:nvPr/>
         </p:nvSpPr>
@@ -5080,7 +5116,7 @@
       </p:sp>
       <p:sp>
         <p:nvSpPr>
-          <p:cNvPr id="25" name="Rectangle 24"/>
+          <p:cNvPr id="26" name="Rectangle 25"/>
           <p:cNvSpPr/>
           <p:nvPr/>
         </p:nvSpPr>
@@ -5123,7 +5159,7 @@
       </p:sp>
       <p:sp>
         <p:nvSpPr>
-          <p:cNvPr id="26" name="TextBox 25"/>
+          <p:cNvPr id="27" name="TextBox 26"/>
           <p:cNvSpPr txBox="1"/>
           <p:nvPr/>
         </p:nvSpPr>
@@ -5159,7 +5195,7 @@
       </p:sp>
       <p:sp>
         <p:nvSpPr>
-          <p:cNvPr id="27" name="TextBox 26"/>
+          <p:cNvPr id="28" name="TextBox 27"/>
           <p:cNvSpPr txBox="1"/>
           <p:nvPr/>
         </p:nvSpPr>
@@ -10594,6 +10630,42 @@
             </a:pPr>
             <a:r>
               <a:t>settings  ·  happy-path query  ·  empty wiki  ·  not-found error</a:t>
+            </a:r>
+          </a:p>
+        </p:txBody>
+      </p:sp>
+      <p:sp>
+        <p:nvSpPr>
+          <p:cNvPr id="10" name="TextBox 9"/>
+          <p:cNvSpPr txBox="1"/>
+          <p:nvPr/>
+        </p:nvSpPr>
+        <p:spPr>
+          <a:xfrm>
+            <a:off x="502920" y="6016752"/>
+            <a:ext cx="11201400" cy="292608"/>
+          </a:xfrm>
+          <a:prstGeom prst="rect">
+            <a:avLst/>
+          </a:prstGeom>
+          <a:noFill/>
+        </p:spPr>
+        <p:txBody>
+          <a:bodyPr wrap="square">
+            <a:spAutoFit/>
+          </a:bodyPr>
+          <a:lstStyle/>
+          <a:p>
+            <a:pPr algn="ctr">
+              <a:defRPr sz="1100" b="0">
+                <a:solidFill>
+                  <a:srgbClr val="06B6D4"/>
+                </a:solidFill>
+                <a:latin typeface="Calibri"/>
+              </a:defRPr>
+            </a:pPr>
+            <a:r>
+              <a:t>github.com/dev-enthusiast-84/llm-wiki</a:t>
             </a:r>
           </a:p>
         </p:txBody>

--- a/presentation/llm-wiki-deck.pptx
+++ b/presentation/llm-wiki-deck.pptx
@@ -868,6 +868,11 @@
               <a:t>The system works with both Claude Code CLI and GitHub Copilot Chat.</a:t>
             </a:r>
           </a:p>
+          <a:p>
+            <a:r>
+              <a:t>All skills now use parallel agents internally for significant speed gains.</a:t>
+            </a:r>
+          </a:p>
           <a:p/>
           <a:p>
             <a:r>
@@ -876,17 +881,27 @@
           </a:p>
           <a:p>
             <a:r>
-              <a:t>• compile-papers — reads everything in /raw and creates wiki pages from scratch</a:t>
-            </a:r>
-          </a:p>
-          <a:p>
-            <a:r>
-              <a:t>• sync-wiki — use when you add new papers; detects what's new, updates without clobbering</a:t>
-            </a:r>
-          </a:p>
-          <a:p>
-            <a:r>
-              <a:t>• audit-wiki — run every ~20 pages to catch orphans, missing links, contradictions</a:t>
+              <a:t>• orchestrate-wiki — NEW: one command runs the full pipeline; detects wiki state, spawns parallel</a:t>
+            </a:r>
+          </a:p>
+          <a:p>
+            <a:r>
+              <a:t>  extraction agents (one per source file), runs 4 parallel audit agents, then syncs all docs</a:t>
+            </a:r>
+          </a:p>
+          <a:p>
+            <a:r>
+              <a:t>• compile-papers — reads all of /raw using parallel agents (one per file); creates wiki pages</a:t>
+            </a:r>
+          </a:p>
+          <a:p>
+            <a:r>
+              <a:t>• sync-wiki — detects new files; spawns parallel agents when multiple new sources exist</a:t>
+            </a:r>
+          </a:p>
+          <a:p>
+            <a:r>
+              <a:t>• audit-wiki — runs 4 parallel agents: orphan check, missing pages, contradictions, stale claims</a:t>
             </a:r>
           </a:p>
           <a:p>
@@ -917,7 +932,7 @@
           </a:p>
           <a:p>
             <a:r>
-              <a:t>• run-maintenance — full health check: runs tests, verifies skill registration, checks wiki + git state</a:t>
+              <a:t>• run-maintenance — spawns 4 parallel agents: tests, skill registration, wiki health, git status</a:t>
             </a:r>
           </a:p>
           <a:p>
@@ -933,7 +948,7 @@
           </a:p>
           <a:p>
             <a:r>
-              <a:t>• Compile Papers to Wiki, Sync Wiki from Raw, Audit Wiki, Reset Wiki, Launch Wiki UI, Stop Wiki UI</a:t>
+              <a:t>• Orchestrate Wiki, Compile Papers to Wiki, Sync Wiki from Raw, Audit Wiki, Reset Wiki, Launch Wiki UI, Stop Wiki UI</a:t>
             </a:r>
           </a:p>
           <a:p>
@@ -4564,43 +4579,7 @@
       </p:sp>
       <p:sp>
         <p:nvSpPr>
-          <p:cNvPr id="12" name="TextBox 11"/>
-          <p:cNvSpPr txBox="1"/>
-          <p:nvPr/>
-        </p:nvSpPr>
-        <p:spPr>
-          <a:xfrm>
-            <a:off x="685800" y="4773168"/>
-            <a:ext cx="7772400" cy="347472"/>
-          </a:xfrm>
-          <a:prstGeom prst="rect">
-            <a:avLst/>
-          </a:prstGeom>
-          <a:noFill/>
-        </p:spPr>
-        <p:txBody>
-          <a:bodyPr wrap="square">
-            <a:spAutoFit/>
-          </a:bodyPr>
-          <a:lstStyle/>
-          <a:p>
-            <a:pPr algn="l">
-              <a:defRPr sz="1200" b="0">
-                <a:solidFill>
-                  <a:srgbClr val="06B6D4"/>
-                </a:solidFill>
-                <a:latin typeface="Calibri"/>
-              </a:defRPr>
-            </a:pPr>
-            <a:r>
-              <a:t>github.com/dev-enthusiast-84/llm-wiki</a:t>
-            </a:r>
-          </a:p>
-        </p:txBody>
-      </p:sp>
-      <p:sp>
-        <p:nvSpPr>
-          <p:cNvPr id="13" name="Rectangle 12"/>
+          <p:cNvPr id="12" name="Rectangle 11"/>
           <p:cNvSpPr/>
           <p:nvPr/>
         </p:nvSpPr>
@@ -4643,7 +4622,7 @@
       </p:sp>
       <p:sp>
         <p:nvSpPr>
-          <p:cNvPr id="14" name="TextBox 13"/>
+          <p:cNvPr id="13" name="TextBox 12"/>
           <p:cNvSpPr txBox="1"/>
           <p:nvPr/>
         </p:nvSpPr>
@@ -4666,7 +4645,7 @@
             <a:pPr algn="ctr">
               <a:defRPr sz="1100" b="1">
                 <a:solidFill>
-                  <a:srgbClr val="6982AC"/>
+                  <a:srgbClr val="C4D4EE"/>
                 </a:solidFill>
                 <a:latin typeface="Calibri"/>
               </a:defRPr>
@@ -4679,7 +4658,7 @@
       </p:sp>
       <p:sp>
         <p:nvSpPr>
-          <p:cNvPr id="15" name="Rounded Rectangle 14"/>
+          <p:cNvPr id="14" name="Rounded Rectangle 13"/>
           <p:cNvSpPr/>
           <p:nvPr/>
         </p:nvSpPr>
@@ -4724,7 +4703,7 @@
       </p:sp>
       <p:sp>
         <p:nvSpPr>
-          <p:cNvPr id="16" name="Rectangle 15"/>
+          <p:cNvPr id="15" name="Rectangle 14"/>
           <p:cNvSpPr/>
           <p:nvPr/>
         </p:nvSpPr>
@@ -4767,7 +4746,7 @@
       </p:sp>
       <p:sp>
         <p:nvSpPr>
-          <p:cNvPr id="17" name="TextBox 16"/>
+          <p:cNvPr id="16" name="TextBox 15"/>
           <p:cNvSpPr txBox="1"/>
           <p:nvPr/>
         </p:nvSpPr>
@@ -4803,7 +4782,7 @@
       </p:sp>
       <p:sp>
         <p:nvSpPr>
-          <p:cNvPr id="18" name="TextBox 17"/>
+          <p:cNvPr id="17" name="TextBox 16"/>
           <p:cNvSpPr txBox="1"/>
           <p:nvPr/>
         </p:nvSpPr>
@@ -4824,7 +4803,7 @@
           <a:lstStyle/>
           <a:p>
             <a:pPr algn="l">
-              <a:defRPr sz="1100" b="0">
+              <a:defRPr sz="1200" b="0">
                 <a:solidFill>
                   <a:srgbClr val="C4D4EE"/>
                 </a:solidFill>
@@ -4839,7 +4818,7 @@
       </p:sp>
       <p:sp>
         <p:nvSpPr>
-          <p:cNvPr id="19" name="TextBox 18"/>
+          <p:cNvPr id="18" name="TextBox 17"/>
           <p:cNvSpPr txBox="1"/>
           <p:nvPr/>
         </p:nvSpPr>
@@ -4862,7 +4841,7 @@
             <a:pPr algn="ctr">
               <a:defRPr sz="1500" b="0">
                 <a:solidFill>
-                  <a:srgbClr val="6982AC"/>
+                  <a:srgbClr val="C4D4EE"/>
                 </a:solidFill>
                 <a:latin typeface="Calibri"/>
               </a:defRPr>
@@ -4875,7 +4854,7 @@
       </p:sp>
       <p:sp>
         <p:nvSpPr>
-          <p:cNvPr id="20" name="Rounded Rectangle 19"/>
+          <p:cNvPr id="19" name="Rounded Rectangle 18"/>
           <p:cNvSpPr/>
           <p:nvPr/>
         </p:nvSpPr>
@@ -4920,7 +4899,7 @@
       </p:sp>
       <p:sp>
         <p:nvSpPr>
-          <p:cNvPr id="21" name="Rectangle 20"/>
+          <p:cNvPr id="20" name="Rectangle 19"/>
           <p:cNvSpPr/>
           <p:nvPr/>
         </p:nvSpPr>
@@ -4963,7 +4942,7 @@
       </p:sp>
       <p:sp>
         <p:nvSpPr>
-          <p:cNvPr id="22" name="TextBox 21"/>
+          <p:cNvPr id="21" name="TextBox 20"/>
           <p:cNvSpPr txBox="1"/>
           <p:nvPr/>
         </p:nvSpPr>
@@ -4986,7 +4965,7 @@
             <a:pPr algn="l">
               <a:defRPr sz="1300" b="1">
                 <a:solidFill>
-                  <a:srgbClr val="3B82F6"/>
+                  <a:srgbClr val="64A5FF"/>
                 </a:solidFill>
                 <a:latin typeface="Calibri"/>
               </a:defRPr>
@@ -4999,7 +4978,7 @@
       </p:sp>
       <p:sp>
         <p:nvSpPr>
-          <p:cNvPr id="23" name="TextBox 22"/>
+          <p:cNvPr id="22" name="TextBox 21"/>
           <p:cNvSpPr txBox="1"/>
           <p:nvPr/>
         </p:nvSpPr>
@@ -5020,7 +4999,7 @@
           <a:lstStyle/>
           <a:p>
             <a:pPr algn="l">
-              <a:defRPr sz="1100" b="0">
+              <a:defRPr sz="1200" b="0">
                 <a:solidFill>
                   <a:srgbClr val="C4D4EE"/>
                 </a:solidFill>
@@ -5035,7 +5014,7 @@
       </p:sp>
       <p:sp>
         <p:nvSpPr>
-          <p:cNvPr id="24" name="TextBox 23"/>
+          <p:cNvPr id="23" name="TextBox 22"/>
           <p:cNvSpPr txBox="1"/>
           <p:nvPr/>
         </p:nvSpPr>
@@ -5058,7 +5037,7 @@
             <a:pPr algn="ctr">
               <a:defRPr sz="1500" b="0">
                 <a:solidFill>
-                  <a:srgbClr val="6982AC"/>
+                  <a:srgbClr val="C4D4EE"/>
                 </a:solidFill>
                 <a:latin typeface="Calibri"/>
               </a:defRPr>
@@ -5071,7 +5050,7 @@
       </p:sp>
       <p:sp>
         <p:nvSpPr>
-          <p:cNvPr id="25" name="Rounded Rectangle 24"/>
+          <p:cNvPr id="24" name="Rounded Rectangle 23"/>
           <p:cNvSpPr/>
           <p:nvPr/>
         </p:nvSpPr>
@@ -5116,7 +5095,7 @@
       </p:sp>
       <p:sp>
         <p:nvSpPr>
-          <p:cNvPr id="26" name="Rectangle 25"/>
+          <p:cNvPr id="25" name="Rectangle 24"/>
           <p:cNvSpPr/>
           <p:nvPr/>
         </p:nvSpPr>
@@ -5159,7 +5138,7 @@
       </p:sp>
       <p:sp>
         <p:nvSpPr>
-          <p:cNvPr id="27" name="TextBox 26"/>
+          <p:cNvPr id="26" name="TextBox 25"/>
           <p:cNvSpPr txBox="1"/>
           <p:nvPr/>
         </p:nvSpPr>
@@ -5182,7 +5161,7 @@
             <a:pPr algn="l">
               <a:defRPr sz="1300" b="1">
                 <a:solidFill>
-                  <a:srgbClr val="8B5CF6"/>
+                  <a:srgbClr val="AA82FF"/>
                 </a:solidFill>
                 <a:latin typeface="Calibri"/>
               </a:defRPr>
@@ -5195,7 +5174,7 @@
       </p:sp>
       <p:sp>
         <p:nvSpPr>
-          <p:cNvPr id="28" name="TextBox 27"/>
+          <p:cNvPr id="27" name="TextBox 26"/>
           <p:cNvSpPr txBox="1"/>
           <p:nvPr/>
         </p:nvSpPr>
@@ -5216,7 +5195,7 @@
           <a:lstStyle/>
           <a:p>
             <a:pPr algn="l">
-              <a:defRPr sz="1100" b="0">
+              <a:defRPr sz="1200" b="0">
                 <a:solidFill>
                   <a:srgbClr val="C4D4EE"/>
                 </a:solidFill>
@@ -8200,7 +8179,7 @@
           <a:lstStyle/>
           <a:p>
             <a:pPr algn="ctr">
-              <a:defRPr sz="1200" b="1">
+              <a:defRPr sz="1300" b="1">
                 <a:solidFill>
                   <a:srgbClr val="F59E0B"/>
                 </a:solidFill>
@@ -8222,7 +8201,7 @@
         <p:spPr>
           <a:xfrm>
             <a:off x="640080" y="1810512"/>
-            <a:ext cx="1828800" cy="182880"/>
+            <a:ext cx="1828800" cy="201168"/>
           </a:xfrm>
           <a:prstGeom prst="rect">
             <a:avLst/>
@@ -8236,7 +8215,7 @@
           <a:lstStyle/>
           <a:p>
             <a:pPr algn="l">
-              <a:defRPr sz="900" b="1">
+              <a:defRPr sz="1100" b="1">
                 <a:solidFill>
                   <a:srgbClr val="F59E0B"/>
                 </a:solidFill>
@@ -8258,7 +8237,7 @@
         <p:spPr>
           <a:xfrm>
             <a:off x="640080" y="2002536"/>
-            <a:ext cx="1920240" cy="310896"/>
+            <a:ext cx="2103120" cy="274320"/>
           </a:xfrm>
           <a:prstGeom prst="rect">
             <a:avLst/>
@@ -8272,7 +8251,7 @@
           <a:lstStyle/>
           <a:p>
             <a:pPr algn="l">
-              <a:defRPr sz="1000" b="1">
+              <a:defRPr sz="1100" b="1">
                 <a:solidFill>
                   <a:srgbClr val="F59E0B"/>
                 </a:solidFill>
@@ -8280,6 +8259,78 @@
               </a:defRPr>
             </a:pPr>
             <a:r>
+              <a:t>/orchestrate-wiki</a:t>
+            </a:r>
+          </a:p>
+        </p:txBody>
+      </p:sp>
+      <p:sp>
+        <p:nvSpPr>
+          <p:cNvPr id="9" name="TextBox 8"/>
+          <p:cNvSpPr txBox="1"/>
+          <p:nvPr/>
+        </p:nvSpPr>
+        <p:spPr>
+          <a:xfrm>
+            <a:off x="2834640" y="2002536"/>
+            <a:ext cx="2743200" cy="274320"/>
+          </a:xfrm>
+          <a:prstGeom prst="rect">
+            <a:avLst/>
+          </a:prstGeom>
+          <a:noFill/>
+        </p:spPr>
+        <p:txBody>
+          <a:bodyPr wrap="square">
+            <a:spAutoFit/>
+          </a:bodyPr>
+          <a:lstStyle/>
+          <a:p>
+            <a:pPr algn="l">
+              <a:defRPr sz="1100" b="0">
+                <a:solidFill>
+                  <a:srgbClr val="C4D4EE"/>
+                </a:solidFill>
+                <a:latin typeface="Calibri"/>
+              </a:defRPr>
+            </a:pPr>
+            <a:r>
+              <a:t>Full pipeline — parallel agents</a:t>
+            </a:r>
+          </a:p>
+        </p:txBody>
+      </p:sp>
+      <p:sp>
+        <p:nvSpPr>
+          <p:cNvPr id="10" name="TextBox 9"/>
+          <p:cNvSpPr txBox="1"/>
+          <p:nvPr/>
+        </p:nvSpPr>
+        <p:spPr>
+          <a:xfrm>
+            <a:off x="640080" y="2313432"/>
+            <a:ext cx="2103120" cy="274320"/>
+          </a:xfrm>
+          <a:prstGeom prst="rect">
+            <a:avLst/>
+          </a:prstGeom>
+          <a:noFill/>
+        </p:spPr>
+        <p:txBody>
+          <a:bodyPr wrap="square">
+            <a:spAutoFit/>
+          </a:bodyPr>
+          <a:lstStyle/>
+          <a:p>
+            <a:pPr algn="l">
+              <a:defRPr sz="1100" b="1">
+                <a:solidFill>
+                  <a:srgbClr val="F59E0B"/>
+                </a:solidFill>
+                <a:latin typeface="Courier New"/>
+              </a:defRPr>
+            </a:pPr>
+            <a:r>
               <a:t>/compile-papers</a:t>
             </a:r>
           </a:p>
@@ -8287,14 +8338,14 @@
       </p:sp>
       <p:sp>
         <p:nvSpPr>
-          <p:cNvPr id="9" name="TextBox 8"/>
-          <p:cNvSpPr txBox="1"/>
-          <p:nvPr/>
-        </p:nvSpPr>
-        <p:spPr>
-          <a:xfrm>
-            <a:off x="2679192" y="2002536"/>
-            <a:ext cx="2944368" cy="310896"/>
+          <p:cNvPr id="11" name="TextBox 10"/>
+          <p:cNvSpPr txBox="1"/>
+          <p:nvPr/>
+        </p:nvSpPr>
+        <p:spPr>
+          <a:xfrm>
+            <a:off x="2834640" y="2313432"/>
+            <a:ext cx="2743200" cy="274320"/>
           </a:xfrm>
           <a:prstGeom prst="rect">
             <a:avLst/>
@@ -8308,7 +8359,7 @@
           <a:lstStyle/>
           <a:p>
             <a:pPr algn="l">
-              <a:defRPr sz="1000" b="0">
+              <a:defRPr sz="1100" b="0">
                 <a:solidFill>
                   <a:srgbClr val="C4D4EE"/>
                 </a:solidFill>
@@ -8316,21 +8367,21 @@
               </a:defRPr>
             </a:pPr>
             <a:r>
-              <a:t>Extract concepts from all /raw sources</a:t>
-            </a:r>
-          </a:p>
-        </p:txBody>
-      </p:sp>
-      <p:sp>
-        <p:nvSpPr>
-          <p:cNvPr id="10" name="TextBox 9"/>
-          <p:cNvSpPr txBox="1"/>
-          <p:nvPr/>
-        </p:nvSpPr>
-        <p:spPr>
-          <a:xfrm>
-            <a:off x="640080" y="2340864"/>
-            <a:ext cx="1920240" cy="310896"/>
+              <a:t>Extract concepts from /raw</a:t>
+            </a:r>
+          </a:p>
+        </p:txBody>
+      </p:sp>
+      <p:sp>
+        <p:nvSpPr>
+          <p:cNvPr id="12" name="TextBox 11"/>
+          <p:cNvSpPr txBox="1"/>
+          <p:nvPr/>
+        </p:nvSpPr>
+        <p:spPr>
+          <a:xfrm>
+            <a:off x="640080" y="2624328"/>
+            <a:ext cx="2103120" cy="274320"/>
           </a:xfrm>
           <a:prstGeom prst="rect">
             <a:avLst/>
@@ -8344,7 +8395,7 @@
           <a:lstStyle/>
           <a:p>
             <a:pPr algn="l">
-              <a:defRPr sz="1000" b="1">
+              <a:defRPr sz="1100" b="1">
                 <a:solidFill>
                   <a:srgbClr val="F59E0B"/>
                 </a:solidFill>
@@ -8359,14 +8410,14 @@
       </p:sp>
       <p:sp>
         <p:nvSpPr>
-          <p:cNvPr id="11" name="TextBox 10"/>
-          <p:cNvSpPr txBox="1"/>
-          <p:nvPr/>
-        </p:nvSpPr>
-        <p:spPr>
-          <a:xfrm>
-            <a:off x="2679192" y="2340864"/>
-            <a:ext cx="2944368" cy="310896"/>
+          <p:cNvPr id="13" name="TextBox 12"/>
+          <p:cNvSpPr txBox="1"/>
+          <p:nvPr/>
+        </p:nvSpPr>
+        <p:spPr>
+          <a:xfrm>
+            <a:off x="2834640" y="2624328"/>
+            <a:ext cx="2743200" cy="274320"/>
           </a:xfrm>
           <a:prstGeom prst="rect">
             <a:avLst/>
@@ -8380,7 +8431,7 @@
           <a:lstStyle/>
           <a:p>
             <a:pPr algn="l">
-              <a:defRPr sz="1000" b="0">
+              <a:defRPr sz="1100" b="0">
                 <a:solidFill>
                   <a:srgbClr val="C4D4EE"/>
                 </a:solidFill>
@@ -8388,21 +8439,21 @@
               </a:defRPr>
             </a:pPr>
             <a:r>
-              <a:t>Incremental update from new sources</a:t>
-            </a:r>
-          </a:p>
-        </p:txBody>
-      </p:sp>
-      <p:sp>
-        <p:nvSpPr>
-          <p:cNvPr id="12" name="TextBox 11"/>
-          <p:cNvSpPr txBox="1"/>
-          <p:nvPr/>
-        </p:nvSpPr>
-        <p:spPr>
-          <a:xfrm>
-            <a:off x="640080" y="2679192"/>
-            <a:ext cx="1920240" cy="310896"/>
+              <a:t>Incremental update from /raw</a:t>
+            </a:r>
+          </a:p>
+        </p:txBody>
+      </p:sp>
+      <p:sp>
+        <p:nvSpPr>
+          <p:cNvPr id="14" name="TextBox 13"/>
+          <p:cNvSpPr txBox="1"/>
+          <p:nvPr/>
+        </p:nvSpPr>
+        <p:spPr>
+          <a:xfrm>
+            <a:off x="640080" y="2935224"/>
+            <a:ext cx="2103120" cy="274320"/>
           </a:xfrm>
           <a:prstGeom prst="rect">
             <a:avLst/>
@@ -8416,7 +8467,7 @@
           <a:lstStyle/>
           <a:p>
             <a:pPr algn="l">
-              <a:defRPr sz="1000" b="1">
+              <a:defRPr sz="1100" b="1">
                 <a:solidFill>
                   <a:srgbClr val="F59E0B"/>
                 </a:solidFill>
@@ -8431,14 +8482,14 @@
       </p:sp>
       <p:sp>
         <p:nvSpPr>
-          <p:cNvPr id="13" name="TextBox 12"/>
-          <p:cNvSpPr txBox="1"/>
-          <p:nvPr/>
-        </p:nvSpPr>
-        <p:spPr>
-          <a:xfrm>
-            <a:off x="2679192" y="2679192"/>
-            <a:ext cx="2944368" cy="310896"/>
+          <p:cNvPr id="15" name="TextBox 14"/>
+          <p:cNvSpPr txBox="1"/>
+          <p:nvPr/>
+        </p:nvSpPr>
+        <p:spPr>
+          <a:xfrm>
+            <a:off x="2834640" y="2935224"/>
+            <a:ext cx="2743200" cy="274320"/>
           </a:xfrm>
           <a:prstGeom prst="rect">
             <a:avLst/>
@@ -8452,7 +8503,7 @@
           <a:lstStyle/>
           <a:p>
             <a:pPr algn="l">
-              <a:defRPr sz="1000" b="0">
+              <a:defRPr sz="1100" b="0">
                 <a:solidFill>
                   <a:srgbClr val="C4D4EE"/>
                 </a:solidFill>
@@ -8460,21 +8511,21 @@
               </a:defRPr>
             </a:pPr>
             <a:r>
-              <a:t>Quality check — orphans, contradictions</a:t>
-            </a:r>
-          </a:p>
-        </p:txBody>
-      </p:sp>
-      <p:sp>
-        <p:nvSpPr>
-          <p:cNvPr id="14" name="TextBox 13"/>
-          <p:cNvSpPr txBox="1"/>
-          <p:nvPr/>
-        </p:nvSpPr>
-        <p:spPr>
-          <a:xfrm>
-            <a:off x="640080" y="3017520"/>
-            <a:ext cx="1920240" cy="310896"/>
+              <a:t>Quality check — parallel agents</a:t>
+            </a:r>
+          </a:p>
+        </p:txBody>
+      </p:sp>
+      <p:sp>
+        <p:nvSpPr>
+          <p:cNvPr id="16" name="TextBox 15"/>
+          <p:cNvSpPr txBox="1"/>
+          <p:nvPr/>
+        </p:nvSpPr>
+        <p:spPr>
+          <a:xfrm>
+            <a:off x="640080" y="3246120"/>
+            <a:ext cx="2103120" cy="274320"/>
           </a:xfrm>
           <a:prstGeom prst="rect">
             <a:avLst/>
@@ -8488,7 +8539,7 @@
           <a:lstStyle/>
           <a:p>
             <a:pPr algn="l">
-              <a:defRPr sz="1000" b="1">
+              <a:defRPr sz="1100" b="1">
                 <a:solidFill>
                   <a:srgbClr val="F59E0B"/>
                 </a:solidFill>
@@ -8503,14 +8554,14 @@
       </p:sp>
       <p:sp>
         <p:nvSpPr>
-          <p:cNvPr id="15" name="TextBox 14"/>
-          <p:cNvSpPr txBox="1"/>
-          <p:nvPr/>
-        </p:nvSpPr>
-        <p:spPr>
-          <a:xfrm>
-            <a:off x="2679192" y="3017520"/>
-            <a:ext cx="2944368" cy="310896"/>
+          <p:cNvPr id="17" name="TextBox 16"/>
+          <p:cNvSpPr txBox="1"/>
+          <p:nvPr/>
+        </p:nvSpPr>
+        <p:spPr>
+          <a:xfrm>
+            <a:off x="2834640" y="3246120"/>
+            <a:ext cx="2743200" cy="274320"/>
           </a:xfrm>
           <a:prstGeom prst="rect">
             <a:avLst/>
@@ -8524,7 +8575,7 @@
           <a:lstStyle/>
           <a:p>
             <a:pPr algn="l">
-              <a:defRPr sz="1000" b="0">
+              <a:defRPr sz="1100" b="0">
                 <a:solidFill>
                   <a:srgbClr val="C4D4EE"/>
                 </a:solidFill>
@@ -8539,14 +8590,14 @@
       </p:sp>
       <p:sp>
         <p:nvSpPr>
-          <p:cNvPr id="16" name="TextBox 15"/>
-          <p:cNvSpPr txBox="1"/>
-          <p:nvPr/>
-        </p:nvSpPr>
-        <p:spPr>
-          <a:xfrm>
-            <a:off x="640080" y="3355848"/>
-            <a:ext cx="1920240" cy="310896"/>
+          <p:cNvPr id="18" name="TextBox 17"/>
+          <p:cNvSpPr txBox="1"/>
+          <p:nvPr/>
+        </p:nvSpPr>
+        <p:spPr>
+          <a:xfrm>
+            <a:off x="640080" y="3557016"/>
+            <a:ext cx="2103120" cy="274320"/>
           </a:xfrm>
           <a:prstGeom prst="rect">
             <a:avLst/>
@@ -8560,7 +8611,7 @@
           <a:lstStyle/>
           <a:p>
             <a:pPr algn="l">
-              <a:defRPr sz="1000" b="1">
+              <a:defRPr sz="1100" b="1">
                 <a:solidFill>
                   <a:srgbClr val="F59E0B"/>
                 </a:solidFill>
@@ -8575,14 +8626,14 @@
       </p:sp>
       <p:sp>
         <p:nvSpPr>
-          <p:cNvPr id="17" name="TextBox 16"/>
-          <p:cNvSpPr txBox="1"/>
-          <p:nvPr/>
-        </p:nvSpPr>
-        <p:spPr>
-          <a:xfrm>
-            <a:off x="2679192" y="3355848"/>
-            <a:ext cx="2944368" cy="310896"/>
+          <p:cNvPr id="19" name="TextBox 18"/>
+          <p:cNvSpPr txBox="1"/>
+          <p:nvPr/>
+        </p:nvSpPr>
+        <p:spPr>
+          <a:xfrm>
+            <a:off x="2834640" y="3557016"/>
+            <a:ext cx="2743200" cy="274320"/>
           </a:xfrm>
           <a:prstGeom prst="rect">
             <a:avLst/>
@@ -8596,7 +8647,7 @@
           <a:lstStyle/>
           <a:p>
             <a:pPr algn="l">
-              <a:defRPr sz="1000" b="0">
+              <a:defRPr sz="1100" b="0">
                 <a:solidFill>
                   <a:srgbClr val="C4D4EE"/>
                 </a:solidFill>
@@ -8611,14 +8662,14 @@
       </p:sp>
       <p:sp>
         <p:nvSpPr>
-          <p:cNvPr id="18" name="TextBox 17"/>
-          <p:cNvSpPr txBox="1"/>
-          <p:nvPr/>
-        </p:nvSpPr>
-        <p:spPr>
-          <a:xfrm>
-            <a:off x="640080" y="3694176"/>
-            <a:ext cx="1920240" cy="310896"/>
+          <p:cNvPr id="20" name="TextBox 19"/>
+          <p:cNvSpPr txBox="1"/>
+          <p:nvPr/>
+        </p:nvSpPr>
+        <p:spPr>
+          <a:xfrm>
+            <a:off x="640080" y="3867912"/>
+            <a:ext cx="2103120" cy="274320"/>
           </a:xfrm>
           <a:prstGeom prst="rect">
             <a:avLst/>
@@ -8632,7 +8683,7 @@
           <a:lstStyle/>
           <a:p>
             <a:pPr algn="l">
-              <a:defRPr sz="1000" b="1">
+              <a:defRPr sz="1100" b="1">
                 <a:solidFill>
                   <a:srgbClr val="F59E0B"/>
                 </a:solidFill>
@@ -8647,14 +8698,14 @@
       </p:sp>
       <p:sp>
         <p:nvSpPr>
-          <p:cNvPr id="19" name="TextBox 18"/>
-          <p:cNvSpPr txBox="1"/>
-          <p:nvPr/>
-        </p:nvSpPr>
-        <p:spPr>
-          <a:xfrm>
-            <a:off x="2679192" y="3694176"/>
-            <a:ext cx="2944368" cy="310896"/>
+          <p:cNvPr id="21" name="TextBox 20"/>
+          <p:cNvSpPr txBox="1"/>
+          <p:nvPr/>
+        </p:nvSpPr>
+        <p:spPr>
+          <a:xfrm>
+            <a:off x="2834640" y="3867912"/>
+            <a:ext cx="2743200" cy="274320"/>
           </a:xfrm>
           <a:prstGeom prst="rect">
             <a:avLst/>
@@ -8668,7 +8719,7 @@
           <a:lstStyle/>
           <a:p>
             <a:pPr algn="l">
-              <a:defRPr sz="1000" b="0">
+              <a:defRPr sz="1100" b="0">
                 <a:solidFill>
                   <a:srgbClr val="C4D4EE"/>
                 </a:solidFill>
@@ -8683,13 +8734,13 @@
       </p:sp>
       <p:sp>
         <p:nvSpPr>
-          <p:cNvPr id="20" name="Rectangle 19"/>
+          <p:cNvPr id="22" name="Rectangle 21"/>
           <p:cNvSpPr/>
           <p:nvPr/>
         </p:nvSpPr>
         <p:spPr>
           <a:xfrm>
-            <a:off x="640080" y="4069080"/>
+            <a:off x="640080" y="4215384"/>
             <a:ext cx="4956048" cy="12700"/>
           </a:xfrm>
           <a:prstGeom prst="rect">
@@ -8726,14 +8777,14 @@
       </p:sp>
       <p:sp>
         <p:nvSpPr>
-          <p:cNvPr id="21" name="TextBox 20"/>
-          <p:cNvSpPr txBox="1"/>
-          <p:nvPr/>
-        </p:nvSpPr>
-        <p:spPr>
-          <a:xfrm>
-            <a:off x="640080" y="4142232"/>
-            <a:ext cx="2011680" cy="182880"/>
+          <p:cNvPr id="23" name="TextBox 22"/>
+          <p:cNvSpPr txBox="1"/>
+          <p:nvPr/>
+        </p:nvSpPr>
+        <p:spPr>
+          <a:xfrm>
+            <a:off x="640080" y="4288536"/>
+            <a:ext cx="2011680" cy="201168"/>
           </a:xfrm>
           <a:prstGeom prst="rect">
             <a:avLst/>
@@ -8747,9 +8798,9 @@
           <a:lstStyle/>
           <a:p>
             <a:pPr algn="l">
-              <a:defRPr sz="900" b="1">
-                <a:solidFill>
-                  <a:srgbClr val="8B5CF6"/>
+              <a:defRPr sz="1100" b="1">
+                <a:solidFill>
+                  <a:srgbClr val="AA82FF"/>
                 </a:solidFill>
                 <a:latin typeface="Calibri"/>
               </a:defRPr>
@@ -8762,14 +8813,14 @@
       </p:sp>
       <p:sp>
         <p:nvSpPr>
-          <p:cNvPr id="22" name="TextBox 21"/>
-          <p:cNvSpPr txBox="1"/>
-          <p:nvPr/>
-        </p:nvSpPr>
-        <p:spPr>
-          <a:xfrm>
-            <a:off x="640080" y="4343400"/>
-            <a:ext cx="1920240" cy="310896"/>
+          <p:cNvPr id="24" name="TextBox 23"/>
+          <p:cNvSpPr txBox="1"/>
+          <p:nvPr/>
+        </p:nvSpPr>
+        <p:spPr>
+          <a:xfrm>
+            <a:off x="640080" y="4489704"/>
+            <a:ext cx="2103120" cy="274320"/>
           </a:xfrm>
           <a:prstGeom prst="rect">
             <a:avLst/>
@@ -8783,9 +8834,9 @@
           <a:lstStyle/>
           <a:p>
             <a:pPr algn="l">
-              <a:defRPr sz="1000" b="1">
-                <a:solidFill>
-                  <a:srgbClr val="8B5CF6"/>
+              <a:defRPr sz="1100" b="1">
+                <a:solidFill>
+                  <a:srgbClr val="AA82FF"/>
                 </a:solidFill>
                 <a:latin typeface="Courier New"/>
               </a:defRPr>
@@ -8798,14 +8849,14 @@
       </p:sp>
       <p:sp>
         <p:nvSpPr>
-          <p:cNvPr id="23" name="TextBox 22"/>
-          <p:cNvSpPr txBox="1"/>
-          <p:nvPr/>
-        </p:nvSpPr>
-        <p:spPr>
-          <a:xfrm>
-            <a:off x="2679192" y="4343400"/>
-            <a:ext cx="2944368" cy="310896"/>
+          <p:cNvPr id="25" name="TextBox 24"/>
+          <p:cNvSpPr txBox="1"/>
+          <p:nvPr/>
+        </p:nvSpPr>
+        <p:spPr>
+          <a:xfrm>
+            <a:off x="2834640" y="4489704"/>
+            <a:ext cx="2743200" cy="274320"/>
           </a:xfrm>
           <a:prstGeom prst="rect">
             <a:avLst/>
@@ -8819,7 +8870,7 @@
           <a:lstStyle/>
           <a:p>
             <a:pPr algn="l">
-              <a:defRPr sz="1000" b="0">
+              <a:defRPr sz="1100" b="0">
                 <a:solidFill>
                   <a:srgbClr val="C4D4EE"/>
                 </a:solidFill>
@@ -8827,21 +8878,21 @@
               </a:defRPr>
             </a:pPr>
             <a:r>
-              <a:t>Sync README, GitHub Pages, sub-READMEs</a:t>
-            </a:r>
-          </a:p>
-        </p:txBody>
-      </p:sp>
-      <p:sp>
-        <p:nvSpPr>
-          <p:cNvPr id="24" name="TextBox 23"/>
-          <p:cNvSpPr txBox="1"/>
-          <p:nvPr/>
-        </p:nvSpPr>
-        <p:spPr>
-          <a:xfrm>
-            <a:off x="640080" y="4681728"/>
-            <a:ext cx="1920240" cy="310896"/>
+              <a:t>Sync README, GitHub Pages, sub-docs</a:t>
+            </a:r>
+          </a:p>
+        </p:txBody>
+      </p:sp>
+      <p:sp>
+        <p:nvSpPr>
+          <p:cNvPr id="26" name="TextBox 25"/>
+          <p:cNvSpPr txBox="1"/>
+          <p:nvPr/>
+        </p:nvSpPr>
+        <p:spPr>
+          <a:xfrm>
+            <a:off x="640080" y="4800600"/>
+            <a:ext cx="2103120" cy="274320"/>
           </a:xfrm>
           <a:prstGeom prst="rect">
             <a:avLst/>
@@ -8855,9 +8906,9 @@
           <a:lstStyle/>
           <a:p>
             <a:pPr algn="l">
-              <a:defRPr sz="1000" b="1">
-                <a:solidFill>
-                  <a:srgbClr val="8B5CF6"/>
+              <a:defRPr sz="1100" b="1">
+                <a:solidFill>
+                  <a:srgbClr val="AA82FF"/>
                 </a:solidFill>
                 <a:latin typeface="Courier New"/>
               </a:defRPr>
@@ -8870,14 +8921,14 @@
       </p:sp>
       <p:sp>
         <p:nvSpPr>
-          <p:cNvPr id="25" name="TextBox 24"/>
-          <p:cNvSpPr txBox="1"/>
-          <p:nvPr/>
-        </p:nvSpPr>
-        <p:spPr>
-          <a:xfrm>
-            <a:off x="2679192" y="4681728"/>
-            <a:ext cx="2944368" cy="310896"/>
+          <p:cNvPr id="27" name="TextBox 26"/>
+          <p:cNvSpPr txBox="1"/>
+          <p:nvPr/>
+        </p:nvSpPr>
+        <p:spPr>
+          <a:xfrm>
+            <a:off x="2834640" y="4800600"/>
+            <a:ext cx="2743200" cy="274320"/>
           </a:xfrm>
           <a:prstGeom prst="rect">
             <a:avLst/>
@@ -8891,7 +8942,7 @@
           <a:lstStyle/>
           <a:p>
             <a:pPr algn="l">
-              <a:defRPr sz="1000" b="0">
+              <a:defRPr sz="1100" b="0">
                 <a:solidFill>
                   <a:srgbClr val="C4D4EE"/>
                 </a:solidFill>
@@ -8899,21 +8950,21 @@
               </a:defRPr>
             </a:pPr>
             <a:r>
-              <a:t>Run tests, verify skills, git health</a:t>
-            </a:r>
-          </a:p>
-        </p:txBody>
-      </p:sp>
-      <p:sp>
-        <p:nvSpPr>
-          <p:cNvPr id="26" name="TextBox 25"/>
-          <p:cNvSpPr txBox="1"/>
-          <p:nvPr/>
-        </p:nvSpPr>
-        <p:spPr>
-          <a:xfrm>
-            <a:off x="640080" y="5020056"/>
-            <a:ext cx="1920240" cy="310896"/>
+              <a:t>Tests, skill check, git health</a:t>
+            </a:r>
+          </a:p>
+        </p:txBody>
+      </p:sp>
+      <p:sp>
+        <p:nvSpPr>
+          <p:cNvPr id="28" name="TextBox 27"/>
+          <p:cNvSpPr txBox="1"/>
+          <p:nvPr/>
+        </p:nvSpPr>
+        <p:spPr>
+          <a:xfrm>
+            <a:off x="640080" y="5111496"/>
+            <a:ext cx="2103120" cy="274320"/>
           </a:xfrm>
           <a:prstGeom prst="rect">
             <a:avLst/>
@@ -8927,9 +8978,9 @@
           <a:lstStyle/>
           <a:p>
             <a:pPr algn="l">
-              <a:defRPr sz="1000" b="1">
-                <a:solidFill>
-                  <a:srgbClr val="8B5CF6"/>
+              <a:defRPr sz="1100" b="1">
+                <a:solidFill>
+                  <a:srgbClr val="AA82FF"/>
                 </a:solidFill>
                 <a:latin typeface="Courier New"/>
               </a:defRPr>
@@ -8942,14 +8993,14 @@
       </p:sp>
       <p:sp>
         <p:nvSpPr>
-          <p:cNvPr id="27" name="TextBox 26"/>
-          <p:cNvSpPr txBox="1"/>
-          <p:nvPr/>
-        </p:nvSpPr>
-        <p:spPr>
-          <a:xfrm>
-            <a:off x="2679192" y="5020056"/>
-            <a:ext cx="2944368" cy="310896"/>
+          <p:cNvPr id="29" name="TextBox 28"/>
+          <p:cNvSpPr txBox="1"/>
+          <p:nvPr/>
+        </p:nvSpPr>
+        <p:spPr>
+          <a:xfrm>
+            <a:off x="2834640" y="5111496"/>
+            <a:ext cx="2743200" cy="274320"/>
           </a:xfrm>
           <a:prstGeom prst="rect">
             <a:avLst/>
@@ -8963,7 +9014,7 @@
           <a:lstStyle/>
           <a:p>
             <a:pPr algn="l">
-              <a:defRPr sz="1000" b="0">
+              <a:defRPr sz="1100" b="0">
                 <a:solidFill>
                   <a:srgbClr val="C4D4EE"/>
                 </a:solidFill>
@@ -8978,7 +9029,7 @@
       </p:sp>
       <p:sp>
         <p:nvSpPr>
-          <p:cNvPr id="28" name="Rounded Rectangle 27"/>
+          <p:cNvPr id="30" name="Rounded Rectangle 29"/>
           <p:cNvSpPr/>
           <p:nvPr/>
         </p:nvSpPr>
@@ -9023,7 +9074,7 @@
       </p:sp>
       <p:sp>
         <p:nvSpPr>
-          <p:cNvPr id="29" name="Rectangle 28"/>
+          <p:cNvPr id="31" name="Rectangle 30"/>
           <p:cNvSpPr/>
           <p:nvPr/>
         </p:nvSpPr>
@@ -9066,7 +9117,7 @@
       </p:sp>
       <p:sp>
         <p:nvSpPr>
-          <p:cNvPr id="30" name="TextBox 29"/>
+          <p:cNvPr id="32" name="TextBox 31"/>
           <p:cNvSpPr txBox="1"/>
           <p:nvPr/>
         </p:nvSpPr>
@@ -9087,9 +9138,9 @@
           <a:lstStyle/>
           <a:p>
             <a:pPr algn="ctr">
-              <a:defRPr sz="1200" b="1">
-                <a:solidFill>
-                  <a:srgbClr val="3B82F6"/>
+              <a:defRPr sz="1300" b="1">
+                <a:solidFill>
+                  <a:srgbClr val="64A5FF"/>
                 </a:solidFill>
                 <a:latin typeface="Calibri"/>
               </a:defRPr>
@@ -9102,14 +9153,14 @@
       </p:sp>
       <p:sp>
         <p:nvSpPr>
-          <p:cNvPr id="31" name="TextBox 30"/>
+          <p:cNvPr id="33" name="TextBox 32"/>
           <p:cNvSpPr txBox="1"/>
           <p:nvPr/>
         </p:nvSpPr>
         <p:spPr>
           <a:xfrm>
             <a:off x="6537960" y="1810512"/>
-            <a:ext cx="1828800" cy="182880"/>
+            <a:ext cx="1828800" cy="201168"/>
           </a:xfrm>
           <a:prstGeom prst="rect">
             <a:avLst/>
@@ -9123,9 +9174,9 @@
           <a:lstStyle/>
           <a:p>
             <a:pPr algn="l">
-              <a:defRPr sz="900" b="1">
-                <a:solidFill>
-                  <a:srgbClr val="3B82F6"/>
+              <a:defRPr sz="1100" b="1">
+                <a:solidFill>
+                  <a:srgbClr val="64A5FF"/>
                 </a:solidFill>
                 <a:latin typeface="Calibri"/>
               </a:defRPr>
@@ -9138,14 +9189,14 @@
       </p:sp>
       <p:sp>
         <p:nvSpPr>
-          <p:cNvPr id="32" name="TextBox 31"/>
+          <p:cNvPr id="34" name="TextBox 33"/>
           <p:cNvSpPr txBox="1"/>
           <p:nvPr/>
         </p:nvSpPr>
         <p:spPr>
           <a:xfrm>
             <a:off x="6537960" y="2002536"/>
-            <a:ext cx="2103120" cy="310896"/>
+            <a:ext cx="2103120" cy="274320"/>
           </a:xfrm>
           <a:prstGeom prst="rect">
             <a:avLst/>
@@ -9159,14 +9210,86 @@
           <a:lstStyle/>
           <a:p>
             <a:pPr algn="l">
-              <a:defRPr sz="1000" b="1">
-                <a:solidFill>
-                  <a:srgbClr val="3B82F6"/>
+              <a:defRPr sz="1100" b="1">
+                <a:solidFill>
+                  <a:srgbClr val="64A5FF"/>
                 </a:solidFill>
                 <a:latin typeface="Courier New"/>
               </a:defRPr>
             </a:pPr>
             <a:r>
+              <a:t>Orchestrate Wiki</a:t>
+            </a:r>
+          </a:p>
+        </p:txBody>
+      </p:sp>
+      <p:sp>
+        <p:nvSpPr>
+          <p:cNvPr id="35" name="TextBox 34"/>
+          <p:cNvSpPr txBox="1"/>
+          <p:nvPr/>
+        </p:nvSpPr>
+        <p:spPr>
+          <a:xfrm>
+            <a:off x="8732520" y="2002536"/>
+            <a:ext cx="2743200" cy="274320"/>
+          </a:xfrm>
+          <a:prstGeom prst="rect">
+            <a:avLst/>
+          </a:prstGeom>
+          <a:noFill/>
+        </p:spPr>
+        <p:txBody>
+          <a:bodyPr wrap="square">
+            <a:spAutoFit/>
+          </a:bodyPr>
+          <a:lstStyle/>
+          <a:p>
+            <a:pPr algn="l">
+              <a:defRPr sz="1100" b="0">
+                <a:solidFill>
+                  <a:srgbClr val="C4D4EE"/>
+                </a:solidFill>
+                <a:latin typeface="Calibri"/>
+              </a:defRPr>
+            </a:pPr>
+            <a:r>
+              <a:t>Full pipeline — parallel agents</a:t>
+            </a:r>
+          </a:p>
+        </p:txBody>
+      </p:sp>
+      <p:sp>
+        <p:nvSpPr>
+          <p:cNvPr id="36" name="TextBox 35"/>
+          <p:cNvSpPr txBox="1"/>
+          <p:nvPr/>
+        </p:nvSpPr>
+        <p:spPr>
+          <a:xfrm>
+            <a:off x="6537960" y="2313432"/>
+            <a:ext cx="2103120" cy="274320"/>
+          </a:xfrm>
+          <a:prstGeom prst="rect">
+            <a:avLst/>
+          </a:prstGeom>
+          <a:noFill/>
+        </p:spPr>
+        <p:txBody>
+          <a:bodyPr wrap="square">
+            <a:spAutoFit/>
+          </a:bodyPr>
+          <a:lstStyle/>
+          <a:p>
+            <a:pPr algn="l">
+              <a:defRPr sz="1100" b="1">
+                <a:solidFill>
+                  <a:srgbClr val="64A5FF"/>
+                </a:solidFill>
+                <a:latin typeface="Courier New"/>
+              </a:defRPr>
+            </a:pPr>
+            <a:r>
               <a:t>Compile Papers to Wiki</a:t>
             </a:r>
           </a:p>
@@ -9174,14 +9297,14 @@
       </p:sp>
       <p:sp>
         <p:nvSpPr>
-          <p:cNvPr id="33" name="TextBox 32"/>
-          <p:cNvSpPr txBox="1"/>
-          <p:nvPr/>
-        </p:nvSpPr>
-        <p:spPr>
-          <a:xfrm>
-            <a:off x="8759952" y="2002536"/>
-            <a:ext cx="2761488" cy="310896"/>
+          <p:cNvPr id="37" name="TextBox 36"/>
+          <p:cNvSpPr txBox="1"/>
+          <p:nvPr/>
+        </p:nvSpPr>
+        <p:spPr>
+          <a:xfrm>
+            <a:off x="8732520" y="2313432"/>
+            <a:ext cx="2743200" cy="274320"/>
           </a:xfrm>
           <a:prstGeom prst="rect">
             <a:avLst/>
@@ -9195,7 +9318,7 @@
           <a:lstStyle/>
           <a:p>
             <a:pPr algn="l">
-              <a:defRPr sz="1000" b="0">
+              <a:defRPr sz="1100" b="0">
                 <a:solidFill>
                   <a:srgbClr val="C4D4EE"/>
                 </a:solidFill>
@@ -9210,14 +9333,14 @@
       </p:sp>
       <p:sp>
         <p:nvSpPr>
-          <p:cNvPr id="34" name="TextBox 33"/>
-          <p:cNvSpPr txBox="1"/>
-          <p:nvPr/>
-        </p:nvSpPr>
-        <p:spPr>
-          <a:xfrm>
-            <a:off x="6537960" y="2340864"/>
-            <a:ext cx="2103120" cy="310896"/>
+          <p:cNvPr id="38" name="TextBox 37"/>
+          <p:cNvSpPr txBox="1"/>
+          <p:nvPr/>
+        </p:nvSpPr>
+        <p:spPr>
+          <a:xfrm>
+            <a:off x="6537960" y="2624328"/>
+            <a:ext cx="2103120" cy="274320"/>
           </a:xfrm>
           <a:prstGeom prst="rect">
             <a:avLst/>
@@ -9231,9 +9354,9 @@
           <a:lstStyle/>
           <a:p>
             <a:pPr algn="l">
-              <a:defRPr sz="1000" b="1">
-                <a:solidFill>
-                  <a:srgbClr val="3B82F6"/>
+              <a:defRPr sz="1100" b="1">
+                <a:solidFill>
+                  <a:srgbClr val="64A5FF"/>
                 </a:solidFill>
                 <a:latin typeface="Courier New"/>
               </a:defRPr>
@@ -9246,14 +9369,14 @@
       </p:sp>
       <p:sp>
         <p:nvSpPr>
-          <p:cNvPr id="35" name="TextBox 34"/>
-          <p:cNvSpPr txBox="1"/>
-          <p:nvPr/>
-        </p:nvSpPr>
-        <p:spPr>
-          <a:xfrm>
-            <a:off x="8759952" y="2340864"/>
-            <a:ext cx="2761488" cy="310896"/>
+          <p:cNvPr id="39" name="TextBox 38"/>
+          <p:cNvSpPr txBox="1"/>
+          <p:nvPr/>
+        </p:nvSpPr>
+        <p:spPr>
+          <a:xfrm>
+            <a:off x="8732520" y="2624328"/>
+            <a:ext cx="2743200" cy="274320"/>
           </a:xfrm>
           <a:prstGeom prst="rect">
             <a:avLst/>
@@ -9267,7 +9390,7 @@
           <a:lstStyle/>
           <a:p>
             <a:pPr algn="l">
-              <a:defRPr sz="1000" b="0">
+              <a:defRPr sz="1100" b="0">
                 <a:solidFill>
                   <a:srgbClr val="C4D4EE"/>
                 </a:solidFill>
@@ -9275,21 +9398,21 @@
               </a:defRPr>
             </a:pPr>
             <a:r>
-              <a:t>Incremental update from new sources</a:t>
-            </a:r>
-          </a:p>
-        </p:txBody>
-      </p:sp>
-      <p:sp>
-        <p:nvSpPr>
-          <p:cNvPr id="36" name="TextBox 35"/>
-          <p:cNvSpPr txBox="1"/>
-          <p:nvPr/>
-        </p:nvSpPr>
-        <p:spPr>
-          <a:xfrm>
-            <a:off x="6537960" y="2679192"/>
-            <a:ext cx="2103120" cy="310896"/>
+              <a:t>Incremental update from /raw</a:t>
+            </a:r>
+          </a:p>
+        </p:txBody>
+      </p:sp>
+      <p:sp>
+        <p:nvSpPr>
+          <p:cNvPr id="40" name="TextBox 39"/>
+          <p:cNvSpPr txBox="1"/>
+          <p:nvPr/>
+        </p:nvSpPr>
+        <p:spPr>
+          <a:xfrm>
+            <a:off x="6537960" y="2935224"/>
+            <a:ext cx="2103120" cy="274320"/>
           </a:xfrm>
           <a:prstGeom prst="rect">
             <a:avLst/>
@@ -9303,9 +9426,9 @@
           <a:lstStyle/>
           <a:p>
             <a:pPr algn="l">
-              <a:defRPr sz="1000" b="1">
-                <a:solidFill>
-                  <a:srgbClr val="3B82F6"/>
+              <a:defRPr sz="1100" b="1">
+                <a:solidFill>
+                  <a:srgbClr val="64A5FF"/>
                 </a:solidFill>
                 <a:latin typeface="Courier New"/>
               </a:defRPr>
@@ -9318,14 +9441,14 @@
       </p:sp>
       <p:sp>
         <p:nvSpPr>
-          <p:cNvPr id="37" name="TextBox 36"/>
-          <p:cNvSpPr txBox="1"/>
-          <p:nvPr/>
-        </p:nvSpPr>
-        <p:spPr>
-          <a:xfrm>
-            <a:off x="8759952" y="2679192"/>
-            <a:ext cx="2761488" cy="310896"/>
+          <p:cNvPr id="41" name="TextBox 40"/>
+          <p:cNvSpPr txBox="1"/>
+          <p:nvPr/>
+        </p:nvSpPr>
+        <p:spPr>
+          <a:xfrm>
+            <a:off x="8732520" y="2935224"/>
+            <a:ext cx="2743200" cy="274320"/>
           </a:xfrm>
           <a:prstGeom prst="rect">
             <a:avLst/>
@@ -9339,7 +9462,7 @@
           <a:lstStyle/>
           <a:p>
             <a:pPr algn="l">
-              <a:defRPr sz="1000" b="0">
+              <a:defRPr sz="1100" b="0">
                 <a:solidFill>
                   <a:srgbClr val="C4D4EE"/>
                 </a:solidFill>
@@ -9347,21 +9470,21 @@
               </a:defRPr>
             </a:pPr>
             <a:r>
-              <a:t>Quality check — orphans, contradictions</a:t>
-            </a:r>
-          </a:p>
-        </p:txBody>
-      </p:sp>
-      <p:sp>
-        <p:nvSpPr>
-          <p:cNvPr id="38" name="TextBox 37"/>
-          <p:cNvSpPr txBox="1"/>
-          <p:nvPr/>
-        </p:nvSpPr>
-        <p:spPr>
-          <a:xfrm>
-            <a:off x="6537960" y="3017520"/>
-            <a:ext cx="2103120" cy="310896"/>
+              <a:t>Quality check — parallel agents</a:t>
+            </a:r>
+          </a:p>
+        </p:txBody>
+      </p:sp>
+      <p:sp>
+        <p:nvSpPr>
+          <p:cNvPr id="42" name="TextBox 41"/>
+          <p:cNvSpPr txBox="1"/>
+          <p:nvPr/>
+        </p:nvSpPr>
+        <p:spPr>
+          <a:xfrm>
+            <a:off x="6537960" y="3246120"/>
+            <a:ext cx="2103120" cy="274320"/>
           </a:xfrm>
           <a:prstGeom prst="rect">
             <a:avLst/>
@@ -9375,9 +9498,9 @@
           <a:lstStyle/>
           <a:p>
             <a:pPr algn="l">
-              <a:defRPr sz="1000" b="1">
-                <a:solidFill>
-                  <a:srgbClr val="3B82F6"/>
+              <a:defRPr sz="1100" b="1">
+                <a:solidFill>
+                  <a:srgbClr val="64A5FF"/>
                 </a:solidFill>
                 <a:latin typeface="Courier New"/>
               </a:defRPr>
@@ -9390,14 +9513,14 @@
       </p:sp>
       <p:sp>
         <p:nvSpPr>
-          <p:cNvPr id="39" name="TextBox 38"/>
-          <p:cNvSpPr txBox="1"/>
-          <p:nvPr/>
-        </p:nvSpPr>
-        <p:spPr>
-          <a:xfrm>
-            <a:off x="8759952" y="3017520"/>
-            <a:ext cx="2761488" cy="310896"/>
+          <p:cNvPr id="43" name="TextBox 42"/>
+          <p:cNvSpPr txBox="1"/>
+          <p:nvPr/>
+        </p:nvSpPr>
+        <p:spPr>
+          <a:xfrm>
+            <a:off x="8732520" y="3246120"/>
+            <a:ext cx="2743200" cy="274320"/>
           </a:xfrm>
           <a:prstGeom prst="rect">
             <a:avLst/>
@@ -9411,7 +9534,7 @@
           <a:lstStyle/>
           <a:p>
             <a:pPr algn="l">
-              <a:defRPr sz="1000" b="0">
+              <a:defRPr sz="1100" b="0">
                 <a:solidFill>
                   <a:srgbClr val="C4D4EE"/>
                 </a:solidFill>
@@ -9426,14 +9549,14 @@
       </p:sp>
       <p:sp>
         <p:nvSpPr>
-          <p:cNvPr id="40" name="TextBox 39"/>
-          <p:cNvSpPr txBox="1"/>
-          <p:nvPr/>
-        </p:nvSpPr>
-        <p:spPr>
-          <a:xfrm>
-            <a:off x="6537960" y="3355848"/>
-            <a:ext cx="2103120" cy="310896"/>
+          <p:cNvPr id="44" name="TextBox 43"/>
+          <p:cNvSpPr txBox="1"/>
+          <p:nvPr/>
+        </p:nvSpPr>
+        <p:spPr>
+          <a:xfrm>
+            <a:off x="6537960" y="3557016"/>
+            <a:ext cx="2103120" cy="274320"/>
           </a:xfrm>
           <a:prstGeom prst="rect">
             <a:avLst/>
@@ -9447,9 +9570,9 @@
           <a:lstStyle/>
           <a:p>
             <a:pPr algn="l">
-              <a:defRPr sz="1000" b="1">
-                <a:solidFill>
-                  <a:srgbClr val="3B82F6"/>
+              <a:defRPr sz="1100" b="1">
+                <a:solidFill>
+                  <a:srgbClr val="64A5FF"/>
                 </a:solidFill>
                 <a:latin typeface="Courier New"/>
               </a:defRPr>
@@ -9462,14 +9585,14 @@
       </p:sp>
       <p:sp>
         <p:nvSpPr>
-          <p:cNvPr id="41" name="TextBox 40"/>
-          <p:cNvSpPr txBox="1"/>
-          <p:nvPr/>
-        </p:nvSpPr>
-        <p:spPr>
-          <a:xfrm>
-            <a:off x="8759952" y="3355848"/>
-            <a:ext cx="2761488" cy="310896"/>
+          <p:cNvPr id="45" name="TextBox 44"/>
+          <p:cNvSpPr txBox="1"/>
+          <p:nvPr/>
+        </p:nvSpPr>
+        <p:spPr>
+          <a:xfrm>
+            <a:off x="8732520" y="3557016"/>
+            <a:ext cx="2743200" cy="274320"/>
           </a:xfrm>
           <a:prstGeom prst="rect">
             <a:avLst/>
@@ -9483,7 +9606,7 @@
           <a:lstStyle/>
           <a:p>
             <a:pPr algn="l">
-              <a:defRPr sz="1000" b="0">
+              <a:defRPr sz="1100" b="0">
                 <a:solidFill>
                   <a:srgbClr val="C4D4EE"/>
                 </a:solidFill>
@@ -9498,14 +9621,14 @@
       </p:sp>
       <p:sp>
         <p:nvSpPr>
-          <p:cNvPr id="42" name="TextBox 41"/>
-          <p:cNvSpPr txBox="1"/>
-          <p:nvPr/>
-        </p:nvSpPr>
-        <p:spPr>
-          <a:xfrm>
-            <a:off x="6537960" y="3694176"/>
-            <a:ext cx="2103120" cy="310896"/>
+          <p:cNvPr id="46" name="TextBox 45"/>
+          <p:cNvSpPr txBox="1"/>
+          <p:nvPr/>
+        </p:nvSpPr>
+        <p:spPr>
+          <a:xfrm>
+            <a:off x="6537960" y="3867912"/>
+            <a:ext cx="2103120" cy="274320"/>
           </a:xfrm>
           <a:prstGeom prst="rect">
             <a:avLst/>
@@ -9519,9 +9642,9 @@
           <a:lstStyle/>
           <a:p>
             <a:pPr algn="l">
-              <a:defRPr sz="1000" b="1">
-                <a:solidFill>
-                  <a:srgbClr val="3B82F6"/>
+              <a:defRPr sz="1100" b="1">
+                <a:solidFill>
+                  <a:srgbClr val="64A5FF"/>
                 </a:solidFill>
                 <a:latin typeface="Courier New"/>
               </a:defRPr>
@@ -9534,14 +9657,14 @@
       </p:sp>
       <p:sp>
         <p:nvSpPr>
-          <p:cNvPr id="43" name="TextBox 42"/>
-          <p:cNvSpPr txBox="1"/>
-          <p:nvPr/>
-        </p:nvSpPr>
-        <p:spPr>
-          <a:xfrm>
-            <a:off x="8759952" y="3694176"/>
-            <a:ext cx="2761488" cy="310896"/>
+          <p:cNvPr id="47" name="TextBox 46"/>
+          <p:cNvSpPr txBox="1"/>
+          <p:nvPr/>
+        </p:nvSpPr>
+        <p:spPr>
+          <a:xfrm>
+            <a:off x="8732520" y="3867912"/>
+            <a:ext cx="2743200" cy="274320"/>
           </a:xfrm>
           <a:prstGeom prst="rect">
             <a:avLst/>
@@ -9555,7 +9678,7 @@
           <a:lstStyle/>
           <a:p>
             <a:pPr algn="l">
-              <a:defRPr sz="1000" b="0">
+              <a:defRPr sz="1100" b="0">
                 <a:solidFill>
                   <a:srgbClr val="C4D4EE"/>
                 </a:solidFill>
@@ -9570,13 +9693,13 @@
       </p:sp>
       <p:sp>
         <p:nvSpPr>
-          <p:cNvPr id="44" name="Rectangle 43"/>
+          <p:cNvPr id="48" name="Rectangle 47"/>
           <p:cNvSpPr/>
           <p:nvPr/>
         </p:nvSpPr>
         <p:spPr>
           <a:xfrm>
-            <a:off x="6537960" y="4069080"/>
+            <a:off x="6537960" y="4215384"/>
             <a:ext cx="4956048" cy="12700"/>
           </a:xfrm>
           <a:prstGeom prst="rect">
@@ -9613,14 +9736,14 @@
       </p:sp>
       <p:sp>
         <p:nvSpPr>
-          <p:cNvPr id="45" name="TextBox 44"/>
-          <p:cNvSpPr txBox="1"/>
-          <p:nvPr/>
-        </p:nvSpPr>
-        <p:spPr>
-          <a:xfrm>
-            <a:off x="6537960" y="4142232"/>
-            <a:ext cx="2011680" cy="182880"/>
+          <p:cNvPr id="49" name="TextBox 48"/>
+          <p:cNvSpPr txBox="1"/>
+          <p:nvPr/>
+        </p:nvSpPr>
+        <p:spPr>
+          <a:xfrm>
+            <a:off x="6537960" y="4288536"/>
+            <a:ext cx="2011680" cy="201168"/>
           </a:xfrm>
           <a:prstGeom prst="rect">
             <a:avLst/>
@@ -9634,9 +9757,9 @@
           <a:lstStyle/>
           <a:p>
             <a:pPr algn="l">
-              <a:defRPr sz="900" b="1">
-                <a:solidFill>
-                  <a:srgbClr val="8B5CF6"/>
+              <a:defRPr sz="1100" b="1">
+                <a:solidFill>
+                  <a:srgbClr val="AA82FF"/>
                 </a:solidFill>
                 <a:latin typeface="Calibri"/>
               </a:defRPr>
@@ -9649,14 +9772,14 @@
       </p:sp>
       <p:sp>
         <p:nvSpPr>
-          <p:cNvPr id="46" name="TextBox 45"/>
-          <p:cNvSpPr txBox="1"/>
-          <p:nvPr/>
-        </p:nvSpPr>
-        <p:spPr>
-          <a:xfrm>
-            <a:off x="6537960" y="4343400"/>
-            <a:ext cx="2103120" cy="310896"/>
+          <p:cNvPr id="50" name="TextBox 49"/>
+          <p:cNvSpPr txBox="1"/>
+          <p:nvPr/>
+        </p:nvSpPr>
+        <p:spPr>
+          <a:xfrm>
+            <a:off x="6537960" y="4489704"/>
+            <a:ext cx="2103120" cy="274320"/>
           </a:xfrm>
           <a:prstGeom prst="rect">
             <a:avLst/>
@@ -9670,9 +9793,9 @@
           <a:lstStyle/>
           <a:p>
             <a:pPr algn="l">
-              <a:defRPr sz="1000" b="1">
-                <a:solidFill>
-                  <a:srgbClr val="8B5CF6"/>
+              <a:defRPr sz="1100" b="1">
+                <a:solidFill>
+                  <a:srgbClr val="AA82FF"/>
                 </a:solidFill>
                 <a:latin typeface="Courier New"/>
               </a:defRPr>
@@ -9685,14 +9808,14 @@
       </p:sp>
       <p:sp>
         <p:nvSpPr>
-          <p:cNvPr id="47" name="TextBox 46"/>
-          <p:cNvSpPr txBox="1"/>
-          <p:nvPr/>
-        </p:nvSpPr>
-        <p:spPr>
-          <a:xfrm>
-            <a:off x="8759952" y="4343400"/>
-            <a:ext cx="2761488" cy="310896"/>
+          <p:cNvPr id="51" name="TextBox 50"/>
+          <p:cNvSpPr txBox="1"/>
+          <p:nvPr/>
+        </p:nvSpPr>
+        <p:spPr>
+          <a:xfrm>
+            <a:off x="8732520" y="4489704"/>
+            <a:ext cx="2743200" cy="274320"/>
           </a:xfrm>
           <a:prstGeom prst="rect">
             <a:avLst/>
@@ -9706,7 +9829,7 @@
           <a:lstStyle/>
           <a:p>
             <a:pPr algn="l">
-              <a:defRPr sz="1000" b="0">
+              <a:defRPr sz="1100" b="0">
                 <a:solidFill>
                   <a:srgbClr val="C4D4EE"/>
                 </a:solidFill>
@@ -9721,14 +9844,14 @@
       </p:sp>
       <p:sp>
         <p:nvSpPr>
-          <p:cNvPr id="48" name="TextBox 47"/>
-          <p:cNvSpPr txBox="1"/>
-          <p:nvPr/>
-        </p:nvSpPr>
-        <p:spPr>
-          <a:xfrm>
-            <a:off x="6537960" y="4681728"/>
-            <a:ext cx="2103120" cy="310896"/>
+          <p:cNvPr id="52" name="TextBox 51"/>
+          <p:cNvSpPr txBox="1"/>
+          <p:nvPr/>
+        </p:nvSpPr>
+        <p:spPr>
+          <a:xfrm>
+            <a:off x="6537960" y="4800600"/>
+            <a:ext cx="2103120" cy="274320"/>
           </a:xfrm>
           <a:prstGeom prst="rect">
             <a:avLst/>
@@ -9742,9 +9865,9 @@
           <a:lstStyle/>
           <a:p>
             <a:pPr algn="l">
-              <a:defRPr sz="1000" b="1">
-                <a:solidFill>
-                  <a:srgbClr val="8B5CF6"/>
+              <a:defRPr sz="1100" b="1">
+                <a:solidFill>
+                  <a:srgbClr val="AA82FF"/>
                 </a:solidFill>
                 <a:latin typeface="Courier New"/>
               </a:defRPr>
@@ -9757,14 +9880,14 @@
       </p:sp>
       <p:sp>
         <p:nvSpPr>
-          <p:cNvPr id="49" name="TextBox 48"/>
-          <p:cNvSpPr txBox="1"/>
-          <p:nvPr/>
-        </p:nvSpPr>
-        <p:spPr>
-          <a:xfrm>
-            <a:off x="8759952" y="4681728"/>
-            <a:ext cx="2761488" cy="310896"/>
+          <p:cNvPr id="53" name="TextBox 52"/>
+          <p:cNvSpPr txBox="1"/>
+          <p:nvPr/>
+        </p:nvSpPr>
+        <p:spPr>
+          <a:xfrm>
+            <a:off x="8732520" y="4800600"/>
+            <a:ext cx="2743200" cy="274320"/>
           </a:xfrm>
           <a:prstGeom prst="rect">
             <a:avLst/>
@@ -9778,7 +9901,7 @@
           <a:lstStyle/>
           <a:p>
             <a:pPr algn="l">
-              <a:defRPr sz="1000" b="0">
+              <a:defRPr sz="1100" b="0">
                 <a:solidFill>
                   <a:srgbClr val="C4D4EE"/>
                 </a:solidFill>
@@ -9786,21 +9909,21 @@
               </a:defRPr>
             </a:pPr>
             <a:r>
-              <a:t>Run tests, verify skills, git health</a:t>
-            </a:r>
-          </a:p>
-        </p:txBody>
-      </p:sp>
-      <p:sp>
-        <p:nvSpPr>
-          <p:cNvPr id="50" name="TextBox 49"/>
-          <p:cNvSpPr txBox="1"/>
-          <p:nvPr/>
-        </p:nvSpPr>
-        <p:spPr>
-          <a:xfrm>
-            <a:off x="6537960" y="5020056"/>
-            <a:ext cx="2103120" cy="310896"/>
+              <a:t>Tests, skill check, git health</a:t>
+            </a:r>
+          </a:p>
+        </p:txBody>
+      </p:sp>
+      <p:sp>
+        <p:nvSpPr>
+          <p:cNvPr id="54" name="TextBox 53"/>
+          <p:cNvSpPr txBox="1"/>
+          <p:nvPr/>
+        </p:nvSpPr>
+        <p:spPr>
+          <a:xfrm>
+            <a:off x="6537960" y="5111496"/>
+            <a:ext cx="2103120" cy="274320"/>
           </a:xfrm>
           <a:prstGeom prst="rect">
             <a:avLst/>
@@ -9814,9 +9937,9 @@
           <a:lstStyle/>
           <a:p>
             <a:pPr algn="l">
-              <a:defRPr sz="1000" b="1">
-                <a:solidFill>
-                  <a:srgbClr val="8B5CF6"/>
+              <a:defRPr sz="1100" b="1">
+                <a:solidFill>
+                  <a:srgbClr val="AA82FF"/>
                 </a:solidFill>
                 <a:latin typeface="Courier New"/>
               </a:defRPr>
@@ -9829,14 +9952,14 @@
       </p:sp>
       <p:sp>
         <p:nvSpPr>
-          <p:cNvPr id="51" name="TextBox 50"/>
-          <p:cNvSpPr txBox="1"/>
-          <p:nvPr/>
-        </p:nvSpPr>
-        <p:spPr>
-          <a:xfrm>
-            <a:off x="8759952" y="5020056"/>
-            <a:ext cx="2761488" cy="310896"/>
+          <p:cNvPr id="55" name="TextBox 54"/>
+          <p:cNvSpPr txBox="1"/>
+          <p:nvPr/>
+        </p:nvSpPr>
+        <p:spPr>
+          <a:xfrm>
+            <a:off x="8732520" y="5111496"/>
+            <a:ext cx="2743200" cy="274320"/>
           </a:xfrm>
           <a:prstGeom prst="rect">
             <a:avLst/>
@@ -9850,7 +9973,7 @@
           <a:lstStyle/>
           <a:p>
             <a:pPr algn="l">
-              <a:defRPr sz="1000" b="0">
+              <a:defRPr sz="1100" b="0">
                 <a:solidFill>
                   <a:srgbClr val="C4D4EE"/>
                 </a:solidFill>
@@ -9865,7 +9988,7 @@
       </p:sp>
       <p:sp>
         <p:nvSpPr>
-          <p:cNvPr id="52" name="Rounded Rectangle 51"/>
+          <p:cNvPr id="56" name="Rounded Rectangle 55"/>
           <p:cNvSpPr/>
           <p:nvPr/>
         </p:nvSpPr>
@@ -9910,7 +10033,7 @@
       </p:sp>
       <p:sp>
         <p:nvSpPr>
-          <p:cNvPr id="53" name="Rectangle 52"/>
+          <p:cNvPr id="57" name="Rectangle 56"/>
           <p:cNvSpPr/>
           <p:nvPr/>
         </p:nvSpPr>
@@ -9953,7 +10076,7 @@
       </p:sp>
       <p:sp>
         <p:nvSpPr>
-          <p:cNvPr id="54" name="TextBox 53"/>
+          <p:cNvPr id="58" name="TextBox 57"/>
           <p:cNvSpPr txBox="1"/>
           <p:nvPr/>
         </p:nvSpPr>
@@ -9974,7 +10097,7 @@
           <a:lstStyle/>
           <a:p>
             <a:pPr algn="l">
-              <a:defRPr sz="1200" b="1">
+              <a:defRPr sz="1300" b="1">
                 <a:solidFill>
                   <a:srgbClr val="06B6D4"/>
                 </a:solidFill>
@@ -9989,13 +10112,13 @@
       </p:sp>
       <p:sp>
         <p:nvSpPr>
-          <p:cNvPr id="55" name="TextBox 54"/>
-          <p:cNvSpPr txBox="1"/>
-          <p:nvPr/>
-        </p:nvSpPr>
-        <p:spPr>
-          <a:xfrm>
-            <a:off x="685800" y="6035040"/>
+          <p:cNvPr id="59" name="TextBox 58"/>
+          <p:cNvSpPr txBox="1"/>
+          <p:nvPr/>
+        </p:nvSpPr>
+        <p:spPr>
+          <a:xfrm>
+            <a:off x="685800" y="6044184"/>
             <a:ext cx="2377440" cy="256032"/>
           </a:xfrm>
           <a:prstGeom prst="rect">
@@ -10010,9 +10133,9 @@
           <a:lstStyle/>
           <a:p>
             <a:pPr algn="l">
-              <a:defRPr sz="900" b="0">
-                <a:solidFill>
-                  <a:srgbClr val="6982AC"/>
+              <a:defRPr sz="1000" b="0">
+                <a:solidFill>
+                  <a:srgbClr val="C4D4EE"/>
                 </a:solidFill>
                 <a:latin typeface="Calibri"/>
               </a:defRPr>
@@ -10025,7 +10148,7 @@
       </p:sp>
       <p:sp>
         <p:nvSpPr>
-          <p:cNvPr id="56" name="TextBox 55"/>
+          <p:cNvPr id="60" name="TextBox 59"/>
           <p:cNvSpPr txBox="1"/>
           <p:nvPr/>
         </p:nvSpPr>
@@ -10046,7 +10169,7 @@
           <a:lstStyle/>
           <a:p>
             <a:pPr algn="l">
-              <a:defRPr sz="1100" b="1">
+              <a:defRPr sz="1200" b="1">
                 <a:solidFill>
                   <a:srgbClr val="C4D4EE"/>
                 </a:solidFill>
@@ -10061,13 +10184,13 @@
       </p:sp>
       <p:sp>
         <p:nvSpPr>
-          <p:cNvPr id="57" name="TextBox 56"/>
-          <p:cNvSpPr txBox="1"/>
-          <p:nvPr/>
-        </p:nvSpPr>
-        <p:spPr>
-          <a:xfrm>
-            <a:off x="3108960" y="6035040"/>
+          <p:cNvPr id="61" name="TextBox 60"/>
+          <p:cNvSpPr txBox="1"/>
+          <p:nvPr/>
+        </p:nvSpPr>
+        <p:spPr>
+          <a:xfrm>
+            <a:off x="3108960" y="6044184"/>
             <a:ext cx="2103120" cy="256032"/>
           </a:xfrm>
           <a:prstGeom prst="rect">
@@ -10082,9 +10205,9 @@
           <a:lstStyle/>
           <a:p>
             <a:pPr algn="l">
-              <a:defRPr sz="900" b="0">
-                <a:solidFill>
-                  <a:srgbClr val="6982AC"/>
+              <a:defRPr sz="1100" b="0">
+                <a:solidFill>
+                  <a:srgbClr val="C4D4EE"/>
                 </a:solidFill>
                 <a:latin typeface="Calibri"/>
               </a:defRPr>
@@ -10097,7 +10220,7 @@
       </p:sp>
       <p:sp>
         <p:nvSpPr>
-          <p:cNvPr id="58" name="TextBox 57"/>
+          <p:cNvPr id="62" name="TextBox 61"/>
           <p:cNvSpPr txBox="1"/>
           <p:nvPr/>
         </p:nvSpPr>
@@ -10118,7 +10241,7 @@
           <a:lstStyle/>
           <a:p>
             <a:pPr algn="l">
-              <a:defRPr sz="1100" b="1">
+              <a:defRPr sz="1200" b="1">
                 <a:solidFill>
                   <a:srgbClr val="C4D4EE"/>
                 </a:solidFill>
@@ -10133,13 +10256,13 @@
       </p:sp>
       <p:sp>
         <p:nvSpPr>
-          <p:cNvPr id="59" name="TextBox 58"/>
-          <p:cNvSpPr txBox="1"/>
-          <p:nvPr/>
-        </p:nvSpPr>
-        <p:spPr>
-          <a:xfrm>
-            <a:off x="5257800" y="6035040"/>
+          <p:cNvPr id="63" name="TextBox 62"/>
+          <p:cNvSpPr txBox="1"/>
+          <p:nvPr/>
+        </p:nvSpPr>
+        <p:spPr>
+          <a:xfrm>
+            <a:off x="5257800" y="6044184"/>
             <a:ext cx="2103120" cy="256032"/>
           </a:xfrm>
           <a:prstGeom prst="rect">
@@ -10154,9 +10277,9 @@
           <a:lstStyle/>
           <a:p>
             <a:pPr algn="l">
-              <a:defRPr sz="900" b="0">
-                <a:solidFill>
-                  <a:srgbClr val="6982AC"/>
+              <a:defRPr sz="1100" b="0">
+                <a:solidFill>
+                  <a:srgbClr val="C4D4EE"/>
                 </a:solidFill>
                 <a:latin typeface="Calibri"/>
               </a:defRPr>
@@ -10169,7 +10292,7 @@
       </p:sp>
       <p:sp>
         <p:nvSpPr>
-          <p:cNvPr id="60" name="TextBox 59"/>
+          <p:cNvPr id="64" name="TextBox 63"/>
           <p:cNvSpPr txBox="1"/>
           <p:nvPr/>
         </p:nvSpPr>
@@ -10190,7 +10313,7 @@
           <a:lstStyle/>
           <a:p>
             <a:pPr algn="l">
-              <a:defRPr sz="1100" b="1">
+              <a:defRPr sz="1200" b="1">
                 <a:solidFill>
                   <a:srgbClr val="C4D4EE"/>
                 </a:solidFill>
@@ -10205,13 +10328,13 @@
       </p:sp>
       <p:sp>
         <p:nvSpPr>
-          <p:cNvPr id="61" name="TextBox 60"/>
-          <p:cNvSpPr txBox="1"/>
-          <p:nvPr/>
-        </p:nvSpPr>
-        <p:spPr>
-          <a:xfrm>
-            <a:off x="7406640" y="6035040"/>
+          <p:cNvPr id="65" name="TextBox 64"/>
+          <p:cNvSpPr txBox="1"/>
+          <p:nvPr/>
+        </p:nvSpPr>
+        <p:spPr>
+          <a:xfrm>
+            <a:off x="7406640" y="6044184"/>
             <a:ext cx="2103120" cy="256032"/>
           </a:xfrm>
           <a:prstGeom prst="rect">
@@ -10226,9 +10349,9 @@
           <a:lstStyle/>
           <a:p>
             <a:pPr algn="l">
-              <a:defRPr sz="900" b="0">
-                <a:solidFill>
-                  <a:srgbClr val="6982AC"/>
+              <a:defRPr sz="1100" b="0">
+                <a:solidFill>
+                  <a:srgbClr val="C4D4EE"/>
                 </a:solidFill>
                 <a:latin typeface="Calibri"/>
               </a:defRPr>
@@ -10241,7 +10364,7 @@
       </p:sp>
       <p:sp>
         <p:nvSpPr>
-          <p:cNvPr id="62" name="TextBox 61"/>
+          <p:cNvPr id="66" name="TextBox 65"/>
           <p:cNvSpPr txBox="1"/>
           <p:nvPr/>
         </p:nvSpPr>
@@ -10262,7 +10385,7 @@
           <a:lstStyle/>
           <a:p>
             <a:pPr algn="l">
-              <a:defRPr sz="1100" b="1">
+              <a:defRPr sz="1200" b="1">
                 <a:solidFill>
                   <a:srgbClr val="C4D4EE"/>
                 </a:solidFill>
@@ -10277,13 +10400,13 @@
       </p:sp>
       <p:sp>
         <p:nvSpPr>
-          <p:cNvPr id="63" name="TextBox 62"/>
-          <p:cNvSpPr txBox="1"/>
-          <p:nvPr/>
-        </p:nvSpPr>
-        <p:spPr>
-          <a:xfrm>
-            <a:off x="9555480" y="6035040"/>
+          <p:cNvPr id="67" name="TextBox 66"/>
+          <p:cNvSpPr txBox="1"/>
+          <p:nvPr/>
+        </p:nvSpPr>
+        <p:spPr>
+          <a:xfrm>
+            <a:off x="9555480" y="6044184"/>
             <a:ext cx="2103120" cy="256032"/>
           </a:xfrm>
           <a:prstGeom prst="rect">
@@ -10298,9 +10421,9 @@
           <a:lstStyle/>
           <a:p>
             <a:pPr algn="l">
-              <a:defRPr sz="900" b="0">
-                <a:solidFill>
-                  <a:srgbClr val="6982AC"/>
+              <a:defRPr sz="1100" b="0">
+                <a:solidFill>
+                  <a:srgbClr val="C4D4EE"/>
                 </a:solidFill>
                 <a:latin typeface="Calibri"/>
               </a:defRPr>
@@ -10524,7 +10647,7 @@
               </a:defRPr>
             </a:pPr>
             <a:r>
-              <a:t>compile-papers  ·  sync-wiki  ·  audit-wiki  ·  Copilot (compile + launch-ui)</a:t>
+              <a:t>orchestrate-wiki (parallel agents)  ·  compile  ·  sync  ·  audit  ·  Copilot</a:t>
             </a:r>
           </a:p>
         </p:txBody>
@@ -10636,36 +10759,324 @@
       </p:sp>
       <p:sp>
         <p:nvSpPr>
-          <p:cNvPr id="10" name="TextBox 9"/>
-          <p:cNvSpPr txBox="1"/>
-          <p:nvPr/>
-        </p:nvSpPr>
-        <p:spPr>
-          <a:xfrm>
-            <a:off x="502920" y="6016752"/>
-            <a:ext cx="11201400" cy="292608"/>
-          </a:xfrm>
-          <a:prstGeom prst="rect">
-            <a:avLst/>
-          </a:prstGeom>
-          <a:noFill/>
-        </p:spPr>
-        <p:txBody>
-          <a:bodyPr wrap="square">
-            <a:spAutoFit/>
-          </a:bodyPr>
-          <a:lstStyle/>
-          <a:p>
-            <a:pPr algn="ctr">
-              <a:defRPr sz="1100" b="0">
+          <p:cNvPr id="10" name="Rounded Rectangle 9"/>
+          <p:cNvSpPr/>
+          <p:nvPr/>
+        </p:nvSpPr>
+        <p:spPr>
+          <a:xfrm>
+            <a:off x="2487168" y="5989320"/>
+            <a:ext cx="1993392" cy="420624"/>
+          </a:xfrm>
+          <a:prstGeom prst="roundRect">
+            <a:avLst/>
+          </a:prstGeom>
+          <a:solidFill>
+            <a:srgbClr val="1B1231"/>
+          </a:solidFill>
+          <a:ln w="19050">
+            <a:solidFill>
+              <a:srgbClr val="8B5CF6"/>
+            </a:solidFill>
+          </a:ln>
+        </p:spPr>
+        <p:style>
+          <a:lnRef idx="1">
+            <a:schemeClr val="accent1"/>
+          </a:lnRef>
+          <a:fillRef idx="3">
+            <a:schemeClr val="accent1"/>
+          </a:fillRef>
+          <a:effectRef idx="2">
+            <a:schemeClr val="accent1"/>
+          </a:effectRef>
+          <a:fontRef idx="minor">
+            <a:schemeClr val="lt1"/>
+          </a:fontRef>
+        </p:style>
+        <p:txBody>
+          <a:bodyPr rtlCol="0" anchor="ctr"/>
+          <a:lstStyle/>
+          <a:p>
+            <a:pPr algn="ctr"/>
+          </a:p>
+        </p:txBody>
+      </p:sp>
+      <p:sp>
+        <p:nvSpPr>
+          <p:cNvPr id="11" name="TextBox 10"/>
+          <p:cNvSpPr txBox="1"/>
+          <p:nvPr/>
+        </p:nvSpPr>
+        <p:spPr>
+          <a:xfrm>
+            <a:off x="2487168" y="6062472"/>
+            <a:ext cx="1993392" cy="274320"/>
+          </a:xfrm>
+          <a:prstGeom prst="rect">
+            <a:avLst/>
+          </a:prstGeom>
+          <a:noFill/>
+        </p:spPr>
+        <p:txBody>
+          <a:bodyPr wrap="none">
+            <a:spAutoFit/>
+          </a:bodyPr>
+          <a:lstStyle/>
+          <a:p>
+            <a:pPr algn="ctr"/>
+            <a:r>
+              <a:rPr sz="1400" b="1" u="sng">
+                <a:solidFill>
+                  <a:srgbClr val="8B5CF6"/>
+                </a:solidFill>
+                <a:latin typeface="Calibri"/>
+                <a:hlinkClick r:id="rId7"/>
+              </a:rPr>
+              <a:t>↗  Karpathy's Gist</a:t>
+            </a:r>
+          </a:p>
+        </p:txBody>
+      </p:sp>
+      <p:sp>
+        <p:nvSpPr>
+          <p:cNvPr id="12" name="Rounded Rectangle 11"/>
+          <p:cNvSpPr/>
+          <p:nvPr/>
+        </p:nvSpPr>
+        <p:spPr>
+          <a:xfrm>
+            <a:off x="4681728" y="5989320"/>
+            <a:ext cx="1444752" cy="420624"/>
+          </a:xfrm>
+          <a:prstGeom prst="roundRect">
+            <a:avLst/>
+          </a:prstGeom>
+          <a:solidFill>
+            <a:srgbClr val="01242A"/>
+          </a:solidFill>
+          <a:ln w="19050">
+            <a:solidFill>
+              <a:srgbClr val="06B6D4"/>
+            </a:solidFill>
+          </a:ln>
+        </p:spPr>
+        <p:style>
+          <a:lnRef idx="1">
+            <a:schemeClr val="accent1"/>
+          </a:lnRef>
+          <a:fillRef idx="3">
+            <a:schemeClr val="accent1"/>
+          </a:fillRef>
+          <a:effectRef idx="2">
+            <a:schemeClr val="accent1"/>
+          </a:effectRef>
+          <a:fontRef idx="minor">
+            <a:schemeClr val="lt1"/>
+          </a:fontRef>
+        </p:style>
+        <p:txBody>
+          <a:bodyPr rtlCol="0" anchor="ctr"/>
+          <a:lstStyle/>
+          <a:p>
+            <a:pPr algn="ctr"/>
+          </a:p>
+        </p:txBody>
+      </p:sp>
+      <p:sp>
+        <p:nvSpPr>
+          <p:cNvPr id="13" name="TextBox 12"/>
+          <p:cNvSpPr txBox="1"/>
+          <p:nvPr/>
+        </p:nvSpPr>
+        <p:spPr>
+          <a:xfrm>
+            <a:off x="4681728" y="6062472"/>
+            <a:ext cx="1444752" cy="274320"/>
+          </a:xfrm>
+          <a:prstGeom prst="rect">
+            <a:avLst/>
+          </a:prstGeom>
+          <a:noFill/>
+        </p:spPr>
+        <p:txBody>
+          <a:bodyPr wrap="none">
+            <a:spAutoFit/>
+          </a:bodyPr>
+          <a:lstStyle/>
+          <a:p>
+            <a:pPr algn="ctr"/>
+            <a:r>
+              <a:rPr sz="1400" b="1" u="sng">
                 <a:solidFill>
                   <a:srgbClr val="06B6D4"/>
                 </a:solidFill>
                 <a:latin typeface="Calibri"/>
-              </a:defRPr>
-            </a:pPr>
-            <a:r>
-              <a:t>github.com/dev-enthusiast-84/llm-wiki</a:t>
+                <a:hlinkClick r:id="rId8"/>
+              </a:rPr>
+              <a:t>↗  Git Repo</a:t>
+            </a:r>
+          </a:p>
+        </p:txBody>
+      </p:sp>
+      <p:sp>
+        <p:nvSpPr>
+          <p:cNvPr id="14" name="Rounded Rectangle 13"/>
+          <p:cNvSpPr/>
+          <p:nvPr/>
+        </p:nvSpPr>
+        <p:spPr>
+          <a:xfrm>
+            <a:off x="6327648" y="5989320"/>
+            <a:ext cx="1444752" cy="420624"/>
+          </a:xfrm>
+          <a:prstGeom prst="roundRect">
+            <a:avLst/>
+          </a:prstGeom>
+          <a:solidFill>
+            <a:srgbClr val="032519"/>
+          </a:solidFill>
+          <a:ln w="19050">
+            <a:solidFill>
+              <a:srgbClr val="10B981"/>
+            </a:solidFill>
+          </a:ln>
+        </p:spPr>
+        <p:style>
+          <a:lnRef idx="1">
+            <a:schemeClr val="accent1"/>
+          </a:lnRef>
+          <a:fillRef idx="3">
+            <a:schemeClr val="accent1"/>
+          </a:fillRef>
+          <a:effectRef idx="2">
+            <a:schemeClr val="accent1"/>
+          </a:effectRef>
+          <a:fontRef idx="minor">
+            <a:schemeClr val="lt1"/>
+          </a:fontRef>
+        </p:style>
+        <p:txBody>
+          <a:bodyPr rtlCol="0" anchor="ctr"/>
+          <a:lstStyle/>
+          <a:p>
+            <a:pPr algn="ctr"/>
+          </a:p>
+        </p:txBody>
+      </p:sp>
+      <p:sp>
+        <p:nvSpPr>
+          <p:cNvPr id="15" name="TextBox 14"/>
+          <p:cNvSpPr txBox="1"/>
+          <p:nvPr/>
+        </p:nvSpPr>
+        <p:spPr>
+          <a:xfrm>
+            <a:off x="6327648" y="6062472"/>
+            <a:ext cx="1444752" cy="274320"/>
+          </a:xfrm>
+          <a:prstGeom prst="rect">
+            <a:avLst/>
+          </a:prstGeom>
+          <a:noFill/>
+        </p:spPr>
+        <p:txBody>
+          <a:bodyPr wrap="none">
+            <a:spAutoFit/>
+          </a:bodyPr>
+          <a:lstStyle/>
+          <a:p>
+            <a:pPr algn="ctr"/>
+            <a:r>
+              <a:rPr sz="1400" b="1" u="sng">
+                <a:solidFill>
+                  <a:srgbClr val="10B981"/>
+                </a:solidFill>
+                <a:latin typeface="Calibri"/>
+                <a:hlinkClick r:id="rId9"/>
+              </a:rPr>
+              <a:t>↗  Live Page</a:t>
+            </a:r>
+          </a:p>
+        </p:txBody>
+      </p:sp>
+      <p:sp>
+        <p:nvSpPr>
+          <p:cNvPr id="16" name="Rounded Rectangle 15"/>
+          <p:cNvSpPr/>
+          <p:nvPr/>
+        </p:nvSpPr>
+        <p:spPr>
+          <a:xfrm>
+            <a:off x="7973568" y="5989320"/>
+            <a:ext cx="1737360" cy="420624"/>
+          </a:xfrm>
+          <a:prstGeom prst="roundRect">
+            <a:avLst/>
+          </a:prstGeom>
+          <a:solidFill>
+            <a:srgbClr val="142133"/>
+          </a:solidFill>
+          <a:ln w="19050">
+            <a:solidFill>
+              <a:srgbClr val="64A5FF"/>
+            </a:solidFill>
+          </a:ln>
+        </p:spPr>
+        <p:style>
+          <a:lnRef idx="1">
+            <a:schemeClr val="accent1"/>
+          </a:lnRef>
+          <a:fillRef idx="3">
+            <a:schemeClr val="accent1"/>
+          </a:fillRef>
+          <a:effectRef idx="2">
+            <a:schemeClr val="accent1"/>
+          </a:effectRef>
+          <a:fontRef idx="minor">
+            <a:schemeClr val="lt1"/>
+          </a:fontRef>
+        </p:style>
+        <p:txBody>
+          <a:bodyPr rtlCol="0" anchor="ctr"/>
+          <a:lstStyle/>
+          <a:p>
+            <a:pPr algn="ctr"/>
+          </a:p>
+        </p:txBody>
+      </p:sp>
+      <p:sp>
+        <p:nvSpPr>
+          <p:cNvPr id="17" name="TextBox 16"/>
+          <p:cNvSpPr txBox="1"/>
+          <p:nvPr/>
+        </p:nvSpPr>
+        <p:spPr>
+          <a:xfrm>
+            <a:off x="7973568" y="6062472"/>
+            <a:ext cx="1737360" cy="274320"/>
+          </a:xfrm>
+          <a:prstGeom prst="rect">
+            <a:avLst/>
+          </a:prstGeom>
+          <a:noFill/>
+        </p:spPr>
+        <p:txBody>
+          <a:bodyPr wrap="none">
+            <a:spAutoFit/>
+          </a:bodyPr>
+          <a:lstStyle/>
+          <a:p>
+            <a:pPr algn="ctr"/>
+            <a:r>
+              <a:rPr sz="1400" b="1" u="sng">
+                <a:solidFill>
+                  <a:srgbClr val="64A5FF"/>
+                </a:solidFill>
+                <a:latin typeface="Calibri"/>
+                <a:hlinkClick r:id="rId10"/>
+              </a:rPr>
+              <a:t>↗  LinkedIn Post</a:t>
             </a:r>
           </a:p>
         </p:txBody>

--- a/presentation/llm-wiki-deck.pptx
+++ b/presentation/llm-wiki-deck.pptx
@@ -4243,7 +4243,7 @@
           <a:noFill/>
         </p:spPr>
         <p:txBody>
-          <a:bodyPr wrap="square">
+          <a:bodyPr wrap="none">
             <a:spAutoFit/>
           </a:bodyPr>
           <a:lstStyle/>
@@ -4251,7 +4251,7 @@
             <a:pPr algn="l">
               <a:defRPr sz="7600" b="1">
                 <a:solidFill>
-                  <a:srgbClr val="FFFFFF"/>
+                  <a:srgbClr val="F0E1C3"/>
                 </a:solidFill>
                 <a:latin typeface="Calibri"/>
               </a:defRPr>
@@ -4279,7 +4279,7 @@
           <a:noFill/>
         </p:spPr>
         <p:txBody>
-          <a:bodyPr wrap="square">
+          <a:bodyPr wrap="none">
             <a:spAutoFit/>
           </a:bodyPr>
           <a:lstStyle/>
@@ -4360,7 +4360,7 @@
           <a:noFill/>
         </p:spPr>
         <p:txBody>
-          <a:bodyPr wrap="square">
+          <a:bodyPr wrap="none">
             <a:spAutoFit/>
           </a:bodyPr>
           <a:lstStyle/>
@@ -4441,7 +4441,7 @@
           <a:noFill/>
         </p:spPr>
         <p:txBody>
-          <a:bodyPr wrap="square">
+          <a:bodyPr wrap="none">
             <a:spAutoFit/>
           </a:bodyPr>
           <a:lstStyle/>
@@ -4522,7 +4522,7 @@
           <a:noFill/>
         </p:spPr>
         <p:txBody>
-          <a:bodyPr wrap="square">
+          <a:bodyPr wrap="none">
             <a:spAutoFit/>
           </a:bodyPr>
           <a:lstStyle/>
@@ -4558,7 +4558,7 @@
           <a:noFill/>
         </p:spPr>
         <p:txBody>
-          <a:bodyPr wrap="square">
+          <a:bodyPr wrap="none">
             <a:spAutoFit/>
           </a:bodyPr>
           <a:lstStyle/>
@@ -4637,7 +4637,7 @@
           <a:noFill/>
         </p:spPr>
         <p:txBody>
-          <a:bodyPr wrap="square">
+          <a:bodyPr wrap="none">
             <a:spAutoFit/>
           </a:bodyPr>
           <a:lstStyle/>
@@ -4761,7 +4761,7 @@
           <a:noFill/>
         </p:spPr>
         <p:txBody>
-          <a:bodyPr wrap="square">
+          <a:bodyPr wrap="none">
             <a:spAutoFit/>
           </a:bodyPr>
           <a:lstStyle/>
@@ -4797,7 +4797,7 @@
           <a:noFill/>
         </p:spPr>
         <p:txBody>
-          <a:bodyPr wrap="square">
+          <a:bodyPr wrap="none">
             <a:spAutoFit/>
           </a:bodyPr>
           <a:lstStyle/>
@@ -4833,7 +4833,7 @@
           <a:noFill/>
         </p:spPr>
         <p:txBody>
-          <a:bodyPr wrap="square">
+          <a:bodyPr wrap="none">
             <a:spAutoFit/>
           </a:bodyPr>
           <a:lstStyle/>
@@ -4957,7 +4957,7 @@
           <a:noFill/>
         </p:spPr>
         <p:txBody>
-          <a:bodyPr wrap="square">
+          <a:bodyPr wrap="none">
             <a:spAutoFit/>
           </a:bodyPr>
           <a:lstStyle/>
@@ -4993,7 +4993,7 @@
           <a:noFill/>
         </p:spPr>
         <p:txBody>
-          <a:bodyPr wrap="square">
+          <a:bodyPr wrap="none">
             <a:spAutoFit/>
           </a:bodyPr>
           <a:lstStyle/>
@@ -5029,7 +5029,7 @@
           <a:noFill/>
         </p:spPr>
         <p:txBody>
-          <a:bodyPr wrap="square">
+          <a:bodyPr wrap="none">
             <a:spAutoFit/>
           </a:bodyPr>
           <a:lstStyle/>
@@ -5153,7 +5153,7 @@
           <a:noFill/>
         </p:spPr>
         <p:txBody>
-          <a:bodyPr wrap="square">
+          <a:bodyPr wrap="none">
             <a:spAutoFit/>
           </a:bodyPr>
           <a:lstStyle/>
@@ -5189,7 +5189,7 @@
           <a:noFill/>
         </p:spPr>
         <p:txBody>
-          <a:bodyPr wrap="square">
+          <a:bodyPr wrap="none">
             <a:spAutoFit/>
           </a:bodyPr>
           <a:lstStyle/>
@@ -5251,7 +5251,7 @@
           <a:noFill/>
         </p:spPr>
         <p:txBody>
-          <a:bodyPr wrap="square">
+          <a:bodyPr wrap="none">
             <a:spAutoFit/>
           </a:bodyPr>
           <a:lstStyle/>
@@ -5259,7 +5259,7 @@
             <a:pPr algn="l">
               <a:defRPr sz="3400" b="1">
                 <a:solidFill>
-                  <a:srgbClr val="FFFFFF"/>
+                  <a:srgbClr val="F0E1C3"/>
                 </a:solidFill>
                 <a:latin typeface="Calibri"/>
               </a:defRPr>
@@ -5330,7 +5330,7 @@
           <a:noFill/>
         </p:spPr>
         <p:txBody>
-          <a:bodyPr wrap="square">
+          <a:bodyPr wrap="none">
             <a:spAutoFit/>
           </a:bodyPr>
           <a:lstStyle/>
@@ -5411,7 +5411,7 @@
           <a:noFill/>
         </p:spPr>
         <p:txBody>
-          <a:bodyPr wrap="square">
+          <a:bodyPr wrap="none">
             <a:spAutoFit/>
           </a:bodyPr>
           <a:lstStyle/>
@@ -5419,7 +5419,7 @@
             <a:pPr algn="l">
               <a:defRPr sz="1500" b="1">
                 <a:solidFill>
-                  <a:srgbClr val="FFFFFF"/>
+                  <a:srgbClr val="F0E1C3"/>
                 </a:solidFill>
                 <a:latin typeface="Calibri"/>
               </a:defRPr>
@@ -5528,7 +5528,7 @@
           <a:noFill/>
         </p:spPr>
         <p:txBody>
-          <a:bodyPr wrap="square">
+          <a:bodyPr wrap="none">
             <a:spAutoFit/>
           </a:bodyPr>
           <a:lstStyle/>
@@ -5536,7 +5536,7 @@
             <a:pPr algn="l">
               <a:defRPr sz="1500" b="1">
                 <a:solidFill>
-                  <a:srgbClr val="FFFFFF"/>
+                  <a:srgbClr val="F0E1C3"/>
                 </a:solidFill>
                 <a:latin typeface="Calibri"/>
               </a:defRPr>
@@ -5645,7 +5645,7 @@
           <a:noFill/>
         </p:spPr>
         <p:txBody>
-          <a:bodyPr wrap="square">
+          <a:bodyPr wrap="none">
             <a:spAutoFit/>
           </a:bodyPr>
           <a:lstStyle/>
@@ -5653,7 +5653,7 @@
             <a:pPr algn="l">
               <a:defRPr sz="1500" b="1">
                 <a:solidFill>
-                  <a:srgbClr val="FFFFFF"/>
+                  <a:srgbClr val="F0E1C3"/>
                 </a:solidFill>
                 <a:latin typeface="Calibri"/>
               </a:defRPr>
@@ -5717,7 +5717,7 @@
           <a:noFill/>
         </p:spPr>
         <p:txBody>
-          <a:bodyPr wrap="square">
+          <a:bodyPr wrap="none">
             <a:spAutoFit/>
           </a:bodyPr>
           <a:lstStyle/>
@@ -5798,7 +5798,7 @@
           <a:noFill/>
         </p:spPr>
         <p:txBody>
-          <a:bodyPr wrap="square">
+          <a:bodyPr wrap="none">
             <a:spAutoFit/>
           </a:bodyPr>
           <a:lstStyle/>
@@ -5838,7 +5838,7 @@
           <a:noFill/>
         </p:spPr>
         <p:txBody>
-          <a:bodyPr wrap="square">
+          <a:bodyPr wrap="none">
             <a:spAutoFit/>
           </a:bodyPr>
           <a:lstStyle/>
@@ -5917,7 +5917,7 @@
           <a:noFill/>
         </p:spPr>
         <p:txBody>
-          <a:bodyPr wrap="square">
+          <a:bodyPr wrap="none">
             <a:spAutoFit/>
           </a:bodyPr>
           <a:lstStyle/>
@@ -5953,7 +5953,7 @@
           <a:noFill/>
         </p:spPr>
         <p:txBody>
-          <a:bodyPr wrap="square">
+          <a:bodyPr wrap="none">
             <a:spAutoFit/>
           </a:bodyPr>
           <a:lstStyle/>
@@ -6032,7 +6032,7 @@
           <a:noFill/>
         </p:spPr>
         <p:txBody>
-          <a:bodyPr wrap="square">
+          <a:bodyPr wrap="none">
             <a:spAutoFit/>
           </a:bodyPr>
           <a:lstStyle/>
@@ -6068,7 +6068,7 @@
           <a:noFill/>
         </p:spPr>
         <p:txBody>
-          <a:bodyPr wrap="square">
+          <a:bodyPr wrap="none">
             <a:spAutoFit/>
           </a:bodyPr>
           <a:lstStyle/>
@@ -6147,7 +6147,7 @@
           <a:noFill/>
         </p:spPr>
         <p:txBody>
-          <a:bodyPr wrap="square">
+          <a:bodyPr wrap="none">
             <a:spAutoFit/>
           </a:bodyPr>
           <a:lstStyle/>
@@ -6183,7 +6183,7 @@
           <a:noFill/>
         </p:spPr>
         <p:txBody>
-          <a:bodyPr wrap="square">
+          <a:bodyPr wrap="none">
             <a:spAutoFit/>
           </a:bodyPr>
           <a:lstStyle/>
@@ -6219,7 +6219,7 @@
           <a:noFill/>
         </p:spPr>
         <p:txBody>
-          <a:bodyPr wrap="square">
+          <a:bodyPr wrap="none">
             <a:spAutoFit/>
           </a:bodyPr>
           <a:lstStyle/>
@@ -6281,7 +6281,7 @@
           <a:noFill/>
         </p:spPr>
         <p:txBody>
-          <a:bodyPr wrap="square">
+          <a:bodyPr wrap="none">
             <a:spAutoFit/>
           </a:bodyPr>
           <a:lstStyle/>
@@ -6289,7 +6289,7 @@
             <a:pPr algn="l">
               <a:defRPr sz="3400" b="1">
                 <a:solidFill>
-                  <a:srgbClr val="FFFFFF"/>
+                  <a:srgbClr val="F0E1C3"/>
                 </a:solidFill>
                 <a:latin typeface="Calibri"/>
               </a:defRPr>
@@ -6448,7 +6448,7 @@
           <a:noFill/>
         </p:spPr>
         <p:txBody>
-          <a:bodyPr wrap="square">
+          <a:bodyPr wrap="none">
             <a:spAutoFit/>
           </a:bodyPr>
           <a:lstStyle/>
@@ -6528,7 +6528,7 @@
           <a:noFill/>
         </p:spPr>
         <p:txBody>
-          <a:bodyPr wrap="square">
+          <a:bodyPr wrap="none">
             <a:spAutoFit/>
           </a:bodyPr>
           <a:lstStyle/>
@@ -6652,7 +6652,7 @@
           <a:noFill/>
         </p:spPr>
         <p:txBody>
-          <a:bodyPr wrap="square">
+          <a:bodyPr wrap="none">
             <a:spAutoFit/>
           </a:bodyPr>
           <a:lstStyle/>
@@ -6732,7 +6732,7 @@
           <a:noFill/>
         </p:spPr>
         <p:txBody>
-          <a:bodyPr wrap="square">
+          <a:bodyPr wrap="none">
             <a:spAutoFit/>
           </a:bodyPr>
           <a:lstStyle/>
@@ -6856,7 +6856,7 @@
           <a:noFill/>
         </p:spPr>
         <p:txBody>
-          <a:bodyPr wrap="square">
+          <a:bodyPr wrap="none">
             <a:spAutoFit/>
           </a:bodyPr>
           <a:lstStyle/>
@@ -6936,7 +6936,7 @@
           <a:noFill/>
         </p:spPr>
         <p:txBody>
-          <a:bodyPr wrap="square">
+          <a:bodyPr wrap="none">
             <a:spAutoFit/>
           </a:bodyPr>
           <a:lstStyle/>
@@ -7017,7 +7017,7 @@
           <a:noFill/>
         </p:spPr>
         <p:txBody>
-          <a:bodyPr wrap="square">
+          <a:bodyPr wrap="none">
             <a:spAutoFit/>
           </a:bodyPr>
           <a:lstStyle/>
@@ -7098,7 +7098,7 @@
           <a:noFill/>
         </p:spPr>
         <p:txBody>
-          <a:bodyPr wrap="square">
+          <a:bodyPr wrap="none">
             <a:spAutoFit/>
           </a:bodyPr>
           <a:lstStyle/>
@@ -7179,7 +7179,7 @@
           <a:noFill/>
         </p:spPr>
         <p:txBody>
-          <a:bodyPr wrap="square">
+          <a:bodyPr wrap="none">
             <a:spAutoFit/>
           </a:bodyPr>
           <a:lstStyle/>
@@ -7260,7 +7260,7 @@
           <a:noFill/>
         </p:spPr>
         <p:txBody>
-          <a:bodyPr wrap="square">
+          <a:bodyPr wrap="none">
             <a:spAutoFit/>
           </a:bodyPr>
           <a:lstStyle/>
@@ -7341,7 +7341,7 @@
           <a:noFill/>
         </p:spPr>
         <p:txBody>
-          <a:bodyPr wrap="square">
+          <a:bodyPr wrap="none">
             <a:spAutoFit/>
           </a:bodyPr>
           <a:lstStyle/>
@@ -7422,7 +7422,7 @@
           <a:noFill/>
         </p:spPr>
         <p:txBody>
-          <a:bodyPr wrap="square">
+          <a:bodyPr wrap="none">
             <a:spAutoFit/>
           </a:bodyPr>
           <a:lstStyle/>
@@ -7458,7 +7458,7 @@
           <a:noFill/>
         </p:spPr>
         <p:txBody>
-          <a:bodyPr wrap="square">
+          <a:bodyPr wrap="none">
             <a:spAutoFit/>
           </a:bodyPr>
           <a:lstStyle/>
@@ -7539,7 +7539,7 @@
           <a:noFill/>
         </p:spPr>
         <p:txBody>
-          <a:bodyPr wrap="square">
+          <a:bodyPr wrap="none">
             <a:spAutoFit/>
           </a:bodyPr>
           <a:lstStyle/>
@@ -7620,7 +7620,7 @@
           <a:noFill/>
         </p:spPr>
         <p:txBody>
-          <a:bodyPr wrap="square">
+          <a:bodyPr wrap="none">
             <a:spAutoFit/>
           </a:bodyPr>
           <a:lstStyle/>
@@ -7701,7 +7701,7 @@
           <a:noFill/>
         </p:spPr>
         <p:txBody>
-          <a:bodyPr wrap="square">
+          <a:bodyPr wrap="none">
             <a:spAutoFit/>
           </a:bodyPr>
           <a:lstStyle/>
@@ -7782,7 +7782,7 @@
           <a:noFill/>
         </p:spPr>
         <p:txBody>
-          <a:bodyPr wrap="square">
+          <a:bodyPr wrap="none">
             <a:spAutoFit/>
           </a:bodyPr>
           <a:lstStyle/>
@@ -7863,7 +7863,7 @@
           <a:noFill/>
         </p:spPr>
         <p:txBody>
-          <a:bodyPr wrap="square">
+          <a:bodyPr wrap="none">
             <a:spAutoFit/>
           </a:bodyPr>
           <a:lstStyle/>
@@ -7944,7 +7944,7 @@
           <a:noFill/>
         </p:spPr>
         <p:txBody>
-          <a:bodyPr wrap="square">
+          <a:bodyPr wrap="none">
             <a:spAutoFit/>
           </a:bodyPr>
           <a:lstStyle/>
@@ -8006,7 +8006,7 @@
           <a:noFill/>
         </p:spPr>
         <p:txBody>
-          <a:bodyPr wrap="square">
+          <a:bodyPr wrap="none">
             <a:spAutoFit/>
           </a:bodyPr>
           <a:lstStyle/>
@@ -8014,7 +8014,7 @@
             <a:pPr algn="l">
               <a:defRPr sz="3400" b="1">
                 <a:solidFill>
-                  <a:srgbClr val="FFFFFF"/>
+                  <a:srgbClr val="F0E1C3"/>
                 </a:solidFill>
                 <a:latin typeface="Calibri"/>
               </a:defRPr>
@@ -8173,7 +8173,7 @@
           <a:noFill/>
         </p:spPr>
         <p:txBody>
-          <a:bodyPr wrap="square">
+          <a:bodyPr wrap="none">
             <a:spAutoFit/>
           </a:bodyPr>
           <a:lstStyle/>
@@ -8209,7 +8209,7 @@
           <a:noFill/>
         </p:spPr>
         <p:txBody>
-          <a:bodyPr wrap="square">
+          <a:bodyPr wrap="none">
             <a:spAutoFit/>
           </a:bodyPr>
           <a:lstStyle/>
@@ -8236,16 +8236,16 @@
         </p:nvSpPr>
         <p:spPr>
           <a:xfrm>
-            <a:off x="640080" y="2002536"/>
-            <a:ext cx="2103120" cy="274320"/>
-          </a:xfrm>
-          <a:prstGeom prst="rect">
-            <a:avLst/>
-          </a:prstGeom>
-          <a:noFill/>
-        </p:spPr>
-        <p:txBody>
-          <a:bodyPr wrap="square">
+            <a:off x="640080" y="2066544"/>
+            <a:ext cx="2423160" cy="256032"/>
+          </a:xfrm>
+          <a:prstGeom prst="rect">
+            <a:avLst/>
+          </a:prstGeom>
+          <a:noFill/>
+        </p:spPr>
+        <p:txBody>
+          <a:bodyPr wrap="none">
             <a:spAutoFit/>
           </a:bodyPr>
           <a:lstStyle/>
@@ -8272,16 +8272,16 @@
         </p:nvSpPr>
         <p:spPr>
           <a:xfrm>
-            <a:off x="2834640" y="2002536"/>
-            <a:ext cx="2743200" cy="274320"/>
-          </a:xfrm>
-          <a:prstGeom prst="rect">
-            <a:avLst/>
-          </a:prstGeom>
-          <a:noFill/>
-        </p:spPr>
-        <p:txBody>
-          <a:bodyPr wrap="square">
+            <a:off x="3154680" y="2066544"/>
+            <a:ext cx="2423160" cy="256032"/>
+          </a:xfrm>
+          <a:prstGeom prst="rect">
+            <a:avLst/>
+          </a:prstGeom>
+          <a:noFill/>
+        </p:spPr>
+        <p:txBody>
+          <a:bodyPr wrap="none">
             <a:spAutoFit/>
           </a:bodyPr>
           <a:lstStyle/>
@@ -8308,16 +8308,16 @@
         </p:nvSpPr>
         <p:spPr>
           <a:xfrm>
-            <a:off x="640080" y="2313432"/>
-            <a:ext cx="2103120" cy="274320"/>
-          </a:xfrm>
-          <a:prstGeom prst="rect">
-            <a:avLst/>
-          </a:prstGeom>
-          <a:noFill/>
-        </p:spPr>
-        <p:txBody>
-          <a:bodyPr wrap="square">
+            <a:off x="640080" y="2368296"/>
+            <a:ext cx="2423160" cy="256032"/>
+          </a:xfrm>
+          <a:prstGeom prst="rect">
+            <a:avLst/>
+          </a:prstGeom>
+          <a:noFill/>
+        </p:spPr>
+        <p:txBody>
+          <a:bodyPr wrap="none">
             <a:spAutoFit/>
           </a:bodyPr>
           <a:lstStyle/>
@@ -8344,16 +8344,16 @@
         </p:nvSpPr>
         <p:spPr>
           <a:xfrm>
-            <a:off x="2834640" y="2313432"/>
-            <a:ext cx="2743200" cy="274320"/>
-          </a:xfrm>
-          <a:prstGeom prst="rect">
-            <a:avLst/>
-          </a:prstGeom>
-          <a:noFill/>
-        </p:spPr>
-        <p:txBody>
-          <a:bodyPr wrap="square">
+            <a:off x="3154680" y="2368296"/>
+            <a:ext cx="2423160" cy="256032"/>
+          </a:xfrm>
+          <a:prstGeom prst="rect">
+            <a:avLst/>
+          </a:prstGeom>
+          <a:noFill/>
+        </p:spPr>
+        <p:txBody>
+          <a:bodyPr wrap="none">
             <a:spAutoFit/>
           </a:bodyPr>
           <a:lstStyle/>
@@ -8380,16 +8380,16 @@
         </p:nvSpPr>
         <p:spPr>
           <a:xfrm>
-            <a:off x="640080" y="2624328"/>
-            <a:ext cx="2103120" cy="274320"/>
-          </a:xfrm>
-          <a:prstGeom prst="rect">
-            <a:avLst/>
-          </a:prstGeom>
-          <a:noFill/>
-        </p:spPr>
-        <p:txBody>
-          <a:bodyPr wrap="square">
+            <a:off x="640080" y="2670048"/>
+            <a:ext cx="2423160" cy="256032"/>
+          </a:xfrm>
+          <a:prstGeom prst="rect">
+            <a:avLst/>
+          </a:prstGeom>
+          <a:noFill/>
+        </p:spPr>
+        <p:txBody>
+          <a:bodyPr wrap="none">
             <a:spAutoFit/>
           </a:bodyPr>
           <a:lstStyle/>
@@ -8416,16 +8416,16 @@
         </p:nvSpPr>
         <p:spPr>
           <a:xfrm>
-            <a:off x="2834640" y="2624328"/>
-            <a:ext cx="2743200" cy="274320"/>
-          </a:xfrm>
-          <a:prstGeom prst="rect">
-            <a:avLst/>
-          </a:prstGeom>
-          <a:noFill/>
-        </p:spPr>
-        <p:txBody>
-          <a:bodyPr wrap="square">
+            <a:off x="3154680" y="2670048"/>
+            <a:ext cx="2423160" cy="256032"/>
+          </a:xfrm>
+          <a:prstGeom prst="rect">
+            <a:avLst/>
+          </a:prstGeom>
+          <a:noFill/>
+        </p:spPr>
+        <p:txBody>
+          <a:bodyPr wrap="none">
             <a:spAutoFit/>
           </a:bodyPr>
           <a:lstStyle/>
@@ -8452,16 +8452,16 @@
         </p:nvSpPr>
         <p:spPr>
           <a:xfrm>
-            <a:off x="640080" y="2935224"/>
-            <a:ext cx="2103120" cy="274320"/>
-          </a:xfrm>
-          <a:prstGeom prst="rect">
-            <a:avLst/>
-          </a:prstGeom>
-          <a:noFill/>
-        </p:spPr>
-        <p:txBody>
-          <a:bodyPr wrap="square">
+            <a:off x="640080" y="2971800"/>
+            <a:ext cx="2423160" cy="256032"/>
+          </a:xfrm>
+          <a:prstGeom prst="rect">
+            <a:avLst/>
+          </a:prstGeom>
+          <a:noFill/>
+        </p:spPr>
+        <p:txBody>
+          <a:bodyPr wrap="none">
             <a:spAutoFit/>
           </a:bodyPr>
           <a:lstStyle/>
@@ -8488,16 +8488,16 @@
         </p:nvSpPr>
         <p:spPr>
           <a:xfrm>
-            <a:off x="2834640" y="2935224"/>
-            <a:ext cx="2743200" cy="274320"/>
-          </a:xfrm>
-          <a:prstGeom prst="rect">
-            <a:avLst/>
-          </a:prstGeom>
-          <a:noFill/>
-        </p:spPr>
-        <p:txBody>
-          <a:bodyPr wrap="square">
+            <a:off x="3154680" y="2971800"/>
+            <a:ext cx="2423160" cy="256032"/>
+          </a:xfrm>
+          <a:prstGeom prst="rect">
+            <a:avLst/>
+          </a:prstGeom>
+          <a:noFill/>
+        </p:spPr>
+        <p:txBody>
+          <a:bodyPr wrap="none">
             <a:spAutoFit/>
           </a:bodyPr>
           <a:lstStyle/>
@@ -8524,16 +8524,16 @@
         </p:nvSpPr>
         <p:spPr>
           <a:xfrm>
-            <a:off x="640080" y="3246120"/>
-            <a:ext cx="2103120" cy="274320"/>
-          </a:xfrm>
-          <a:prstGeom prst="rect">
-            <a:avLst/>
-          </a:prstGeom>
-          <a:noFill/>
-        </p:spPr>
-        <p:txBody>
-          <a:bodyPr wrap="square">
+            <a:off x="640080" y="3273552"/>
+            <a:ext cx="2423160" cy="256032"/>
+          </a:xfrm>
+          <a:prstGeom prst="rect">
+            <a:avLst/>
+          </a:prstGeom>
+          <a:noFill/>
+        </p:spPr>
+        <p:txBody>
+          <a:bodyPr wrap="none">
             <a:spAutoFit/>
           </a:bodyPr>
           <a:lstStyle/>
@@ -8560,16 +8560,16 @@
         </p:nvSpPr>
         <p:spPr>
           <a:xfrm>
-            <a:off x="2834640" y="3246120"/>
-            <a:ext cx="2743200" cy="274320"/>
-          </a:xfrm>
-          <a:prstGeom prst="rect">
-            <a:avLst/>
-          </a:prstGeom>
-          <a:noFill/>
-        </p:spPr>
-        <p:txBody>
-          <a:bodyPr wrap="square">
+            <a:off x="3154680" y="3273552"/>
+            <a:ext cx="2423160" cy="256032"/>
+          </a:xfrm>
+          <a:prstGeom prst="rect">
+            <a:avLst/>
+          </a:prstGeom>
+          <a:noFill/>
+        </p:spPr>
+        <p:txBody>
+          <a:bodyPr wrap="none">
             <a:spAutoFit/>
           </a:bodyPr>
           <a:lstStyle/>
@@ -8596,16 +8596,16 @@
         </p:nvSpPr>
         <p:spPr>
           <a:xfrm>
-            <a:off x="640080" y="3557016"/>
-            <a:ext cx="2103120" cy="274320"/>
-          </a:xfrm>
-          <a:prstGeom prst="rect">
-            <a:avLst/>
-          </a:prstGeom>
-          <a:noFill/>
-        </p:spPr>
-        <p:txBody>
-          <a:bodyPr wrap="square">
+            <a:off x="640080" y="3575304"/>
+            <a:ext cx="2423160" cy="256032"/>
+          </a:xfrm>
+          <a:prstGeom prst="rect">
+            <a:avLst/>
+          </a:prstGeom>
+          <a:noFill/>
+        </p:spPr>
+        <p:txBody>
+          <a:bodyPr wrap="none">
             <a:spAutoFit/>
           </a:bodyPr>
           <a:lstStyle/>
@@ -8632,16 +8632,16 @@
         </p:nvSpPr>
         <p:spPr>
           <a:xfrm>
-            <a:off x="2834640" y="3557016"/>
-            <a:ext cx="2743200" cy="274320"/>
-          </a:xfrm>
-          <a:prstGeom prst="rect">
-            <a:avLst/>
-          </a:prstGeom>
-          <a:noFill/>
-        </p:spPr>
-        <p:txBody>
-          <a:bodyPr wrap="square">
+            <a:off x="3154680" y="3575304"/>
+            <a:ext cx="2423160" cy="256032"/>
+          </a:xfrm>
+          <a:prstGeom prst="rect">
+            <a:avLst/>
+          </a:prstGeom>
+          <a:noFill/>
+        </p:spPr>
+        <p:txBody>
+          <a:bodyPr wrap="none">
             <a:spAutoFit/>
           </a:bodyPr>
           <a:lstStyle/>
@@ -8668,16 +8668,16 @@
         </p:nvSpPr>
         <p:spPr>
           <a:xfrm>
-            <a:off x="640080" y="3867912"/>
-            <a:ext cx="2103120" cy="274320"/>
-          </a:xfrm>
-          <a:prstGeom prst="rect">
-            <a:avLst/>
-          </a:prstGeom>
-          <a:noFill/>
-        </p:spPr>
-        <p:txBody>
-          <a:bodyPr wrap="square">
+            <a:off x="640080" y="3877056"/>
+            <a:ext cx="2423160" cy="256032"/>
+          </a:xfrm>
+          <a:prstGeom prst="rect">
+            <a:avLst/>
+          </a:prstGeom>
+          <a:noFill/>
+        </p:spPr>
+        <p:txBody>
+          <a:bodyPr wrap="none">
             <a:spAutoFit/>
           </a:bodyPr>
           <a:lstStyle/>
@@ -8704,16 +8704,16 @@
         </p:nvSpPr>
         <p:spPr>
           <a:xfrm>
-            <a:off x="2834640" y="3867912"/>
-            <a:ext cx="2743200" cy="274320"/>
-          </a:xfrm>
-          <a:prstGeom prst="rect">
-            <a:avLst/>
-          </a:prstGeom>
-          <a:noFill/>
-        </p:spPr>
-        <p:txBody>
-          <a:bodyPr wrap="square">
+            <a:off x="3154680" y="3877056"/>
+            <a:ext cx="2423160" cy="256032"/>
+          </a:xfrm>
+          <a:prstGeom prst="rect">
+            <a:avLst/>
+          </a:prstGeom>
+          <a:noFill/>
+        </p:spPr>
+        <p:txBody>
+          <a:bodyPr wrap="none">
             <a:spAutoFit/>
           </a:bodyPr>
           <a:lstStyle/>
@@ -8792,7 +8792,7 @@
           <a:noFill/>
         </p:spPr>
         <p:txBody>
-          <a:bodyPr wrap="square">
+          <a:bodyPr wrap="none">
             <a:spAutoFit/>
           </a:bodyPr>
           <a:lstStyle/>
@@ -8820,15 +8820,15 @@
         <p:spPr>
           <a:xfrm>
             <a:off x="640080" y="4489704"/>
-            <a:ext cx="2103120" cy="274320"/>
-          </a:xfrm>
-          <a:prstGeom prst="rect">
-            <a:avLst/>
-          </a:prstGeom>
-          <a:noFill/>
-        </p:spPr>
-        <p:txBody>
-          <a:bodyPr wrap="square">
+            <a:ext cx="2423160" cy="256032"/>
+          </a:xfrm>
+          <a:prstGeom prst="rect">
+            <a:avLst/>
+          </a:prstGeom>
+          <a:noFill/>
+        </p:spPr>
+        <p:txBody>
+          <a:bodyPr wrap="none">
             <a:spAutoFit/>
           </a:bodyPr>
           <a:lstStyle/>
@@ -8855,16 +8855,16 @@
         </p:nvSpPr>
         <p:spPr>
           <a:xfrm>
-            <a:off x="2834640" y="4489704"/>
-            <a:ext cx="2743200" cy="274320"/>
-          </a:xfrm>
-          <a:prstGeom prst="rect">
-            <a:avLst/>
-          </a:prstGeom>
-          <a:noFill/>
-        </p:spPr>
-        <p:txBody>
-          <a:bodyPr wrap="square">
+            <a:off x="3154680" y="4489704"/>
+            <a:ext cx="2423160" cy="256032"/>
+          </a:xfrm>
+          <a:prstGeom prst="rect">
+            <a:avLst/>
+          </a:prstGeom>
+          <a:noFill/>
+        </p:spPr>
+        <p:txBody>
+          <a:bodyPr wrap="none">
             <a:spAutoFit/>
           </a:bodyPr>
           <a:lstStyle/>
@@ -8891,16 +8891,16 @@
         </p:nvSpPr>
         <p:spPr>
           <a:xfrm>
-            <a:off x="640080" y="4800600"/>
-            <a:ext cx="2103120" cy="274320"/>
-          </a:xfrm>
-          <a:prstGeom prst="rect">
-            <a:avLst/>
-          </a:prstGeom>
-          <a:noFill/>
-        </p:spPr>
-        <p:txBody>
-          <a:bodyPr wrap="square">
+            <a:off x="640080" y="4791456"/>
+            <a:ext cx="2423160" cy="256032"/>
+          </a:xfrm>
+          <a:prstGeom prst="rect">
+            <a:avLst/>
+          </a:prstGeom>
+          <a:noFill/>
+        </p:spPr>
+        <p:txBody>
+          <a:bodyPr wrap="none">
             <a:spAutoFit/>
           </a:bodyPr>
           <a:lstStyle/>
@@ -8927,16 +8927,16 @@
         </p:nvSpPr>
         <p:spPr>
           <a:xfrm>
-            <a:off x="2834640" y="4800600"/>
-            <a:ext cx="2743200" cy="274320"/>
-          </a:xfrm>
-          <a:prstGeom prst="rect">
-            <a:avLst/>
-          </a:prstGeom>
-          <a:noFill/>
-        </p:spPr>
-        <p:txBody>
-          <a:bodyPr wrap="square">
+            <a:off x="3154680" y="4791456"/>
+            <a:ext cx="2423160" cy="256032"/>
+          </a:xfrm>
+          <a:prstGeom prst="rect">
+            <a:avLst/>
+          </a:prstGeom>
+          <a:noFill/>
+        </p:spPr>
+        <p:txBody>
+          <a:bodyPr wrap="none">
             <a:spAutoFit/>
           </a:bodyPr>
           <a:lstStyle/>
@@ -8963,16 +8963,16 @@
         </p:nvSpPr>
         <p:spPr>
           <a:xfrm>
-            <a:off x="640080" y="5111496"/>
-            <a:ext cx="2103120" cy="274320"/>
-          </a:xfrm>
-          <a:prstGeom prst="rect">
-            <a:avLst/>
-          </a:prstGeom>
-          <a:noFill/>
-        </p:spPr>
-        <p:txBody>
-          <a:bodyPr wrap="square">
+            <a:off x="640080" y="5093208"/>
+            <a:ext cx="2423160" cy="256032"/>
+          </a:xfrm>
+          <a:prstGeom prst="rect">
+            <a:avLst/>
+          </a:prstGeom>
+          <a:noFill/>
+        </p:spPr>
+        <p:txBody>
+          <a:bodyPr wrap="none">
             <a:spAutoFit/>
           </a:bodyPr>
           <a:lstStyle/>
@@ -8999,16 +8999,16 @@
         </p:nvSpPr>
         <p:spPr>
           <a:xfrm>
-            <a:off x="2834640" y="5111496"/>
-            <a:ext cx="2743200" cy="274320"/>
-          </a:xfrm>
-          <a:prstGeom prst="rect">
-            <a:avLst/>
-          </a:prstGeom>
-          <a:noFill/>
-        </p:spPr>
-        <p:txBody>
-          <a:bodyPr wrap="square">
+            <a:off x="3154680" y="5093208"/>
+            <a:ext cx="2423160" cy="256032"/>
+          </a:xfrm>
+          <a:prstGeom prst="rect">
+            <a:avLst/>
+          </a:prstGeom>
+          <a:noFill/>
+        </p:spPr>
+        <p:txBody>
+          <a:bodyPr wrap="none">
             <a:spAutoFit/>
           </a:bodyPr>
           <a:lstStyle/>
@@ -9132,7 +9132,7 @@
           <a:noFill/>
         </p:spPr>
         <p:txBody>
-          <a:bodyPr wrap="square">
+          <a:bodyPr wrap="none">
             <a:spAutoFit/>
           </a:bodyPr>
           <a:lstStyle/>
@@ -9168,7 +9168,7 @@
           <a:noFill/>
         </p:spPr>
         <p:txBody>
-          <a:bodyPr wrap="square">
+          <a:bodyPr wrap="none">
             <a:spAutoFit/>
           </a:bodyPr>
           <a:lstStyle/>
@@ -9195,16 +9195,16 @@
         </p:nvSpPr>
         <p:spPr>
           <a:xfrm>
-            <a:off x="6537960" y="2002536"/>
-            <a:ext cx="2103120" cy="274320"/>
-          </a:xfrm>
-          <a:prstGeom prst="rect">
-            <a:avLst/>
-          </a:prstGeom>
-          <a:noFill/>
-        </p:spPr>
-        <p:txBody>
-          <a:bodyPr wrap="square">
+            <a:off x="6537960" y="2066544"/>
+            <a:ext cx="2423160" cy="256032"/>
+          </a:xfrm>
+          <a:prstGeom prst="rect">
+            <a:avLst/>
+          </a:prstGeom>
+          <a:noFill/>
+        </p:spPr>
+        <p:txBody>
+          <a:bodyPr wrap="none">
             <a:spAutoFit/>
           </a:bodyPr>
           <a:lstStyle/>
@@ -9231,16 +9231,16 @@
         </p:nvSpPr>
         <p:spPr>
           <a:xfrm>
-            <a:off x="8732520" y="2002536"/>
-            <a:ext cx="2743200" cy="274320"/>
-          </a:xfrm>
-          <a:prstGeom prst="rect">
-            <a:avLst/>
-          </a:prstGeom>
-          <a:noFill/>
-        </p:spPr>
-        <p:txBody>
-          <a:bodyPr wrap="square">
+            <a:off x="9052560" y="2066544"/>
+            <a:ext cx="2423160" cy="256032"/>
+          </a:xfrm>
+          <a:prstGeom prst="rect">
+            <a:avLst/>
+          </a:prstGeom>
+          <a:noFill/>
+        </p:spPr>
+        <p:txBody>
+          <a:bodyPr wrap="none">
             <a:spAutoFit/>
           </a:bodyPr>
           <a:lstStyle/>
@@ -9267,16 +9267,16 @@
         </p:nvSpPr>
         <p:spPr>
           <a:xfrm>
-            <a:off x="6537960" y="2313432"/>
-            <a:ext cx="2103120" cy="274320"/>
-          </a:xfrm>
-          <a:prstGeom prst="rect">
-            <a:avLst/>
-          </a:prstGeom>
-          <a:noFill/>
-        </p:spPr>
-        <p:txBody>
-          <a:bodyPr wrap="square">
+            <a:off x="6537960" y="2368296"/>
+            <a:ext cx="2423160" cy="256032"/>
+          </a:xfrm>
+          <a:prstGeom prst="rect">
+            <a:avLst/>
+          </a:prstGeom>
+          <a:noFill/>
+        </p:spPr>
+        <p:txBody>
+          <a:bodyPr wrap="none">
             <a:spAutoFit/>
           </a:bodyPr>
           <a:lstStyle/>
@@ -9303,16 +9303,16 @@
         </p:nvSpPr>
         <p:spPr>
           <a:xfrm>
-            <a:off x="8732520" y="2313432"/>
-            <a:ext cx="2743200" cy="274320"/>
-          </a:xfrm>
-          <a:prstGeom prst="rect">
-            <a:avLst/>
-          </a:prstGeom>
-          <a:noFill/>
-        </p:spPr>
-        <p:txBody>
-          <a:bodyPr wrap="square">
+            <a:off x="9052560" y="2368296"/>
+            <a:ext cx="2423160" cy="256032"/>
+          </a:xfrm>
+          <a:prstGeom prst="rect">
+            <a:avLst/>
+          </a:prstGeom>
+          <a:noFill/>
+        </p:spPr>
+        <p:txBody>
+          <a:bodyPr wrap="none">
             <a:spAutoFit/>
           </a:bodyPr>
           <a:lstStyle/>
@@ -9339,16 +9339,16 @@
         </p:nvSpPr>
         <p:spPr>
           <a:xfrm>
-            <a:off x="6537960" y="2624328"/>
-            <a:ext cx="2103120" cy="274320"/>
-          </a:xfrm>
-          <a:prstGeom prst="rect">
-            <a:avLst/>
-          </a:prstGeom>
-          <a:noFill/>
-        </p:spPr>
-        <p:txBody>
-          <a:bodyPr wrap="square">
+            <a:off x="6537960" y="2670048"/>
+            <a:ext cx="2423160" cy="256032"/>
+          </a:xfrm>
+          <a:prstGeom prst="rect">
+            <a:avLst/>
+          </a:prstGeom>
+          <a:noFill/>
+        </p:spPr>
+        <p:txBody>
+          <a:bodyPr wrap="none">
             <a:spAutoFit/>
           </a:bodyPr>
           <a:lstStyle/>
@@ -9375,16 +9375,16 @@
         </p:nvSpPr>
         <p:spPr>
           <a:xfrm>
-            <a:off x="8732520" y="2624328"/>
-            <a:ext cx="2743200" cy="274320"/>
-          </a:xfrm>
-          <a:prstGeom prst="rect">
-            <a:avLst/>
-          </a:prstGeom>
-          <a:noFill/>
-        </p:spPr>
-        <p:txBody>
-          <a:bodyPr wrap="square">
+            <a:off x="9052560" y="2670048"/>
+            <a:ext cx="2423160" cy="256032"/>
+          </a:xfrm>
+          <a:prstGeom prst="rect">
+            <a:avLst/>
+          </a:prstGeom>
+          <a:noFill/>
+        </p:spPr>
+        <p:txBody>
+          <a:bodyPr wrap="none">
             <a:spAutoFit/>
           </a:bodyPr>
           <a:lstStyle/>
@@ -9411,16 +9411,16 @@
         </p:nvSpPr>
         <p:spPr>
           <a:xfrm>
-            <a:off x="6537960" y="2935224"/>
-            <a:ext cx="2103120" cy="274320"/>
-          </a:xfrm>
-          <a:prstGeom prst="rect">
-            <a:avLst/>
-          </a:prstGeom>
-          <a:noFill/>
-        </p:spPr>
-        <p:txBody>
-          <a:bodyPr wrap="square">
+            <a:off x="6537960" y="2971800"/>
+            <a:ext cx="2423160" cy="256032"/>
+          </a:xfrm>
+          <a:prstGeom prst="rect">
+            <a:avLst/>
+          </a:prstGeom>
+          <a:noFill/>
+        </p:spPr>
+        <p:txBody>
+          <a:bodyPr wrap="none">
             <a:spAutoFit/>
           </a:bodyPr>
           <a:lstStyle/>
@@ -9447,16 +9447,16 @@
         </p:nvSpPr>
         <p:spPr>
           <a:xfrm>
-            <a:off x="8732520" y="2935224"/>
-            <a:ext cx="2743200" cy="274320"/>
-          </a:xfrm>
-          <a:prstGeom prst="rect">
-            <a:avLst/>
-          </a:prstGeom>
-          <a:noFill/>
-        </p:spPr>
-        <p:txBody>
-          <a:bodyPr wrap="square">
+            <a:off x="9052560" y="2971800"/>
+            <a:ext cx="2423160" cy="256032"/>
+          </a:xfrm>
+          <a:prstGeom prst="rect">
+            <a:avLst/>
+          </a:prstGeom>
+          <a:noFill/>
+        </p:spPr>
+        <p:txBody>
+          <a:bodyPr wrap="none">
             <a:spAutoFit/>
           </a:bodyPr>
           <a:lstStyle/>
@@ -9483,16 +9483,16 @@
         </p:nvSpPr>
         <p:spPr>
           <a:xfrm>
-            <a:off x="6537960" y="3246120"/>
-            <a:ext cx="2103120" cy="274320"/>
-          </a:xfrm>
-          <a:prstGeom prst="rect">
-            <a:avLst/>
-          </a:prstGeom>
-          <a:noFill/>
-        </p:spPr>
-        <p:txBody>
-          <a:bodyPr wrap="square">
+            <a:off x="6537960" y="3273552"/>
+            <a:ext cx="2423160" cy="256032"/>
+          </a:xfrm>
+          <a:prstGeom prst="rect">
+            <a:avLst/>
+          </a:prstGeom>
+          <a:noFill/>
+        </p:spPr>
+        <p:txBody>
+          <a:bodyPr wrap="none">
             <a:spAutoFit/>
           </a:bodyPr>
           <a:lstStyle/>
@@ -9519,16 +9519,16 @@
         </p:nvSpPr>
         <p:spPr>
           <a:xfrm>
-            <a:off x="8732520" y="3246120"/>
-            <a:ext cx="2743200" cy="274320"/>
-          </a:xfrm>
-          <a:prstGeom prst="rect">
-            <a:avLst/>
-          </a:prstGeom>
-          <a:noFill/>
-        </p:spPr>
-        <p:txBody>
-          <a:bodyPr wrap="square">
+            <a:off x="9052560" y="3273552"/>
+            <a:ext cx="2423160" cy="256032"/>
+          </a:xfrm>
+          <a:prstGeom prst="rect">
+            <a:avLst/>
+          </a:prstGeom>
+          <a:noFill/>
+        </p:spPr>
+        <p:txBody>
+          <a:bodyPr wrap="none">
             <a:spAutoFit/>
           </a:bodyPr>
           <a:lstStyle/>
@@ -9555,16 +9555,16 @@
         </p:nvSpPr>
         <p:spPr>
           <a:xfrm>
-            <a:off x="6537960" y="3557016"/>
-            <a:ext cx="2103120" cy="274320"/>
-          </a:xfrm>
-          <a:prstGeom prst="rect">
-            <a:avLst/>
-          </a:prstGeom>
-          <a:noFill/>
-        </p:spPr>
-        <p:txBody>
-          <a:bodyPr wrap="square">
+            <a:off x="6537960" y="3575304"/>
+            <a:ext cx="2423160" cy="256032"/>
+          </a:xfrm>
+          <a:prstGeom prst="rect">
+            <a:avLst/>
+          </a:prstGeom>
+          <a:noFill/>
+        </p:spPr>
+        <p:txBody>
+          <a:bodyPr wrap="none">
             <a:spAutoFit/>
           </a:bodyPr>
           <a:lstStyle/>
@@ -9591,16 +9591,16 @@
         </p:nvSpPr>
         <p:spPr>
           <a:xfrm>
-            <a:off x="8732520" y="3557016"/>
-            <a:ext cx="2743200" cy="274320"/>
-          </a:xfrm>
-          <a:prstGeom prst="rect">
-            <a:avLst/>
-          </a:prstGeom>
-          <a:noFill/>
-        </p:spPr>
-        <p:txBody>
-          <a:bodyPr wrap="square">
+            <a:off x="9052560" y="3575304"/>
+            <a:ext cx="2423160" cy="256032"/>
+          </a:xfrm>
+          <a:prstGeom prst="rect">
+            <a:avLst/>
+          </a:prstGeom>
+          <a:noFill/>
+        </p:spPr>
+        <p:txBody>
+          <a:bodyPr wrap="none">
             <a:spAutoFit/>
           </a:bodyPr>
           <a:lstStyle/>
@@ -9627,16 +9627,16 @@
         </p:nvSpPr>
         <p:spPr>
           <a:xfrm>
-            <a:off x="6537960" y="3867912"/>
-            <a:ext cx="2103120" cy="274320"/>
-          </a:xfrm>
-          <a:prstGeom prst="rect">
-            <a:avLst/>
-          </a:prstGeom>
-          <a:noFill/>
-        </p:spPr>
-        <p:txBody>
-          <a:bodyPr wrap="square">
+            <a:off x="6537960" y="3877056"/>
+            <a:ext cx="2423160" cy="256032"/>
+          </a:xfrm>
+          <a:prstGeom prst="rect">
+            <a:avLst/>
+          </a:prstGeom>
+          <a:noFill/>
+        </p:spPr>
+        <p:txBody>
+          <a:bodyPr wrap="none">
             <a:spAutoFit/>
           </a:bodyPr>
           <a:lstStyle/>
@@ -9663,16 +9663,16 @@
         </p:nvSpPr>
         <p:spPr>
           <a:xfrm>
-            <a:off x="8732520" y="3867912"/>
-            <a:ext cx="2743200" cy="274320"/>
-          </a:xfrm>
-          <a:prstGeom prst="rect">
-            <a:avLst/>
-          </a:prstGeom>
-          <a:noFill/>
-        </p:spPr>
-        <p:txBody>
-          <a:bodyPr wrap="square">
+            <a:off x="9052560" y="3877056"/>
+            <a:ext cx="2423160" cy="256032"/>
+          </a:xfrm>
+          <a:prstGeom prst="rect">
+            <a:avLst/>
+          </a:prstGeom>
+          <a:noFill/>
+        </p:spPr>
+        <p:txBody>
+          <a:bodyPr wrap="none">
             <a:spAutoFit/>
           </a:bodyPr>
           <a:lstStyle/>
@@ -9751,7 +9751,7 @@
           <a:noFill/>
         </p:spPr>
         <p:txBody>
-          <a:bodyPr wrap="square">
+          <a:bodyPr wrap="none">
             <a:spAutoFit/>
           </a:bodyPr>
           <a:lstStyle/>
@@ -9779,15 +9779,15 @@
         <p:spPr>
           <a:xfrm>
             <a:off x="6537960" y="4489704"/>
-            <a:ext cx="2103120" cy="274320"/>
-          </a:xfrm>
-          <a:prstGeom prst="rect">
-            <a:avLst/>
-          </a:prstGeom>
-          <a:noFill/>
-        </p:spPr>
-        <p:txBody>
-          <a:bodyPr wrap="square">
+            <a:ext cx="2423160" cy="256032"/>
+          </a:xfrm>
+          <a:prstGeom prst="rect">
+            <a:avLst/>
+          </a:prstGeom>
+          <a:noFill/>
+        </p:spPr>
+        <p:txBody>
+          <a:bodyPr wrap="none">
             <a:spAutoFit/>
           </a:bodyPr>
           <a:lstStyle/>
@@ -9814,16 +9814,16 @@
         </p:nvSpPr>
         <p:spPr>
           <a:xfrm>
-            <a:off x="8732520" y="4489704"/>
-            <a:ext cx="2743200" cy="274320"/>
-          </a:xfrm>
-          <a:prstGeom prst="rect">
-            <a:avLst/>
-          </a:prstGeom>
-          <a:noFill/>
-        </p:spPr>
-        <p:txBody>
-          <a:bodyPr wrap="square">
+            <a:off x="9052560" y="4489704"/>
+            <a:ext cx="2423160" cy="256032"/>
+          </a:xfrm>
+          <a:prstGeom prst="rect">
+            <a:avLst/>
+          </a:prstGeom>
+          <a:noFill/>
+        </p:spPr>
+        <p:txBody>
+          <a:bodyPr wrap="none">
             <a:spAutoFit/>
           </a:bodyPr>
           <a:lstStyle/>
@@ -9850,16 +9850,16 @@
         </p:nvSpPr>
         <p:spPr>
           <a:xfrm>
-            <a:off x="6537960" y="4800600"/>
-            <a:ext cx="2103120" cy="274320"/>
-          </a:xfrm>
-          <a:prstGeom prst="rect">
-            <a:avLst/>
-          </a:prstGeom>
-          <a:noFill/>
-        </p:spPr>
-        <p:txBody>
-          <a:bodyPr wrap="square">
+            <a:off x="6537960" y="4791456"/>
+            <a:ext cx="2423160" cy="256032"/>
+          </a:xfrm>
+          <a:prstGeom prst="rect">
+            <a:avLst/>
+          </a:prstGeom>
+          <a:noFill/>
+        </p:spPr>
+        <p:txBody>
+          <a:bodyPr wrap="none">
             <a:spAutoFit/>
           </a:bodyPr>
           <a:lstStyle/>
@@ -9886,16 +9886,16 @@
         </p:nvSpPr>
         <p:spPr>
           <a:xfrm>
-            <a:off x="8732520" y="4800600"/>
-            <a:ext cx="2743200" cy="274320"/>
-          </a:xfrm>
-          <a:prstGeom prst="rect">
-            <a:avLst/>
-          </a:prstGeom>
-          <a:noFill/>
-        </p:spPr>
-        <p:txBody>
-          <a:bodyPr wrap="square">
+            <a:off x="9052560" y="4791456"/>
+            <a:ext cx="2423160" cy="256032"/>
+          </a:xfrm>
+          <a:prstGeom prst="rect">
+            <a:avLst/>
+          </a:prstGeom>
+          <a:noFill/>
+        </p:spPr>
+        <p:txBody>
+          <a:bodyPr wrap="none">
             <a:spAutoFit/>
           </a:bodyPr>
           <a:lstStyle/>
@@ -9922,16 +9922,16 @@
         </p:nvSpPr>
         <p:spPr>
           <a:xfrm>
-            <a:off x="6537960" y="5111496"/>
-            <a:ext cx="2103120" cy="274320"/>
-          </a:xfrm>
-          <a:prstGeom prst="rect">
-            <a:avLst/>
-          </a:prstGeom>
-          <a:noFill/>
-        </p:spPr>
-        <p:txBody>
-          <a:bodyPr wrap="square">
+            <a:off x="6537960" y="5093208"/>
+            <a:ext cx="2423160" cy="256032"/>
+          </a:xfrm>
+          <a:prstGeom prst="rect">
+            <a:avLst/>
+          </a:prstGeom>
+          <a:noFill/>
+        </p:spPr>
+        <p:txBody>
+          <a:bodyPr wrap="none">
             <a:spAutoFit/>
           </a:bodyPr>
           <a:lstStyle/>
@@ -9958,16 +9958,16 @@
         </p:nvSpPr>
         <p:spPr>
           <a:xfrm>
-            <a:off x="8732520" y="5111496"/>
-            <a:ext cx="2743200" cy="274320"/>
-          </a:xfrm>
-          <a:prstGeom prst="rect">
-            <a:avLst/>
-          </a:prstGeom>
-          <a:noFill/>
-        </p:spPr>
-        <p:txBody>
-          <a:bodyPr wrap="square">
+            <a:off x="9052560" y="5093208"/>
+            <a:ext cx="2423160" cy="256032"/>
+          </a:xfrm>
+          <a:prstGeom prst="rect">
+            <a:avLst/>
+          </a:prstGeom>
+          <a:noFill/>
+        </p:spPr>
+        <p:txBody>
+          <a:bodyPr wrap="none">
             <a:spAutoFit/>
           </a:bodyPr>
           <a:lstStyle/>
@@ -10091,7 +10091,7 @@
           <a:noFill/>
         </p:spPr>
         <p:txBody>
-          <a:bodyPr wrap="square">
+          <a:bodyPr wrap="none">
             <a:spAutoFit/>
           </a:bodyPr>
           <a:lstStyle/>
@@ -10127,7 +10127,7 @@
           <a:noFill/>
         </p:spPr>
         <p:txBody>
-          <a:bodyPr wrap="square">
+          <a:bodyPr wrap="none">
             <a:spAutoFit/>
           </a:bodyPr>
           <a:lstStyle/>
@@ -10163,7 +10163,7 @@
           <a:noFill/>
         </p:spPr>
         <p:txBody>
-          <a:bodyPr wrap="square">
+          <a:bodyPr wrap="none">
             <a:spAutoFit/>
           </a:bodyPr>
           <a:lstStyle/>
@@ -10190,16 +10190,16 @@
         </p:nvSpPr>
         <p:spPr>
           <a:xfrm>
-            <a:off x="3108960" y="6044184"/>
-            <a:ext cx="2103120" cy="256032"/>
-          </a:xfrm>
-          <a:prstGeom prst="rect">
-            <a:avLst/>
-          </a:prstGeom>
-          <a:noFill/>
-        </p:spPr>
-        <p:txBody>
-          <a:bodyPr wrap="square">
+            <a:off x="3108960" y="6025896"/>
+            <a:ext cx="2103120" cy="329184"/>
+          </a:xfrm>
+          <a:prstGeom prst="rect">
+            <a:avLst/>
+          </a:prstGeom>
+          <a:noFill/>
+        </p:spPr>
+        <p:txBody>
+          <a:bodyPr wrap="none">
             <a:spAutoFit/>
           </a:bodyPr>
           <a:lstStyle/>
@@ -10213,7 +10213,7 @@
               </a:defRPr>
             </a:pPr>
             <a:r>
-              <a:t>Anthropic · OpenAI · Google · Mistral · Cohere</a:t>
+              <a:t>Anthropic · OpenAI · Google · Mistral</a:t>
             </a:r>
           </a:p>
         </p:txBody>
@@ -10235,7 +10235,7 @@
           <a:noFill/>
         </p:spPr>
         <p:txBody>
-          <a:bodyPr wrap="square">
+          <a:bodyPr wrap="none">
             <a:spAutoFit/>
           </a:bodyPr>
           <a:lstStyle/>
@@ -10262,16 +10262,16 @@
         </p:nvSpPr>
         <p:spPr>
           <a:xfrm>
-            <a:off x="5257800" y="6044184"/>
-            <a:ext cx="2103120" cy="256032"/>
-          </a:xfrm>
-          <a:prstGeom prst="rect">
-            <a:avLst/>
-          </a:prstGeom>
-          <a:noFill/>
-        </p:spPr>
-        <p:txBody>
-          <a:bodyPr wrap="square">
+            <a:off x="5257800" y="6025896"/>
+            <a:ext cx="2103120" cy="329184"/>
+          </a:xfrm>
+          <a:prstGeom prst="rect">
+            <a:avLst/>
+          </a:prstGeom>
+          <a:noFill/>
+        </p:spPr>
+        <p:txBody>
+          <a:bodyPr wrap="none">
             <a:spAutoFit/>
           </a:bodyPr>
           <a:lstStyle/>
@@ -10307,7 +10307,7 @@
           <a:noFill/>
         </p:spPr>
         <p:txBody>
-          <a:bodyPr wrap="square">
+          <a:bodyPr wrap="none">
             <a:spAutoFit/>
           </a:bodyPr>
           <a:lstStyle/>
@@ -10334,16 +10334,16 @@
         </p:nvSpPr>
         <p:spPr>
           <a:xfrm>
-            <a:off x="7406640" y="6044184"/>
-            <a:ext cx="2103120" cy="256032"/>
-          </a:xfrm>
-          <a:prstGeom prst="rect">
-            <a:avLst/>
-          </a:prstGeom>
-          <a:noFill/>
-        </p:spPr>
-        <p:txBody>
-          <a:bodyPr wrap="square">
+            <a:off x="7406640" y="6025896"/>
+            <a:ext cx="2103120" cy="329184"/>
+          </a:xfrm>
+          <a:prstGeom prst="rect">
+            <a:avLst/>
+          </a:prstGeom>
+          <a:noFill/>
+        </p:spPr>
+        <p:txBody>
+          <a:bodyPr wrap="none">
             <a:spAutoFit/>
           </a:bodyPr>
           <a:lstStyle/>
@@ -10379,7 +10379,7 @@
           <a:noFill/>
         </p:spPr>
         <p:txBody>
-          <a:bodyPr wrap="square">
+          <a:bodyPr wrap="none">
             <a:spAutoFit/>
           </a:bodyPr>
           <a:lstStyle/>
@@ -10406,16 +10406,16 @@
         </p:nvSpPr>
         <p:spPr>
           <a:xfrm>
-            <a:off x="9555480" y="6044184"/>
-            <a:ext cx="2103120" cy="256032"/>
-          </a:xfrm>
-          <a:prstGeom prst="rect">
-            <a:avLst/>
-          </a:prstGeom>
-          <a:noFill/>
-        </p:spPr>
-        <p:txBody>
-          <a:bodyPr wrap="square">
+            <a:off x="9555480" y="6025896"/>
+            <a:ext cx="2103120" cy="329184"/>
+          </a:xfrm>
+          <a:prstGeom prst="rect">
+            <a:avLst/>
+          </a:prstGeom>
+          <a:noFill/>
+        </p:spPr>
+        <p:txBody>
+          <a:bodyPr wrap="none">
             <a:spAutoFit/>
           </a:bodyPr>
           <a:lstStyle/>
@@ -10485,7 +10485,7 @@
           <a:noFill/>
         </p:spPr>
         <p:txBody>
-          <a:bodyPr wrap="square">
+          <a:bodyPr wrap="none">
             <a:spAutoFit/>
           </a:bodyPr>
           <a:lstStyle/>
@@ -10493,7 +10493,7 @@
             <a:pPr algn="l">
               <a:defRPr sz="3400" b="1">
                 <a:solidFill>
-                  <a:srgbClr val="FFFFFF"/>
+                  <a:srgbClr val="F0E1C3"/>
                 </a:solidFill>
                 <a:latin typeface="Calibri"/>
               </a:defRPr>
@@ -10597,7 +10597,7 @@
           <a:noFill/>
         </p:spPr>
         <p:txBody>
-          <a:bodyPr wrap="square">
+          <a:bodyPr wrap="none">
             <a:spAutoFit/>
           </a:bodyPr>
           <a:lstStyle/>
@@ -10633,7 +10633,7 @@
           <a:noFill/>
         </p:spPr>
         <p:txBody>
-          <a:bodyPr wrap="square">
+          <a:bodyPr wrap="none">
             <a:spAutoFit/>
           </a:bodyPr>
           <a:lstStyle/>
@@ -10702,7 +10702,7 @@
           <a:noFill/>
         </p:spPr>
         <p:txBody>
-          <a:bodyPr wrap="square">
+          <a:bodyPr wrap="none">
             <a:spAutoFit/>
           </a:bodyPr>
           <a:lstStyle/>
@@ -10738,7 +10738,7 @@
           <a:noFill/>
         </p:spPr>
         <p:txBody>
-          <a:bodyPr wrap="square">
+          <a:bodyPr wrap="none">
             <a:spAutoFit/>
           </a:bodyPr>
           <a:lstStyle/>
